--- a/07_executive_recommendation.pptx
+++ b/07_executive_recommendation.pptx
@@ -1,24 +1,24 @@
 
 <file path=ppt/presentation.xml><?xml version="1.0" encoding="utf-8"?>
-<p:presentation xmlns:a="http://schemas.openxmlformats.org/drawingml/2006/main" xmlns:r="http://schemas.openxmlformats.org/officeDocument/2006/relationships" xmlns:p="http://schemas.openxmlformats.org/presentationml/2006/main" saveSubsetFonts="1" autoCompressPictures="0">
+<p:presentation xmlns:a="http://schemas.openxmlformats.org/drawingml/2006/main" xmlns:r="http://schemas.openxmlformats.org/officeDocument/2006/relationships" xmlns:p="http://schemas.openxmlformats.org/presentationml/2006/main" xmlns:m="http://schemas.openxmlformats.org/officeDocument/2006/math" xmlns:w="http://schemas.openxmlformats.org/wordprocessingml/2006/main" autoCompressPictures="0" saveSubsetFonts="1">
   <p:sldMasterIdLst>
     <p:sldMasterId id="2147483648" r:id="rId1"/>
   </p:sldMasterIdLst>
+  <p:notesMasterIdLst>
+    <p:notesMasterId r:id="rId8"/>
+  </p:notesMasterIdLst>
   <p:sldIdLst>
-    <p:sldId id="256" r:id="rId2"/>
-    <p:sldId id="257" r:id="rId3"/>
-    <p:sldId id="258" r:id="rId4"/>
-    <p:sldId id="259" r:id="rId5"/>
-    <p:sldId id="260" r:id="rId6"/>
+    <p:sldId id="256" r:id="rId3"/>
+    <p:sldId id="257" r:id="rId4"/>
+    <p:sldId id="258" r:id="rId5"/>
+    <p:sldId id="259" r:id="rId6"/>
+    <p:sldId id="260" r:id="rId7"/>
   </p:sldIdLst>
-  <p:notesMasterIdLst>
-    <p:notesMasterId r:id="rId7"/>
-  </p:notesMasterIdLst>
   <p:sldSz cx="9144000" cy="5143500"/>
   <p:notesSz cx="5143500" cy="9144000"/>
   <p:defaultTextStyle>
-    <a:lvl1pPr marL="0" algn="l" defTabSz="914400" rtl="0" eaLnBrk="1" latinLnBrk="0" hangingPunct="1">
-      <a:defRPr sz="1800" kern="1200">
+    <a:lvl1pPr marL="0" algn="l" defTabSz="914400" rtl="0">
+      <a:defRPr sz="1800">
         <a:solidFill>
           <a:schemeClr val="tx1"/>
         </a:solidFill>
@@ -27,8 +27,8 @@
         <a:cs typeface="+mn-cs"/>
       </a:defRPr>
     </a:lvl1pPr>
-    <a:lvl2pPr marL="457200" algn="l" defTabSz="914400" rtl="0" eaLnBrk="1" latinLnBrk="0" hangingPunct="1">
-      <a:defRPr sz="1800" kern="1200">
+    <a:lvl2pPr marL="457200" algn="l" defTabSz="914400" rtl="0">
+      <a:defRPr sz="1800">
         <a:solidFill>
           <a:schemeClr val="tx1"/>
         </a:solidFill>
@@ -37,8 +37,8 @@
         <a:cs typeface="+mn-cs"/>
       </a:defRPr>
     </a:lvl2pPr>
-    <a:lvl3pPr marL="914400" algn="l" defTabSz="914400" rtl="0" eaLnBrk="1" latinLnBrk="0" hangingPunct="1">
-      <a:defRPr sz="1800" kern="1200">
+    <a:lvl3pPr marL="914400" algn="l" defTabSz="914400" rtl="0">
+      <a:defRPr sz="1800">
         <a:solidFill>
           <a:schemeClr val="tx1"/>
         </a:solidFill>
@@ -47,8 +47,8 @@
         <a:cs typeface="+mn-cs"/>
       </a:defRPr>
     </a:lvl3pPr>
-    <a:lvl4pPr marL="1371600" algn="l" defTabSz="914400" rtl="0" eaLnBrk="1" latinLnBrk="0" hangingPunct="1">
-      <a:defRPr sz="1800" kern="1200">
+    <a:lvl4pPr marL="1371600" algn="l" defTabSz="914400" rtl="0">
+      <a:defRPr sz="1800">
         <a:solidFill>
           <a:schemeClr val="tx1"/>
         </a:solidFill>
@@ -57,8 +57,8 @@
         <a:cs typeface="+mn-cs"/>
       </a:defRPr>
     </a:lvl4pPr>
-    <a:lvl5pPr marL="1828800" algn="l" defTabSz="914400" rtl="0" eaLnBrk="1" latinLnBrk="0" hangingPunct="1">
-      <a:defRPr sz="1800" kern="1200">
+    <a:lvl5pPr marL="1828800" algn="l" defTabSz="914400" rtl="0">
+      <a:defRPr sz="1800">
         <a:solidFill>
           <a:schemeClr val="tx1"/>
         </a:solidFill>
@@ -67,8 +67,8 @@
         <a:cs typeface="+mn-cs"/>
       </a:defRPr>
     </a:lvl5pPr>
-    <a:lvl6pPr marL="2286000" algn="l" defTabSz="914400" rtl="0" eaLnBrk="1" latinLnBrk="0" hangingPunct="1">
-      <a:defRPr sz="1800" kern="1200">
+    <a:lvl6pPr marL="2286000" algn="l" defTabSz="914400" rtl="0">
+      <a:defRPr sz="1800">
         <a:solidFill>
           <a:schemeClr val="tx1"/>
         </a:solidFill>
@@ -77,8 +77,8 @@
         <a:cs typeface="+mn-cs"/>
       </a:defRPr>
     </a:lvl6pPr>
-    <a:lvl7pPr marL="2743200" algn="l" defTabSz="914400" rtl="0" eaLnBrk="1" latinLnBrk="0" hangingPunct="1">
-      <a:defRPr sz="1800" kern="1200">
+    <a:lvl7pPr marL="2743200" algn="l" defTabSz="914400" rtl="0">
+      <a:defRPr sz="1800">
         <a:solidFill>
           <a:schemeClr val="tx1"/>
         </a:solidFill>
@@ -87,8 +87,8 @@
         <a:cs typeface="+mn-cs"/>
       </a:defRPr>
     </a:lvl7pPr>
-    <a:lvl8pPr marL="3200400" algn="l" defTabSz="914400" rtl="0" eaLnBrk="1" latinLnBrk="0" hangingPunct="1">
-      <a:defRPr sz="1800" kern="1200">
+    <a:lvl8pPr marL="3200400" algn="l" defTabSz="914400" rtl="0">
+      <a:defRPr sz="1800">
         <a:solidFill>
           <a:schemeClr val="tx1"/>
         </a:solidFill>
@@ -97,8 +97,8 @@
         <a:cs typeface="+mn-cs"/>
       </a:defRPr>
     </a:lvl8pPr>
-    <a:lvl9pPr marL="3657600" algn="l" defTabSz="914400" rtl="0" eaLnBrk="1" latinLnBrk="0" hangingPunct="1">
-      <a:defRPr sz="1800" kern="1200">
+    <a:lvl9pPr marL="3657600" algn="l" defTabSz="914400" rtl="0">
+      <a:defRPr sz="1800">
         <a:solidFill>
           <a:schemeClr val="tx1"/>
         </a:solidFill>
@@ -112,9 +112,17 @@
 </file>
 
 <file path=ppt/charts/chart1.xml><?xml version="1.0" encoding="utf-8"?>
-<c:chartSpace xmlns:c="http://schemas.openxmlformats.org/drawingml/2006/chart" xmlns:a="http://schemas.openxmlformats.org/drawingml/2006/main" xmlns:r="http://schemas.openxmlformats.org/officeDocument/2006/relationships">
+<c:chartSpace xmlns:c="http://schemas.openxmlformats.org/drawingml/2006/chart" xmlns:a="http://schemas.openxmlformats.org/drawingml/2006/main" xmlns:r="http://schemas.openxmlformats.org/officeDocument/2006/relationships" xmlns:mc="http://schemas.openxmlformats.org/markup-compatibility/2006" xmlns:c15="http://schemas.microsoft.com/office/drawing/2012/chart" xmlns:c14="http://schemas.microsoft.com/office/drawing/2007/8/2/chart" xmlns:c16r2="http://schemas.microsoft.com/office/drawing/2015/06/chart">
   <c:date1904 val="0"/>
   <c:roundedCorners val="1"/>
+  <mc:AlternateContent>
+    <mc:Choice Requires="c14">
+      <c14:style val="102"/>
+    </mc:Choice>
+    <mc:Fallback>
+      <c:style val="2"/>
+    </mc:Fallback>
+  </mc:AlternateContent>
   <c:chart>
     <c:title>
       <c:tx>
@@ -139,6 +147,7 @@
               </a:rPr>
               <a:t>Contribution Profit per Successful Txn (USD)</a:t>
             </a:r>
+            <a:endParaRPr/>
           </a:p>
         </c:rich>
       </c:tx>
@@ -166,42 +175,24 @@
               </c:strCache>
             </c:strRef>
           </c:tx>
-          <c:spPr>
+          <c:spPr bwMode="auto">
+            <a:prstGeom prst="rect">
+              <a:avLst/>
+            </a:prstGeom>
             <a:solidFill>
               <a:srgbClr val="00897B"/>
             </a:solidFill>
             <a:effectLst/>
           </c:spPr>
           <c:invertIfNegative val="0"/>
-          <c:dLbls>
-            <c:numFmt formatCode="$0.00" sourceLinked="0"/>
-            <c:txPr>
-              <a:bodyPr/>
-              <a:lstStyle/>
-              <a:p>
-                <a:pPr>
-                  <a:defRPr b="0" i="0" strike="noStrike" sz="900" u="none">
-                    <a:solidFill>
-                      <a:srgbClr val="2C3E50"/>
-                    </a:solidFill>
-                    <a:latin typeface="Arial"/>
-                  </a:defRPr>
-                </a:pPr>
-              </a:p>
-            </c:txPr>
-            <c:showLegendKey val="0"/>
-            <c:showVal val="1"/>
-            <c:showCatName val="0"/>
-            <c:showSerName val="0"/>
-            <c:showPercent val="0"/>
-            <c:showBubbleSize val="0"/>
-            <c:showLeaderLines val="0"/>
-          </c:dLbls>
           <c:dPt>
             <c:idx val="0"/>
             <c:invertIfNegative val="0"/>
             <c:bubble3D val="0"/>
-            <c:spPr>
+            <c:spPr bwMode="auto">
+              <a:prstGeom prst="rect">
+                <a:avLst/>
+              </a:prstGeom>
               <a:solidFill>
                 <a:srgbClr val="00897B"/>
               </a:solidFill>
@@ -212,7 +203,10 @@
             <c:idx val="1"/>
             <c:invertIfNegative val="0"/>
             <c:bubble3D val="0"/>
-            <c:spPr>
+            <c:spPr bwMode="auto">
+              <a:prstGeom prst="rect">
+                <a:avLst/>
+              </a:prstGeom>
               <a:solidFill>
                 <a:srgbClr val="00897B"/>
               </a:solidFill>
@@ -223,7 +217,10 @@
             <c:idx val="2"/>
             <c:invertIfNegative val="0"/>
             <c:bubble3D val="0"/>
-            <c:spPr>
+            <c:spPr bwMode="auto">
+              <a:prstGeom prst="rect">
+                <a:avLst/>
+              </a:prstGeom>
               <a:solidFill>
                 <a:srgbClr val="00897B"/>
               </a:solidFill>
@@ -234,7 +231,10 @@
             <c:idx val="3"/>
             <c:invertIfNegative val="0"/>
             <c:bubble3D val="0"/>
-            <c:spPr>
+            <c:spPr bwMode="auto">
+              <a:prstGeom prst="rect">
+                <a:avLst/>
+              </a:prstGeom>
               <a:solidFill>
                 <a:srgbClr val="F4A31A"/>
               </a:solidFill>
@@ -245,7 +245,10 @@
             <c:idx val="4"/>
             <c:invertIfNegative val="0"/>
             <c:bubble3D val="0"/>
-            <c:spPr>
+            <c:spPr bwMode="auto">
+              <a:prstGeom prst="rect">
+                <a:avLst/>
+              </a:prstGeom>
               <a:solidFill>
                 <a:srgbClr val="F4A31A"/>
               </a:solidFill>
@@ -256,13 +259,41 @@
             <c:idx val="5"/>
             <c:invertIfNegative val="0"/>
             <c:bubble3D val="0"/>
-            <c:spPr>
+            <c:spPr bwMode="auto">
+              <a:prstGeom prst="rect">
+                <a:avLst/>
+              </a:prstGeom>
               <a:solidFill>
                 <a:srgbClr val="C0392B"/>
               </a:solidFill>
               <a:effectLst/>
             </c:spPr>
           </c:dPt>
+          <c:dLbls>
+            <c:numFmt formatCode="$0.00" sourceLinked="0"/>
+            <c:showBubbleSize val="0"/>
+            <c:showCatName val="0"/>
+            <c:showLeaderLines val="0"/>
+            <c:showLegendKey val="0"/>
+            <c:showPercent val="0"/>
+            <c:showSerName val="0"/>
+            <c:showVal val="1"/>
+            <c:txPr>
+              <a:bodyPr/>
+              <a:lstStyle/>
+              <a:p>
+                <a:pPr>
+                  <a:defRPr sz="900" b="0" i="0" u="none" strike="noStrike">
+                    <a:solidFill>
+                      <a:srgbClr val="2C3E50"/>
+                    </a:solidFill>
+                    <a:latin typeface="Arial"/>
+                  </a:defRPr>
+                </a:pPr>
+                <a:endParaRPr/>
+              </a:p>
+            </c:txPr>
+          </c:dLbls>
           <c:cat>
             <c:multiLvlStrRef>
               <c:f>Sheet1!$A$2:$A$7</c:f>
@@ -321,33 +352,33 @@
         </c:ser>
         <c:dLbls>
           <c:numFmt formatCode="$0.00" sourceLinked="0"/>
+          <c:showBubbleSize val="0"/>
+          <c:showCatName val="0"/>
+          <c:showLeaderLines val="0"/>
+          <c:showLegendKey val="0"/>
+          <c:showPercent val="0"/>
+          <c:showSerName val="0"/>
+          <c:showVal val="1"/>
           <c:txPr>
             <a:bodyPr/>
             <a:lstStyle/>
             <a:p>
               <a:pPr>
-                <a:defRPr b="0" i="0" strike="noStrike" sz="900" u="none">
+                <a:defRPr sz="900" b="0" i="0" u="none" strike="noStrike">
                   <a:solidFill>
                     <a:srgbClr val="2C3E50"/>
                   </a:solidFill>
                   <a:latin typeface="Arial"/>
                 </a:defRPr>
               </a:pPr>
+              <a:endParaRPr/>
             </a:p>
           </c:txPr>
-          <c:showLegendKey val="0"/>
-          <c:showVal val="1"/>
-          <c:showCatName val="0"/>
-          <c:showSerName val="0"/>
-          <c:showPercent val="0"/>
-          <c:showBubbleSize val="0"/>
-          <c:showLeaderLines val="0"/>
         </c:dLbls>
         <c:gapWidth val="150"/>
         <c:overlap val="0"/>
         <c:axId val="2094734554"/>
         <c:axId val="2094734552"/>
-        <c:axId val="2094734556"/>
       </c:barChart>
       <c:catAx>
         <c:axId val="2094734554"/>
@@ -360,7 +391,10 @@
         <c:majorTickMark val="out"/>
         <c:minorTickMark val="none"/>
         <c:tickLblPos val="low"/>
-        <c:spPr>
+        <c:spPr bwMode="auto">
+          <a:prstGeom prst="rect">
+            <a:avLst/>
+          </a:prstGeom>
           <a:ln w="12700" cap="flat">
             <a:solidFill>
               <a:srgbClr val="888888"/>
@@ -401,7 +435,10 @@
         <c:majorTickMark val="out"/>
         <c:minorTickMark val="none"/>
         <c:tickLblPos val="nextTo"/>
-        <c:spPr>
+        <c:spPr bwMode="auto">
+          <a:prstGeom prst="rect">
+            <a:avLst/>
+          </a:prstGeom>
           <a:ln w="12700" cap="flat">
             <a:solidFill>
               <a:srgbClr val="888888"/>
@@ -429,7 +466,10 @@
         <c:crosses val="autoZero"/>
         <c:crossBetween val="between"/>
       </c:valAx>
-      <c:spPr>
+      <c:spPr bwMode="auto">
+        <a:prstGeom prst="rect">
+          <a:avLst/>
+        </a:prstGeom>
         <a:noFill/>
         <a:ln>
           <a:noFill/>
@@ -439,8 +479,16 @@
     </c:plotArea>
     <c:plotVisOnly val="1"/>
     <c:dispBlanksAs val="span"/>
+    <c:showDLblsOverMax val="0"/>
   </c:chart>
-  <c:spPr>
+  <c:spPr bwMode="auto">
+    <a:xfrm rot="0">
+      <a:off x="274320" y="1115568"/>
+      <a:ext cx="3931920" cy="2286000"/>
+    </a:xfrm>
+    <a:prstGeom prst="rect">
+      <a:avLst/>
+    </a:prstGeom>
     <a:noFill/>
     <a:ln>
       <a:noFill/>
@@ -448,15 +496,23 @@
     <a:effectLst/>
   </c:spPr>
   <c:externalData r:id="rId1">
-    <c:autoUpdate val="0"/>
+    <c:autoUpdate val="1"/>
   </c:externalData>
 </c:chartSpace>
 </file>
 
 <file path=ppt/charts/chart2.xml><?xml version="1.0" encoding="utf-8"?>
-<c:chartSpace xmlns:c="http://schemas.openxmlformats.org/drawingml/2006/chart" xmlns:a="http://schemas.openxmlformats.org/drawingml/2006/main" xmlns:r="http://schemas.openxmlformats.org/officeDocument/2006/relationships">
+<c:chartSpace xmlns:c="http://schemas.openxmlformats.org/drawingml/2006/chart" xmlns:a="http://schemas.openxmlformats.org/drawingml/2006/main" xmlns:r="http://schemas.openxmlformats.org/officeDocument/2006/relationships" xmlns:mc="http://schemas.openxmlformats.org/markup-compatibility/2006" xmlns:c15="http://schemas.microsoft.com/office/drawing/2012/chart" xmlns:c14="http://schemas.microsoft.com/office/drawing/2007/8/2/chart" xmlns:c16r2="http://schemas.microsoft.com/office/drawing/2015/06/chart">
   <c:date1904 val="0"/>
   <c:roundedCorners val="1"/>
+  <mc:AlternateContent>
+    <mc:Choice Requires="c14">
+      <c14:style val="102"/>
+    </mc:Choice>
+    <mc:Fallback>
+      <c:style val="2"/>
+    </mc:Fallback>
+  </mc:AlternateContent>
   <c:chart>
     <c:title>
       <c:tx>
@@ -481,6 +537,7 @@
               </a:rPr>
               <a:t>Route R3 Share of Successful Volume</a:t>
             </a:r>
+            <a:endParaRPr/>
           </a:p>
         </c:rich>
       </c:tx>
@@ -506,7 +563,10 @@
               </c:strCache>
             </c:strRef>
           </c:tx>
-          <c:spPr>
+          <c:spPr bwMode="auto">
+            <a:prstGeom prst="rect">
+              <a:avLst/>
+            </a:prstGeom>
             <a:solidFill>
               <a:srgbClr val="C0392B"/>
             </a:solidFill>
@@ -519,49 +579,52 @@
             </a:ln>
             <a:effectLst/>
           </c:spPr>
-          <c:invertIfNegative val="0"/>
+          <c:marker>
+            <c:symbol val="circle"/>
+            <c:size val="6"/>
+            <c:spPr bwMode="auto">
+              <a:prstGeom prst="rect">
+                <a:avLst/>
+              </a:prstGeom>
+              <a:solidFill>
+                <a:srgbClr val="C0392B"/>
+              </a:solidFill>
+              <a:ln w="9525" cap="flat">
+                <a:solidFill>
+                  <a:srgbClr val="C0392B"/>
+                </a:solidFill>
+                <a:prstDash val="solid"/>
+                <a:round/>
+              </a:ln>
+              <a:effectLst/>
+            </c:spPr>
+          </c:marker>
           <c:dLbls>
+            <c:dLblPos val="t"/>
             <c:numFmt formatCode="0%" sourceLinked="0"/>
+            <c:showBubbleSize val="0"/>
+            <c:showCatName val="0"/>
+            <c:showLeaderLines val="0"/>
+            <c:showLegendKey val="0"/>
+            <c:showPercent val="0"/>
+            <c:showSerName val="0"/>
+            <c:showVal val="1"/>
             <c:txPr>
               <a:bodyPr/>
               <a:lstStyle/>
               <a:p>
                 <a:pPr>
-                  <a:defRPr b="0" i="0" strike="noStrike" sz="900" u="none">
+                  <a:defRPr sz="900" b="0" i="0" u="none" strike="noStrike">
                     <a:solidFill>
                       <a:srgbClr val="C0392B"/>
                     </a:solidFill>
                     <a:latin typeface="Arial"/>
                   </a:defRPr>
                 </a:pPr>
+                <a:endParaRPr/>
               </a:p>
             </c:txPr>
-            <c:dLblPos val="t"/>
-            <c:showLegendKey val="0"/>
-            <c:showVal val="1"/>
-            <c:showCatName val="0"/>
-            <c:showSerName val="0"/>
-            <c:showPercent val="0"/>
-            <c:showBubbleSize val="0"/>
-            <c:showLeaderLines val="0"/>
           </c:dLbls>
-          <c:marker>
-            <c:symbol val="circle"/>
-            <c:size val="6"/>
-            <c:spPr>
-              <a:solidFill>
-                <a:srgbClr val="C0392B"/>
-              </a:solidFill>
-              <a:ln w="9525" cap="flat">
-                <a:solidFill>
-                  <a:srgbClr val="C0392B"/>
-                </a:solidFill>
-                <a:prstDash val="solid"/>
-                <a:round/>
-              </a:ln>
-              <a:effectLst/>
-            </c:spPr>
-          </c:marker>
           <c:cat>
             <c:multiLvlStrRef>
               <c:f>Sheet1!$A$2:$A$7</c:f>
@@ -620,34 +683,35 @@
           <c:smooth val="0"/>
         </c:ser>
         <c:dLbls>
+          <c:dLblPos val="t"/>
           <c:numFmt formatCode="0%" sourceLinked="0"/>
+          <c:showBubbleSize val="0"/>
+          <c:showCatName val="0"/>
+          <c:showLeaderLines val="0"/>
+          <c:showLegendKey val="0"/>
+          <c:showPercent val="0"/>
+          <c:showSerName val="0"/>
+          <c:showVal val="1"/>
           <c:txPr>
             <a:bodyPr/>
             <a:lstStyle/>
             <a:p>
               <a:pPr>
-                <a:defRPr b="0" i="0" strike="noStrike" sz="900" u="none">
+                <a:defRPr sz="900" b="0" i="0" u="none" strike="noStrike">
                   <a:solidFill>
                     <a:srgbClr val="C0392B"/>
                   </a:solidFill>
                   <a:latin typeface="Arial"/>
                 </a:defRPr>
               </a:pPr>
+              <a:endParaRPr/>
             </a:p>
           </c:txPr>
-          <c:dLblPos val="t"/>
-          <c:showLegendKey val="0"/>
-          <c:showVal val="1"/>
-          <c:showCatName val="0"/>
-          <c:showSerName val="0"/>
-          <c:showPercent val="0"/>
-          <c:showBubbleSize val="0"/>
-          <c:showLeaderLines val="0"/>
         </c:dLbls>
         <c:marker val="1"/>
+        <c:smooth val="0"/>
         <c:axId val="2094734554"/>
         <c:axId val="2094734552"/>
-        <c:axId val="2094734556"/>
       </c:lineChart>
       <c:catAx>
         <c:axId val="2094734554"/>
@@ -660,7 +724,10 @@
         <c:majorTickMark val="out"/>
         <c:minorTickMark val="none"/>
         <c:tickLblPos val="low"/>
-        <c:spPr>
+        <c:spPr bwMode="auto">
+          <a:prstGeom prst="rect">
+            <a:avLst/>
+          </a:prstGeom>
           <a:ln w="12700" cap="flat">
             <a:solidFill>
               <a:srgbClr val="888888"/>
@@ -698,7 +765,10 @@
         <c:delete val="0"/>
         <c:axPos val="l"/>
         <c:majorGridlines>
-          <c:spPr>
+          <c:spPr bwMode="auto">
+            <a:prstGeom prst="rect">
+              <a:avLst/>
+            </a:prstGeom>
             <a:ln w="6350" cap="flat">
               <a:solidFill>
                 <a:srgbClr val="E0E0E0"/>
@@ -712,7 +782,10 @@
         <c:majorTickMark val="out"/>
         <c:minorTickMark val="none"/>
         <c:tickLblPos val="nextTo"/>
-        <c:spPr>
+        <c:spPr bwMode="auto">
+          <a:prstGeom prst="rect">
+            <a:avLst/>
+          </a:prstGeom>
           <a:ln w="12700" cap="flat">
             <a:solidFill>
               <a:srgbClr val="888888"/>
@@ -740,7 +813,10 @@
         <c:crosses val="autoZero"/>
         <c:crossBetween val="between"/>
       </c:valAx>
-      <c:spPr>
+      <c:spPr bwMode="auto">
+        <a:prstGeom prst="rect">
+          <a:avLst/>
+        </a:prstGeom>
         <a:noFill/>
         <a:ln>
           <a:noFill/>
@@ -750,8 +826,16 @@
     </c:plotArea>
     <c:plotVisOnly val="1"/>
     <c:dispBlanksAs val="span"/>
+    <c:showDLblsOverMax val="0"/>
   </c:chart>
-  <c:spPr>
+  <c:spPr bwMode="auto">
+    <a:xfrm rot="0">
+      <a:off x="4389120" y="1115568"/>
+      <a:ext cx="4480560" cy="2286000"/>
+    </a:xfrm>
+    <a:prstGeom prst="rect">
+      <a:avLst/>
+    </a:prstGeom>
     <a:noFill/>
     <a:ln>
       <a:noFill/>
@@ -759,14 +843,14 @@
     <a:effectLst/>
   </c:spPr>
   <c:externalData r:id="rId1">
-    <c:autoUpdate val="0"/>
+    <c:autoUpdate val="1"/>
   </c:externalData>
 </c:chartSpace>
 </file>
 
 <file path=ppt/notesMasters/notesMaster1.xml><?xml version="1.0" encoding="utf-8"?>
 <p:notesMaster xmlns:a="http://schemas.openxmlformats.org/drawingml/2006/main" xmlns:r="http://schemas.openxmlformats.org/officeDocument/2006/relationships" xmlns:p="http://schemas.openxmlformats.org/presentationml/2006/main">
-  <p:cSld>
+  <p:cSld name="">
     <p:bg>
       <p:bgRef idx="1001">
         <a:schemeClr val="bg1"/>
@@ -778,7 +862,7 @@
         <p:cNvGrpSpPr/>
         <p:nvPr/>
       </p:nvGrpSpPr>
-      <p:grpSpPr>
+      <p:grpSpPr bwMode="auto">
         <a:xfrm>
           <a:off x="0" y="0"/>
           <a:ext cx="0" cy="0"/>
@@ -788,7 +872,7 @@
       </p:grpSpPr>
       <p:sp>
         <p:nvSpPr>
-          <p:cNvPr id="2" name="Header Placeholder 1"/>
+          <p:cNvPr id="876626598" name="Header Placeholder 1"/>
           <p:cNvSpPr>
             <a:spLocks noGrp="1"/>
           </p:cNvSpPr>
@@ -796,7 +880,7 @@
             <p:ph type="hdr" sz="quarter"/>
           </p:nvPr>
         </p:nvSpPr>
-        <p:spPr>
+        <p:spPr bwMode="auto">
           <a:xfrm>
             <a:off x="0" y="0"/>
             <a:ext cx="2971800" cy="458788"/>
@@ -813,13 +897,16 @@
             </a:lvl1pPr>
           </a:lstStyle>
           <a:p>
+            <a:pPr>
+              <a:defRPr/>
+            </a:pPr>
             <a:endParaRPr lang="en-US"/>
           </a:p>
         </p:txBody>
       </p:sp>
       <p:sp>
         <p:nvSpPr>
-          <p:cNvPr id="3" name="Date Placeholder 2"/>
+          <p:cNvPr id="781168884" name="Date Placeholder 2"/>
           <p:cNvSpPr>
             <a:spLocks noGrp="1"/>
           </p:cNvSpPr>
@@ -827,7 +914,7 @@
             <p:ph type="dt" idx="1"/>
           </p:nvPr>
         </p:nvSpPr>
-        <p:spPr>
+        <p:spPr bwMode="auto">
           <a:xfrm>
             <a:off x="3884613" y="0"/>
             <a:ext cx="2971800" cy="458788"/>
@@ -844,6 +931,9 @@
             </a:lvl1pPr>
           </a:lstStyle>
           <a:p>
+            <a:pPr>
+              <a:defRPr/>
+            </a:pPr>
             <a:fld id="{5282F153-3F37-0F45-9E97-73ACFA13230C}" type="datetimeFigureOut">
               <a:rPr lang="en-US"/>
               <a:t>7/23/19</a:t>
@@ -854,15 +944,15 @@
       </p:sp>
       <p:sp>
         <p:nvSpPr>
-          <p:cNvPr id="4" name="Slide Image Placeholder 3"/>
+          <p:cNvPr id="2083075262" name="Slide Image Placeholder 3"/>
           <p:cNvSpPr>
-            <a:spLocks noGrp="1" noRot="1" noChangeAspect="1"/>
+            <a:spLocks noChangeAspect="1" noGrp="1" noRot="1"/>
           </p:cNvSpPr>
           <p:nvPr>
             <p:ph type="sldImg" idx="2"/>
           </p:nvPr>
         </p:nvSpPr>
-        <p:spPr>
+        <p:spPr bwMode="auto">
           <a:xfrm>
             <a:off x="685800" y="1143000"/>
             <a:ext cx="5486400" cy="3086100"/>
@@ -881,13 +971,16 @@
           <a:bodyPr vert="horz" lIns="91440" tIns="45720" rIns="91440" bIns="45720" rtlCol="0" anchor="ctr"/>
           <a:lstStyle/>
           <a:p>
+            <a:pPr>
+              <a:defRPr/>
+            </a:pPr>
             <a:endParaRPr lang="en-US"/>
           </a:p>
         </p:txBody>
       </p:sp>
       <p:sp>
         <p:nvSpPr>
-          <p:cNvPr id="5" name="Notes Placeholder 4"/>
+          <p:cNvPr id="1815003876" name="Notes Placeholder 4"/>
           <p:cNvSpPr>
             <a:spLocks noGrp="1"/>
           </p:cNvSpPr>
@@ -895,7 +988,7 @@
             <p:ph type="body" sz="quarter" idx="3"/>
           </p:nvPr>
         </p:nvSpPr>
-        <p:spPr>
+        <p:spPr bwMode="auto">
           <a:xfrm>
             <a:off x="685800" y="4400550"/>
             <a:ext cx="5486400" cy="3600450"/>
@@ -908,45 +1001,60 @@
           <a:bodyPr vert="horz" lIns="91440" tIns="45720" rIns="91440" bIns="45720" rtlCol="0"/>
           <a:lstStyle/>
           <a:p>
-            <a:pPr lvl="0"/>
+            <a:pPr lvl="0">
+              <a:defRPr/>
+            </a:pPr>
             <a:r>
               <a:rPr lang="en-US"/>
               <a:t>Click to edit Master text styles</a:t>
             </a:r>
-          </a:p>
-          <a:p>
-            <a:pPr lvl="1"/>
+            <a:endParaRPr/>
+          </a:p>
+          <a:p>
+            <a:pPr lvl="1">
+              <a:defRPr/>
+            </a:pPr>
             <a:r>
               <a:rPr lang="en-US"/>
               <a:t>Second level</a:t>
             </a:r>
-          </a:p>
-          <a:p>
-            <a:pPr lvl="2"/>
+            <a:endParaRPr/>
+          </a:p>
+          <a:p>
+            <a:pPr lvl="2">
+              <a:defRPr/>
+            </a:pPr>
             <a:r>
               <a:rPr lang="en-US"/>
               <a:t>Third level</a:t>
             </a:r>
-          </a:p>
-          <a:p>
-            <a:pPr lvl="3"/>
+            <a:endParaRPr/>
+          </a:p>
+          <a:p>
+            <a:pPr lvl="3">
+              <a:defRPr/>
+            </a:pPr>
             <a:r>
               <a:rPr lang="en-US"/>
               <a:t>Fourth level</a:t>
             </a:r>
-          </a:p>
-          <a:p>
-            <a:pPr lvl="4"/>
+            <a:endParaRPr/>
+          </a:p>
+          <a:p>
+            <a:pPr lvl="4">
+              <a:defRPr/>
+            </a:pPr>
             <a:r>
               <a:rPr lang="en-US"/>
               <a:t>Fifth level</a:t>
             </a:r>
-          </a:p>
-        </p:txBody>
-      </p:sp>
-      <p:sp>
-        <p:nvSpPr>
-          <p:cNvPr id="6" name="Footer Placeholder 5"/>
+            <a:endParaRPr/>
+          </a:p>
+        </p:txBody>
+      </p:sp>
+      <p:sp>
+        <p:nvSpPr>
+          <p:cNvPr id="1127261504" name="Footer Placeholder 5"/>
           <p:cNvSpPr>
             <a:spLocks noGrp="1"/>
           </p:cNvSpPr>
@@ -954,7 +1062,7 @@
             <p:ph type="ftr" sz="quarter" idx="4"/>
           </p:nvPr>
         </p:nvSpPr>
-        <p:spPr>
+        <p:spPr bwMode="auto">
           <a:xfrm>
             <a:off x="0" y="8685213"/>
             <a:ext cx="2971800" cy="458787"/>
@@ -971,13 +1079,16 @@
             </a:lvl1pPr>
           </a:lstStyle>
           <a:p>
+            <a:pPr>
+              <a:defRPr/>
+            </a:pPr>
             <a:endParaRPr lang="en-US"/>
           </a:p>
         </p:txBody>
       </p:sp>
       <p:sp>
         <p:nvSpPr>
-          <p:cNvPr id="7" name="Slide Number Placeholder 6"/>
+          <p:cNvPr id="1072282861" name="Slide Number Placeholder 6"/>
           <p:cNvSpPr>
             <a:spLocks noGrp="1"/>
           </p:cNvSpPr>
@@ -985,7 +1096,7 @@
             <p:ph type="sldNum" sz="quarter" idx="5"/>
           </p:nvPr>
         </p:nvSpPr>
-        <p:spPr>
+        <p:spPr bwMode="auto">
           <a:xfrm>
             <a:off x="3884613" y="8685213"/>
             <a:ext cx="2971800" cy="458787"/>
@@ -1002,6 +1113,9 @@
             </a:lvl1pPr>
           </a:lstStyle>
           <a:p>
+            <a:pPr>
+              <a:defRPr/>
+            </a:pPr>
             <a:fld id="{CE5E9CC1-C706-0F49-92D6-E571CC5EEA8F}" type="slidenum">
               <a:rPr lang="en-US"/>
               <a:t>‹#›</a:t>
@@ -1011,16 +1125,11 @@
         </p:txBody>
       </p:sp>
     </p:spTree>
-    <p:extLst>
-      <p:ext uri="{BB962C8B-B14F-4D97-AF65-F5344CB8AC3E}">
-        <p14:creationId xmlns:p14="http://schemas.microsoft.com/office/powerpoint/2010/main" val="1024086991"/>
-      </p:ext>
-    </p:extLst>
   </p:cSld>
   <p:clrMap bg1="lt1" tx1="dk1" bg2="lt2" tx2="dk2" accent1="accent1" accent2="accent2" accent3="accent3" accent4="accent4" accent5="accent5" accent6="accent6" hlink="hlink" folHlink="folHlink"/>
   <p:notesStyle>
-    <a:lvl1pPr marL="0" algn="l" defTabSz="914400" rtl="0" eaLnBrk="1" latinLnBrk="0" hangingPunct="1">
-      <a:defRPr sz="1200" kern="1200">
+    <a:lvl1pPr marL="0" algn="l" defTabSz="914400" rtl="0">
+      <a:defRPr sz="1200">
         <a:solidFill>
           <a:schemeClr val="tx1"/>
         </a:solidFill>
@@ -1029,8 +1138,8 @@
         <a:cs typeface="+mn-cs"/>
       </a:defRPr>
     </a:lvl1pPr>
-    <a:lvl2pPr marL="457200" algn="l" defTabSz="914400" rtl="0" eaLnBrk="1" latinLnBrk="0" hangingPunct="1">
-      <a:defRPr sz="1200" kern="1200">
+    <a:lvl2pPr marL="457200" algn="l" defTabSz="914400" rtl="0">
+      <a:defRPr sz="1200">
         <a:solidFill>
           <a:schemeClr val="tx1"/>
         </a:solidFill>
@@ -1039,8 +1148,8 @@
         <a:cs typeface="+mn-cs"/>
       </a:defRPr>
     </a:lvl2pPr>
-    <a:lvl3pPr marL="914400" algn="l" defTabSz="914400" rtl="0" eaLnBrk="1" latinLnBrk="0" hangingPunct="1">
-      <a:defRPr sz="1200" kern="1200">
+    <a:lvl3pPr marL="914400" algn="l" defTabSz="914400" rtl="0">
+      <a:defRPr sz="1200">
         <a:solidFill>
           <a:schemeClr val="tx1"/>
         </a:solidFill>
@@ -1049,8 +1158,8 @@
         <a:cs typeface="+mn-cs"/>
       </a:defRPr>
     </a:lvl3pPr>
-    <a:lvl4pPr marL="1371600" algn="l" defTabSz="914400" rtl="0" eaLnBrk="1" latinLnBrk="0" hangingPunct="1">
-      <a:defRPr sz="1200" kern="1200">
+    <a:lvl4pPr marL="1371600" algn="l" defTabSz="914400" rtl="0">
+      <a:defRPr sz="1200">
         <a:solidFill>
           <a:schemeClr val="tx1"/>
         </a:solidFill>
@@ -1059,8 +1168,8 @@
         <a:cs typeface="+mn-cs"/>
       </a:defRPr>
     </a:lvl4pPr>
-    <a:lvl5pPr marL="1828800" algn="l" defTabSz="914400" rtl="0" eaLnBrk="1" latinLnBrk="0" hangingPunct="1">
-      <a:defRPr sz="1200" kern="1200">
+    <a:lvl5pPr marL="1828800" algn="l" defTabSz="914400" rtl="0">
+      <a:defRPr sz="1200">
         <a:solidFill>
           <a:schemeClr val="tx1"/>
         </a:solidFill>
@@ -1069,8 +1178,8 @@
         <a:cs typeface="+mn-cs"/>
       </a:defRPr>
     </a:lvl5pPr>
-    <a:lvl6pPr marL="2286000" algn="l" defTabSz="914400" rtl="0" eaLnBrk="1" latinLnBrk="0" hangingPunct="1">
-      <a:defRPr sz="1200" kern="1200">
+    <a:lvl6pPr marL="2286000" algn="l" defTabSz="914400" rtl="0">
+      <a:defRPr sz="1200">
         <a:solidFill>
           <a:schemeClr val="tx1"/>
         </a:solidFill>
@@ -1079,8 +1188,8 @@
         <a:cs typeface="+mn-cs"/>
       </a:defRPr>
     </a:lvl6pPr>
-    <a:lvl7pPr marL="2743200" algn="l" defTabSz="914400" rtl="0" eaLnBrk="1" latinLnBrk="0" hangingPunct="1">
-      <a:defRPr sz="1200" kern="1200">
+    <a:lvl7pPr marL="2743200" algn="l" defTabSz="914400" rtl="0">
+      <a:defRPr sz="1200">
         <a:solidFill>
           <a:schemeClr val="tx1"/>
         </a:solidFill>
@@ -1089,8 +1198,8 @@
         <a:cs typeface="+mn-cs"/>
       </a:defRPr>
     </a:lvl7pPr>
-    <a:lvl8pPr marL="3200400" algn="l" defTabSz="914400" rtl="0" eaLnBrk="1" latinLnBrk="0" hangingPunct="1">
-      <a:defRPr sz="1200" kern="1200">
+    <a:lvl8pPr marL="3200400" algn="l" defTabSz="914400" rtl="0">
+      <a:defRPr sz="1200">
         <a:solidFill>
           <a:schemeClr val="tx1"/>
         </a:solidFill>
@@ -1099,8 +1208,8 @@
         <a:cs typeface="+mn-cs"/>
       </a:defRPr>
     </a:lvl8pPr>
-    <a:lvl9pPr marL="3657600" algn="l" defTabSz="914400" rtl="0" eaLnBrk="1" latinLnBrk="0" hangingPunct="1">
-      <a:defRPr sz="1200" kern="1200">
+    <a:lvl9pPr marL="3657600" algn="l" defTabSz="914400" rtl="0">
+      <a:defRPr sz="1200">
         <a:solidFill>
           <a:schemeClr val="tx1"/>
         </a:solidFill>
@@ -1114,15 +1223,15 @@
 </file>
 
 <file path=ppt/notesSlides/notesSlide1.xml><?xml version="1.0" encoding="utf-8"?>
-<p:notes xmlns:a="http://schemas.openxmlformats.org/drawingml/2006/main" xmlns:r="http://schemas.openxmlformats.org/officeDocument/2006/relationships" xmlns:p="http://schemas.openxmlformats.org/presentationml/2006/main">
-  <p:cSld>
+<p:notes xmlns:a="http://schemas.openxmlformats.org/drawingml/2006/main" xmlns:r="http://schemas.openxmlformats.org/officeDocument/2006/relationships" xmlns:p="http://schemas.openxmlformats.org/presentationml/2006/main" xmlns:m="http://schemas.openxmlformats.org/officeDocument/2006/math" xmlns:w="http://schemas.openxmlformats.org/wordprocessingml/2006/main">
+  <p:cSld name="">
     <p:spTree>
       <p:nvGrpSpPr>
         <p:cNvPr id="1" name=""/>
         <p:cNvGrpSpPr/>
         <p:nvPr/>
       </p:nvGrpSpPr>
-      <p:grpSpPr>
+      <p:grpSpPr bwMode="auto">
         <a:xfrm>
           <a:off x="0" y="0"/>
           <a:ext cx="0" cy="0"/>
@@ -1132,19 +1241,19 @@
       </p:grpSpPr>
       <p:sp>
         <p:nvSpPr>
-          <p:cNvPr id="2" name="Slide Image Placeholder 1"/>
+          <p:cNvPr id="484774420" name="Slide Image Placeholder 1"/>
           <p:cNvSpPr>
-            <a:spLocks noGrp="1" noRot="1" noChangeAspect="1"/>
+            <a:spLocks noChangeAspect="1" noGrp="1" noRot="1"/>
           </p:cNvSpPr>
           <p:nvPr>
             <p:ph type="sldImg"/>
           </p:nvPr>
         </p:nvSpPr>
-        <p:spPr/>
-      </p:sp>
-      <p:sp>
-        <p:nvSpPr>
-          <p:cNvPr id="3" name="Notes Placeholder 2"/>
+        <p:spPr bwMode="auto"/>
+      </p:sp>
+      <p:sp>
+        <p:nvSpPr>
+          <p:cNvPr id="1995495475" name="Notes Placeholder 2"/>
           <p:cNvSpPr>
             <a:spLocks noGrp="1"/>
           </p:cNvSpPr>
@@ -1152,22 +1261,25 @@
             <p:ph type="body" idx="1"/>
           </p:nvPr>
         </p:nvSpPr>
-        <p:spPr/>
+        <p:spPr bwMode="auto"/>
         <p:txBody>
           <a:bodyPr/>
           <a:lstStyle/>
           <a:p>
-            <a:r>
-              <a:rPr lang="en-US" dirty="0"/>
+            <a:pPr>
+              <a:defRPr/>
+            </a:pPr>
+            <a:r>
+              <a:rPr lang="en-US"/>
               <a:t>Title slide. AstraPay payment profitability diagnostic, Jan-Jun 2025. Five slides follow: Situation, Evidence, Diagnosis, 60-Day Plan, Risks.</a:t>
             </a:r>
-            <a:endParaRPr lang="en-US" dirty="0"/>
-          </a:p>
-        </p:txBody>
-      </p:sp>
-      <p:sp>
-        <p:nvSpPr>
-          <p:cNvPr id="4" name="Slide Number Placeholder 3"/>
+            <a:endParaRPr lang="en-US"/>
+          </a:p>
+        </p:txBody>
+      </p:sp>
+      <p:sp>
+        <p:nvSpPr>
+          <p:cNvPr id="1549157454" name="Slide Number Placeholder 3"/>
           <p:cNvSpPr>
             <a:spLocks noGrp="1"/>
           </p:cNvSpPr>
@@ -1175,11 +1287,14 @@
             <p:ph type="sldNum" sz="quarter" idx="10"/>
           </p:nvPr>
         </p:nvSpPr>
-        <p:spPr/>
+        <p:spPr bwMode="auto"/>
         <p:txBody>
           <a:bodyPr/>
           <a:lstStyle/>
           <a:p>
+            <a:pPr>
+              <a:defRPr/>
+            </a:pPr>
             <a:fld id="{F7021451-1387-4CA6-816F-3879F97B5CBC}" type="slidenum">
               <a:rPr lang="en-US"/>
               <a:t>1</a:t>
@@ -1189,11 +1304,6 @@
         </p:txBody>
       </p:sp>
     </p:spTree>
-    <p:extLst>
-      <p:ext uri="{BB962C8B-B14F-4D97-AF65-F5344CB8AC3E}">
-        <p14:creationId xmlns:p14="http://schemas.microsoft.com/office/powerpoint/2010/main" val="1024086991"/>
-      </p:ext>
-    </p:extLst>
   </p:cSld>
   <p:clrMapOvr>
     <a:masterClrMapping/>
@@ -1202,15 +1312,15 @@
 </file>
 
 <file path=ppt/notesSlides/notesSlide2.xml><?xml version="1.0" encoding="utf-8"?>
-<p:notes xmlns:a="http://schemas.openxmlformats.org/drawingml/2006/main" xmlns:r="http://schemas.openxmlformats.org/officeDocument/2006/relationships" xmlns:p="http://schemas.openxmlformats.org/presentationml/2006/main">
-  <p:cSld>
+<p:notes xmlns:a="http://schemas.openxmlformats.org/drawingml/2006/main" xmlns:r="http://schemas.openxmlformats.org/officeDocument/2006/relationships" xmlns:p="http://schemas.openxmlformats.org/presentationml/2006/main" xmlns:m="http://schemas.openxmlformats.org/officeDocument/2006/math" xmlns:w="http://schemas.openxmlformats.org/wordprocessingml/2006/main">
+  <p:cSld name="">
     <p:spTree>
       <p:nvGrpSpPr>
         <p:cNvPr id="1" name=""/>
         <p:cNvGrpSpPr/>
         <p:nvPr/>
       </p:nvGrpSpPr>
-      <p:grpSpPr>
+      <p:grpSpPr bwMode="auto">
         <a:xfrm>
           <a:off x="0" y="0"/>
           <a:ext cx="0" cy="0"/>
@@ -1220,19 +1330,19 @@
       </p:grpSpPr>
       <p:sp>
         <p:nvSpPr>
-          <p:cNvPr id="2" name="Slide Image Placeholder 1"/>
+          <p:cNvPr id="1703215660" name="Slide Image Placeholder 1"/>
           <p:cNvSpPr>
-            <a:spLocks noGrp="1" noRot="1" noChangeAspect="1"/>
+            <a:spLocks noChangeAspect="1" noGrp="1" noRot="1"/>
           </p:cNvSpPr>
           <p:nvPr>
             <p:ph type="sldImg"/>
           </p:nvPr>
         </p:nvSpPr>
-        <p:spPr/>
-      </p:sp>
-      <p:sp>
-        <p:nvSpPr>
-          <p:cNvPr id="3" name="Notes Placeholder 2"/>
+        <p:spPr bwMode="auto"/>
+      </p:sp>
+      <p:sp>
+        <p:nvSpPr>
+          <p:cNvPr id="299667779" name="Notes Placeholder 2"/>
           <p:cNvSpPr>
             <a:spLocks noGrp="1"/>
           </p:cNvSpPr>
@@ -1240,22 +1350,25 @@
             <p:ph type="body" idx="1"/>
           </p:nvPr>
         </p:nvSpPr>
-        <p:spPr/>
+        <p:spPr bwMode="auto"/>
         <p:txBody>
           <a:bodyPr/>
           <a:lstStyle/>
           <a:p>
-            <a:r>
-              <a:rPr lang="en-US" dirty="0"/>
+            <a:pPr>
+              <a:defRPr/>
+            </a:pPr>
+            <a:r>
+              <a:rPr lang="en-US"/>
               <a:t>Situation slide. Despite 62% volume growth, profit per successful transaction fell 85% — from $0.29 to $0.04. Four stakeholders gave four different explanations. This deck tells you which ones are correct and what to do about them.</a:t>
             </a:r>
-            <a:endParaRPr lang="en-US" dirty="0"/>
-          </a:p>
-        </p:txBody>
-      </p:sp>
-      <p:sp>
-        <p:nvSpPr>
-          <p:cNvPr id="4" name="Slide Number Placeholder 3"/>
+            <a:endParaRPr lang="en-US"/>
+          </a:p>
+        </p:txBody>
+      </p:sp>
+      <p:sp>
+        <p:nvSpPr>
+          <p:cNvPr id="837336026" name="Slide Number Placeholder 3"/>
           <p:cNvSpPr>
             <a:spLocks noGrp="1"/>
           </p:cNvSpPr>
@@ -1263,11 +1376,14 @@
             <p:ph type="sldNum" sz="quarter" idx="10"/>
           </p:nvPr>
         </p:nvSpPr>
-        <p:spPr/>
+        <p:spPr bwMode="auto"/>
         <p:txBody>
           <a:bodyPr/>
           <a:lstStyle/>
           <a:p>
+            <a:pPr>
+              <a:defRPr/>
+            </a:pPr>
             <a:fld id="{F7021451-1387-4CA6-816F-3879F97B5CBC}" type="slidenum">
               <a:rPr lang="en-US"/>
               <a:t>2</a:t>
@@ -1277,11 +1393,6 @@
         </p:txBody>
       </p:sp>
     </p:spTree>
-    <p:extLst>
-      <p:ext uri="{BB962C8B-B14F-4D97-AF65-F5344CB8AC3E}">
-        <p14:creationId xmlns:p14="http://schemas.microsoft.com/office/powerpoint/2010/main" val="1024086991"/>
-      </p:ext>
-    </p:extLst>
   </p:cSld>
   <p:clrMapOvr>
     <a:masterClrMapping/>
@@ -1290,15 +1401,15 @@
 </file>
 
 <file path=ppt/notesSlides/notesSlide3.xml><?xml version="1.0" encoding="utf-8"?>
-<p:notes xmlns:a="http://schemas.openxmlformats.org/drawingml/2006/main" xmlns:r="http://schemas.openxmlformats.org/officeDocument/2006/relationships" xmlns:p="http://schemas.openxmlformats.org/presentationml/2006/main">
-  <p:cSld>
+<p:notes xmlns:a="http://schemas.openxmlformats.org/drawingml/2006/main" xmlns:r="http://schemas.openxmlformats.org/officeDocument/2006/relationships" xmlns:p="http://schemas.openxmlformats.org/presentationml/2006/main" xmlns:m="http://schemas.openxmlformats.org/officeDocument/2006/math" xmlns:w="http://schemas.openxmlformats.org/wordprocessingml/2006/main">
+  <p:cSld name="">
     <p:spTree>
       <p:nvGrpSpPr>
         <p:cNvPr id="1" name=""/>
         <p:cNvGrpSpPr/>
         <p:nvPr/>
       </p:nvGrpSpPr>
-      <p:grpSpPr>
+      <p:grpSpPr bwMode="auto">
         <a:xfrm>
           <a:off x="0" y="0"/>
           <a:ext cx="0" cy="0"/>
@@ -1308,19 +1419,19 @@
       </p:grpSpPr>
       <p:sp>
         <p:nvSpPr>
-          <p:cNvPr id="2" name="Slide Image Placeholder 1"/>
+          <p:cNvPr id="126744712" name="Slide Image Placeholder 1"/>
           <p:cNvSpPr>
-            <a:spLocks noGrp="1" noRot="1" noChangeAspect="1"/>
+            <a:spLocks noChangeAspect="1" noGrp="1" noRot="1"/>
           </p:cNvSpPr>
           <p:nvPr>
             <p:ph type="sldImg"/>
           </p:nvPr>
         </p:nvSpPr>
-        <p:spPr/>
-      </p:sp>
-      <p:sp>
-        <p:nvSpPr>
-          <p:cNvPr id="3" name="Notes Placeholder 2"/>
+        <p:spPr bwMode="auto"/>
+      </p:sp>
+      <p:sp>
+        <p:nvSpPr>
+          <p:cNvPr id="1400994976" name="Notes Placeholder 2"/>
           <p:cNvSpPr>
             <a:spLocks noGrp="1"/>
           </p:cNvSpPr>
@@ -1328,22 +1439,25 @@
             <p:ph type="body" idx="1"/>
           </p:nvPr>
         </p:nvSpPr>
-        <p:spPr/>
+        <p:spPr bwMode="auto"/>
         <p:txBody>
           <a:bodyPr/>
           <a:lstStyle/>
           <a:p>
-            <a:r>
-              <a:rPr lang="en-US" dirty="0"/>
+            <a:pPr>
+              <a:defRPr/>
+            </a:pPr>
+            <a:r>
+              <a:rPr lang="en-US"/>
               <a:t>Evidence slide. Profit per successful transaction peaked at $0.348 in February and collapsed to $0.042 by June. Route R3's share of volume grew from 24.9% to 37.9% while its fee rose 33% on 1 April. Mix-vs-rate decomposition: R3 explains 61.7% of the decline (rate effect -$0.171, mix effect +$0.032). R4 explains 22.5%. Chargeback cost doubled, concentrated in Electronics and Digital Goods.</a:t>
             </a:r>
-            <a:endParaRPr lang="en-US" dirty="0"/>
-          </a:p>
-        </p:txBody>
-      </p:sp>
-      <p:sp>
-        <p:nvSpPr>
-          <p:cNvPr id="4" name="Slide Number Placeholder 3"/>
+            <a:endParaRPr lang="en-US"/>
+          </a:p>
+        </p:txBody>
+      </p:sp>
+      <p:sp>
+        <p:nvSpPr>
+          <p:cNvPr id="431040404" name="Slide Number Placeholder 3"/>
           <p:cNvSpPr>
             <a:spLocks noGrp="1"/>
           </p:cNvSpPr>
@@ -1351,11 +1465,14 @@
             <p:ph type="sldNum" sz="quarter" idx="10"/>
           </p:nvPr>
         </p:nvSpPr>
-        <p:spPr/>
+        <p:spPr bwMode="auto"/>
         <p:txBody>
           <a:bodyPr/>
           <a:lstStyle/>
           <a:p>
+            <a:pPr>
+              <a:defRPr/>
+            </a:pPr>
             <a:fld id="{F7021451-1387-4CA6-816F-3879F97B5CBC}" type="slidenum">
               <a:rPr lang="en-US"/>
               <a:t>3</a:t>
@@ -1365,11 +1482,6 @@
         </p:txBody>
       </p:sp>
     </p:spTree>
-    <p:extLst>
-      <p:ext uri="{BB962C8B-B14F-4D97-AF65-F5344CB8AC3E}">
-        <p14:creationId xmlns:p14="http://schemas.microsoft.com/office/powerpoint/2010/main" val="1024086991"/>
-      </p:ext>
-    </p:extLst>
   </p:cSld>
   <p:clrMapOvr>
     <a:masterClrMapping/>
@@ -1378,15 +1490,15 @@
 </file>
 
 <file path=ppt/notesSlides/notesSlide4.xml><?xml version="1.0" encoding="utf-8"?>
-<p:notes xmlns:a="http://schemas.openxmlformats.org/drawingml/2006/main" xmlns:r="http://schemas.openxmlformats.org/officeDocument/2006/relationships" xmlns:p="http://schemas.openxmlformats.org/presentationml/2006/main">
-  <p:cSld>
+<p:notes xmlns:a="http://schemas.openxmlformats.org/drawingml/2006/main" xmlns:r="http://schemas.openxmlformats.org/officeDocument/2006/relationships" xmlns:p="http://schemas.openxmlformats.org/presentationml/2006/main" xmlns:m="http://schemas.openxmlformats.org/officeDocument/2006/math" xmlns:w="http://schemas.openxmlformats.org/wordprocessingml/2006/main">
+  <p:cSld name="">
     <p:spTree>
       <p:nvGrpSpPr>
         <p:cNvPr id="1" name=""/>
         <p:cNvGrpSpPr/>
         <p:nvPr/>
       </p:nvGrpSpPr>
-      <p:grpSpPr>
+      <p:grpSpPr bwMode="auto">
         <a:xfrm>
           <a:off x="0" y="0"/>
           <a:ext cx="0" cy="0"/>
@@ -1396,19 +1508,19 @@
       </p:grpSpPr>
       <p:sp>
         <p:nvSpPr>
-          <p:cNvPr id="2" name="Slide Image Placeholder 1"/>
+          <p:cNvPr id="948142558" name="Slide Image Placeholder 1"/>
           <p:cNvSpPr>
-            <a:spLocks noGrp="1" noRot="1" noChangeAspect="1"/>
+            <a:spLocks noChangeAspect="1" noGrp="1" noRot="1"/>
           </p:cNvSpPr>
           <p:nvPr>
             <p:ph type="sldImg"/>
           </p:nvPr>
         </p:nvSpPr>
-        <p:spPr/>
-      </p:sp>
-      <p:sp>
-        <p:nvSpPr>
-          <p:cNvPr id="3" name="Notes Placeholder 2"/>
+        <p:spPr bwMode="auto"/>
+      </p:sp>
+      <p:sp>
+        <p:nvSpPr>
+          <p:cNvPr id="2117088250" name="Notes Placeholder 2"/>
           <p:cNvSpPr>
             <a:spLocks noGrp="1"/>
           </p:cNvSpPr>
@@ -1416,22 +1528,25 @@
             <p:ph type="body" idx="1"/>
           </p:nvPr>
         </p:nvSpPr>
-        <p:spPr/>
+        <p:spPr bwMode="auto"/>
         <p:txBody>
           <a:bodyPr/>
           <a:lstStyle/>
           <a:p>
-            <a:r>
-              <a:rPr lang="en-US" dirty="0"/>
+            <a:pPr>
+              <a:defRPr/>
+            </a:pPr>
+            <a:r>
+              <a:rPr lang="en-US"/>
               <a:t>Diagnosis slide. Two drivers confirmed: routing cost/mix (primary, 61.7%) and chargeback drift (secondary, Electronics/Digital Goods). Two claims weakened: fraud controls explain a volume problem but not per-transaction profit; pricing is a real but minor, narrow effect. The Risk Head's assumption — that fraud tightening explains falling profit per successful transaction — is the one stakeholder claim the data disproves.</a:t>
             </a:r>
-            <a:endParaRPr lang="en-US" dirty="0"/>
-          </a:p>
-        </p:txBody>
-      </p:sp>
-      <p:sp>
-        <p:nvSpPr>
-          <p:cNvPr id="4" name="Slide Number Placeholder 3"/>
+            <a:endParaRPr lang="en-US"/>
+          </a:p>
+        </p:txBody>
+      </p:sp>
+      <p:sp>
+        <p:nvSpPr>
+          <p:cNvPr id="1319037835" name="Slide Number Placeholder 3"/>
           <p:cNvSpPr>
             <a:spLocks noGrp="1"/>
           </p:cNvSpPr>
@@ -1439,11 +1554,14 @@
             <p:ph type="sldNum" sz="quarter" idx="10"/>
           </p:nvPr>
         </p:nvSpPr>
-        <p:spPr/>
+        <p:spPr bwMode="auto"/>
         <p:txBody>
           <a:bodyPr/>
           <a:lstStyle/>
           <a:p>
+            <a:pPr>
+              <a:defRPr/>
+            </a:pPr>
             <a:fld id="{F7021451-1387-4CA6-816F-3879F97B5CBC}" type="slidenum">
               <a:rPr lang="en-US"/>
               <a:t>4</a:t>
@@ -1453,11 +1571,6 @@
         </p:txBody>
       </p:sp>
     </p:spTree>
-    <p:extLst>
-      <p:ext uri="{BB962C8B-B14F-4D97-AF65-F5344CB8AC3E}">
-        <p14:creationId xmlns:p14="http://schemas.microsoft.com/office/powerpoint/2010/main" val="1024086991"/>
-      </p:ext>
-    </p:extLst>
   </p:cSld>
   <p:clrMapOvr>
     <a:masterClrMapping/>
@@ -1466,15 +1579,15 @@
 </file>
 
 <file path=ppt/notesSlides/notesSlide5.xml><?xml version="1.0" encoding="utf-8"?>
-<p:notes xmlns:a="http://schemas.openxmlformats.org/drawingml/2006/main" xmlns:r="http://schemas.openxmlformats.org/officeDocument/2006/relationships" xmlns:p="http://schemas.openxmlformats.org/presentationml/2006/main">
-  <p:cSld>
+<p:notes xmlns:a="http://schemas.openxmlformats.org/drawingml/2006/main" xmlns:r="http://schemas.openxmlformats.org/officeDocument/2006/relationships" xmlns:p="http://schemas.openxmlformats.org/presentationml/2006/main" xmlns:m="http://schemas.openxmlformats.org/officeDocument/2006/math" xmlns:w="http://schemas.openxmlformats.org/wordprocessingml/2006/main">
+  <p:cSld name="">
     <p:spTree>
       <p:nvGrpSpPr>
         <p:cNvPr id="1" name=""/>
         <p:cNvGrpSpPr/>
         <p:nvPr/>
       </p:nvGrpSpPr>
-      <p:grpSpPr>
+      <p:grpSpPr bwMode="auto">
         <a:xfrm>
           <a:off x="0" y="0"/>
           <a:ext cx="0" cy="0"/>
@@ -1484,19 +1597,19 @@
       </p:grpSpPr>
       <p:sp>
         <p:nvSpPr>
-          <p:cNvPr id="2" name="Slide Image Placeholder 1"/>
+          <p:cNvPr id="1102021203" name="Slide Image Placeholder 1"/>
           <p:cNvSpPr>
-            <a:spLocks noGrp="1" noRot="1" noChangeAspect="1"/>
+            <a:spLocks noChangeAspect="1" noGrp="1" noRot="1"/>
           </p:cNvSpPr>
           <p:nvPr>
             <p:ph type="sldImg"/>
           </p:nvPr>
         </p:nvSpPr>
-        <p:spPr/>
-      </p:sp>
-      <p:sp>
-        <p:nvSpPr>
-          <p:cNvPr id="3" name="Notes Placeholder 2"/>
+        <p:spPr bwMode="auto"/>
+      </p:sp>
+      <p:sp>
+        <p:nvSpPr>
+          <p:cNvPr id="1657473184" name="Notes Placeholder 2"/>
           <p:cNvSpPr>
             <a:spLocks noGrp="1"/>
           </p:cNvSpPr>
@@ -1504,22 +1617,25 @@
             <p:ph type="body" idx="1"/>
           </p:nvPr>
         </p:nvSpPr>
-        <p:spPr/>
+        <p:spPr bwMode="auto"/>
         <p:txBody>
           <a:bodyPr/>
           <a:lstStyle/>
           <a:p>
-            <a:r>
-              <a:rPr lang="en-US" dirty="0"/>
+            <a:pPr>
+              <a:defRPr/>
+            </a:pPr>
+            <a:r>
+              <a:rPr lang="en-US"/>
               <a:t>60-day action plan. Action 1 and 2 address the primary driver (routing cost/mix) immediately. Action 3 fixes data trust so results can be measured. Action 4 addresses the secondary commercial driver (chargeback drift). Action 5 reviews the fraud model which is a real operational issue but the wrong explanation for the per-transaction profit KPI. Key caveat: the data pipeline fixes (Action 3) must happen in parallel or none of the other actions can be monitored with confidence.</a:t>
             </a:r>
-            <a:endParaRPr lang="en-US" dirty="0"/>
-          </a:p>
-        </p:txBody>
-      </p:sp>
-      <p:sp>
-        <p:nvSpPr>
-          <p:cNvPr id="4" name="Slide Number Placeholder 3"/>
+            <a:endParaRPr lang="en-US"/>
+          </a:p>
+        </p:txBody>
+      </p:sp>
+      <p:sp>
+        <p:nvSpPr>
+          <p:cNvPr id="432450744" name="Slide Number Placeholder 3"/>
           <p:cNvSpPr>
             <a:spLocks noGrp="1"/>
           </p:cNvSpPr>
@@ -1527,11 +1643,14 @@
             <p:ph type="sldNum" sz="quarter" idx="10"/>
           </p:nvPr>
         </p:nvSpPr>
-        <p:spPr/>
+        <p:spPr bwMode="auto"/>
         <p:txBody>
           <a:bodyPr/>
           <a:lstStyle/>
           <a:p>
+            <a:pPr>
+              <a:defRPr/>
+            </a:pPr>
             <a:fld id="{F7021451-1387-4CA6-816F-3879F97B5CBC}" type="slidenum">
               <a:rPr lang="en-US"/>
               <a:t>5</a:t>
@@ -1541,11 +1660,6 @@
         </p:txBody>
       </p:sp>
     </p:spTree>
-    <p:extLst>
-      <p:ext uri="{BB962C8B-B14F-4D97-AF65-F5344CB8AC3E}">
-        <p14:creationId xmlns:p14="http://schemas.microsoft.com/office/powerpoint/2010/main" val="1024086991"/>
-      </p:ext>
-    </p:extLst>
   </p:cSld>
   <p:clrMapOvr>
     <a:masterClrMapping/>
@@ -1554,7 +1668,7 @@
 </file>
 
 <file path=ppt/slideLayouts/slideLayout1.xml><?xml version="1.0" encoding="utf-8"?>
-<p:sldLayout xmlns:a="http://schemas.openxmlformats.org/drawingml/2006/main" xmlns:r="http://schemas.openxmlformats.org/officeDocument/2006/relationships" xmlns:p="http://schemas.openxmlformats.org/presentationml/2006/main" preserve="1">
+<p:sldLayout xmlns:a="http://schemas.openxmlformats.org/drawingml/2006/main" xmlns:r="http://schemas.openxmlformats.org/officeDocument/2006/relationships" xmlns:p="http://schemas.openxmlformats.org/presentationml/2006/main" xmlns:m="http://schemas.openxmlformats.org/officeDocument/2006/math" xmlns:w="http://schemas.openxmlformats.org/wordprocessingml/2006/main" matchingName="" preserve="1" showMasterPhAnim="0" showMasterSp="1" userDrawn="1">
   <p:cSld name="DEFAULT">
     <p:bg>
       <p:bgRef idx="1001">
@@ -1567,7 +1681,7 @@
         <p:cNvGrpSpPr/>
         <p:nvPr/>
       </p:nvGrpSpPr>
-      <p:grpSpPr>
+      <p:grpSpPr bwMode="auto">
         <a:xfrm>
           <a:off x="0" y="0"/>
           <a:ext cx="0" cy="0"/>
@@ -1584,15 +1698,15 @@
 </file>
 
 <file path=ppt/slideMasters/slideMaster1.xml><?xml version="1.0" encoding="utf-8"?>
-<p:sldMaster xmlns:a="http://schemas.openxmlformats.org/drawingml/2006/main" xmlns:r="http://schemas.openxmlformats.org/officeDocument/2006/relationships" xmlns:p="http://schemas.openxmlformats.org/presentationml/2006/main">
-  <p:cSld>
+<p:sldMaster xmlns:a="http://schemas.openxmlformats.org/drawingml/2006/main" xmlns:r="http://schemas.openxmlformats.org/officeDocument/2006/relationships" xmlns:p="http://schemas.openxmlformats.org/presentationml/2006/main" xmlns:m="http://schemas.openxmlformats.org/officeDocument/2006/math" xmlns:w="http://schemas.openxmlformats.org/wordprocessingml/2006/main" preserve="0">
+  <p:cSld name="">
     <p:spTree>
       <p:nvGrpSpPr>
         <p:cNvPr id="1" name=""/>
         <p:cNvGrpSpPr/>
         <p:nvPr/>
       </p:nvGrpSpPr>
-      <p:grpSpPr>
+      <p:grpSpPr bwMode="auto">
         <a:xfrm>
           <a:off x="0" y="0"/>
           <a:ext cx="0" cy="0"/>
@@ -1606,15 +1720,15 @@
   <p:sldLayoutIdLst>
     <p:sldLayoutId id="2147483649" r:id="rId1"/>
   </p:sldLayoutIdLst>
-  <p:hf sldNum="0" hdr="0" ftr="0" dt="0"/>
+  <p:hf dt="0" ftr="0" hdr="0" sldNum="0"/>
   <p:txStyles>
     <p:titleStyle>
-      <a:lvl1pPr algn="ctr" defTabSz="914400" rtl="0" eaLnBrk="1" latinLnBrk="0" hangingPunct="1">
+      <a:lvl1pPr algn="ctr" defTabSz="914400" rtl="0">
         <a:spcBef>
-          <a:spcPct val="0"/>
+          <a:spcPts val="0"/>
         </a:spcBef>
         <a:buNone/>
-        <a:defRPr sz="4400" kern="1200">
+        <a:defRPr sz="4400">
           <a:solidFill>
             <a:schemeClr val="tx1"/>
           </a:solidFill>
@@ -1625,13 +1739,13 @@
       </a:lvl1pPr>
     </p:titleStyle>
     <p:bodyStyle>
-      <a:lvl1pPr marL="342900" indent="-342900" algn="l" defTabSz="914400" rtl="0" eaLnBrk="1" latinLnBrk="0" hangingPunct="1">
+      <a:lvl1pPr marL="342900" indent="-342900" algn="l" defTabSz="914400" rtl="0">
         <a:spcBef>
-          <a:spcPct val="20000"/>
+          <a:spcPts val="0"/>
         </a:spcBef>
-        <a:buFont typeface="Arial" pitchFamily="34" charset="0"/>
+        <a:buFont typeface="Arial"/>
         <a:buChar char="•"/>
-        <a:defRPr sz="3200" kern="1200">
+        <a:defRPr sz="3200">
           <a:solidFill>
             <a:schemeClr val="tx1"/>
           </a:solidFill>
@@ -1640,13 +1754,13 @@
           <a:cs typeface="+mn-cs"/>
         </a:defRPr>
       </a:lvl1pPr>
-      <a:lvl2pPr marL="742950" indent="-285750" algn="l" defTabSz="914400" rtl="0" eaLnBrk="1" latinLnBrk="0" hangingPunct="1">
+      <a:lvl2pPr marL="742950" indent="-285750" algn="l" defTabSz="914400" rtl="0">
         <a:spcBef>
-          <a:spcPct val="20000"/>
+          <a:spcPts val="0"/>
         </a:spcBef>
-        <a:buFont typeface="Arial" pitchFamily="34" charset="0"/>
+        <a:buFont typeface="Arial"/>
         <a:buChar char="–"/>
-        <a:defRPr sz="2800" kern="1200">
+        <a:defRPr sz="2800">
           <a:solidFill>
             <a:schemeClr val="tx1"/>
           </a:solidFill>
@@ -1655,13 +1769,13 @@
           <a:cs typeface="+mn-cs"/>
         </a:defRPr>
       </a:lvl2pPr>
-      <a:lvl3pPr marL="1143000" indent="-228600" algn="l" defTabSz="914400" rtl="0" eaLnBrk="1" latinLnBrk="0" hangingPunct="1">
+      <a:lvl3pPr marL="1143000" indent="-228600" algn="l" defTabSz="914400" rtl="0">
         <a:spcBef>
-          <a:spcPct val="20000"/>
+          <a:spcPts val="0"/>
         </a:spcBef>
-        <a:buFont typeface="Arial" pitchFamily="34" charset="0"/>
+        <a:buFont typeface="Arial"/>
         <a:buChar char="•"/>
-        <a:defRPr sz="2400" kern="1200">
+        <a:defRPr sz="2400">
           <a:solidFill>
             <a:schemeClr val="tx1"/>
           </a:solidFill>
@@ -1670,13 +1784,13 @@
           <a:cs typeface="+mn-cs"/>
         </a:defRPr>
       </a:lvl3pPr>
-      <a:lvl4pPr marL="1600200" indent="-228600" algn="l" defTabSz="914400" rtl="0" eaLnBrk="1" latinLnBrk="0" hangingPunct="1">
+      <a:lvl4pPr marL="1600200" indent="-228600" algn="l" defTabSz="914400" rtl="0">
         <a:spcBef>
-          <a:spcPct val="20000"/>
+          <a:spcPts val="0"/>
         </a:spcBef>
-        <a:buFont typeface="Arial" pitchFamily="34" charset="0"/>
+        <a:buFont typeface="Arial"/>
         <a:buChar char="–"/>
-        <a:defRPr sz="2000" kern="1200">
+        <a:defRPr sz="2000">
           <a:solidFill>
             <a:schemeClr val="tx1"/>
           </a:solidFill>
@@ -1685,13 +1799,13 @@
           <a:cs typeface="+mn-cs"/>
         </a:defRPr>
       </a:lvl4pPr>
-      <a:lvl5pPr marL="2057400" indent="-228600" algn="l" defTabSz="914400" rtl="0" eaLnBrk="1" latinLnBrk="0" hangingPunct="1">
+      <a:lvl5pPr marL="2057400" indent="-228600" algn="l" defTabSz="914400" rtl="0">
         <a:spcBef>
-          <a:spcPct val="20000"/>
+          <a:spcPts val="0"/>
         </a:spcBef>
-        <a:buFont typeface="Arial" pitchFamily="34" charset="0"/>
+        <a:buFont typeface="Arial"/>
         <a:buChar char="»"/>
-        <a:defRPr sz="2000" kern="1200">
+        <a:defRPr sz="2000">
           <a:solidFill>
             <a:schemeClr val="tx1"/>
           </a:solidFill>
@@ -1700,13 +1814,13 @@
           <a:cs typeface="+mn-cs"/>
         </a:defRPr>
       </a:lvl5pPr>
-      <a:lvl6pPr marL="2514600" indent="-228600" algn="l" defTabSz="914400" rtl="0" eaLnBrk="1" latinLnBrk="0" hangingPunct="1">
+      <a:lvl6pPr marL="2514600" indent="-228600" algn="l" defTabSz="914400" rtl="0">
         <a:spcBef>
-          <a:spcPct val="20000"/>
+          <a:spcPts val="0"/>
         </a:spcBef>
-        <a:buFont typeface="Arial" pitchFamily="34" charset="0"/>
+        <a:buFont typeface="Arial"/>
         <a:buChar char="•"/>
-        <a:defRPr sz="2000" kern="1200">
+        <a:defRPr sz="2000">
           <a:solidFill>
             <a:schemeClr val="tx1"/>
           </a:solidFill>
@@ -1715,13 +1829,13 @@
           <a:cs typeface="+mn-cs"/>
         </a:defRPr>
       </a:lvl6pPr>
-      <a:lvl7pPr marL="2971800" indent="-228600" algn="l" defTabSz="914400" rtl="0" eaLnBrk="1" latinLnBrk="0" hangingPunct="1">
+      <a:lvl7pPr marL="2971800" indent="-228600" algn="l" defTabSz="914400" rtl="0">
         <a:spcBef>
-          <a:spcPct val="20000"/>
+          <a:spcPts val="0"/>
         </a:spcBef>
-        <a:buFont typeface="Arial" pitchFamily="34" charset="0"/>
+        <a:buFont typeface="Arial"/>
         <a:buChar char="•"/>
-        <a:defRPr sz="2000" kern="1200">
+        <a:defRPr sz="2000">
           <a:solidFill>
             <a:schemeClr val="tx1"/>
           </a:solidFill>
@@ -1730,13 +1844,13 @@
           <a:cs typeface="+mn-cs"/>
         </a:defRPr>
       </a:lvl7pPr>
-      <a:lvl8pPr marL="3429000" indent="-228600" algn="l" defTabSz="914400" rtl="0" eaLnBrk="1" latinLnBrk="0" hangingPunct="1">
+      <a:lvl8pPr marL="3429000" indent="-228600" algn="l" defTabSz="914400" rtl="0">
         <a:spcBef>
-          <a:spcPct val="20000"/>
+          <a:spcPts val="0"/>
         </a:spcBef>
-        <a:buFont typeface="Arial" pitchFamily="34" charset="0"/>
+        <a:buFont typeface="Arial"/>
         <a:buChar char="•"/>
-        <a:defRPr sz="2000" kern="1200">
+        <a:defRPr sz="2000">
           <a:solidFill>
             <a:schemeClr val="tx1"/>
           </a:solidFill>
@@ -1745,13 +1859,13 @@
           <a:cs typeface="+mn-cs"/>
         </a:defRPr>
       </a:lvl8pPr>
-      <a:lvl9pPr marL="3886200" indent="-228600" algn="l" defTabSz="914400" rtl="0" eaLnBrk="1" latinLnBrk="0" hangingPunct="1">
+      <a:lvl9pPr marL="3886200" indent="-228600" algn="l" defTabSz="914400" rtl="0">
         <a:spcBef>
-          <a:spcPct val="20000"/>
+          <a:spcPts val="0"/>
         </a:spcBef>
-        <a:buFont typeface="Arial" pitchFamily="34" charset="0"/>
+        <a:buFont typeface="Arial"/>
         <a:buChar char="•"/>
-        <a:defRPr sz="2000" kern="1200">
+        <a:defRPr sz="2000">
           <a:solidFill>
             <a:schemeClr val="tx1"/>
           </a:solidFill>
@@ -1765,8 +1879,8 @@
       <a:defPPr>
         <a:defRPr lang="en-US"/>
       </a:defPPr>
-      <a:lvl1pPr marL="0" algn="l" defTabSz="914400" rtl="0" eaLnBrk="1" latinLnBrk="0" hangingPunct="1">
-        <a:defRPr sz="1800" kern="1200">
+      <a:lvl1pPr marL="0" algn="l" defTabSz="914400" rtl="0">
+        <a:defRPr sz="1800">
           <a:solidFill>
             <a:schemeClr val="tx1"/>
           </a:solidFill>
@@ -1775,8 +1889,8 @@
           <a:cs typeface="+mn-cs"/>
         </a:defRPr>
       </a:lvl1pPr>
-      <a:lvl2pPr marL="457200" algn="l" defTabSz="914400" rtl="0" eaLnBrk="1" latinLnBrk="0" hangingPunct="1">
-        <a:defRPr sz="1800" kern="1200">
+      <a:lvl2pPr marL="457200" algn="l" defTabSz="914400" rtl="0">
+        <a:defRPr sz="1800">
           <a:solidFill>
             <a:schemeClr val="tx1"/>
           </a:solidFill>
@@ -1785,8 +1899,8 @@
           <a:cs typeface="+mn-cs"/>
         </a:defRPr>
       </a:lvl2pPr>
-      <a:lvl3pPr marL="914400" algn="l" defTabSz="914400" rtl="0" eaLnBrk="1" latinLnBrk="0" hangingPunct="1">
-        <a:defRPr sz="1800" kern="1200">
+      <a:lvl3pPr marL="914400" algn="l" defTabSz="914400" rtl="0">
+        <a:defRPr sz="1800">
           <a:solidFill>
             <a:schemeClr val="tx1"/>
           </a:solidFill>
@@ -1795,8 +1909,8 @@
           <a:cs typeface="+mn-cs"/>
         </a:defRPr>
       </a:lvl3pPr>
-      <a:lvl4pPr marL="1371600" algn="l" defTabSz="914400" rtl="0" eaLnBrk="1" latinLnBrk="0" hangingPunct="1">
-        <a:defRPr sz="1800" kern="1200">
+      <a:lvl4pPr marL="1371600" algn="l" defTabSz="914400" rtl="0">
+        <a:defRPr sz="1800">
           <a:solidFill>
             <a:schemeClr val="tx1"/>
           </a:solidFill>
@@ -1805,8 +1919,8 @@
           <a:cs typeface="+mn-cs"/>
         </a:defRPr>
       </a:lvl4pPr>
-      <a:lvl5pPr marL="1828800" algn="l" defTabSz="914400" rtl="0" eaLnBrk="1" latinLnBrk="0" hangingPunct="1">
-        <a:defRPr sz="1800" kern="1200">
+      <a:lvl5pPr marL="1828800" algn="l" defTabSz="914400" rtl="0">
+        <a:defRPr sz="1800">
           <a:solidFill>
             <a:schemeClr val="tx1"/>
           </a:solidFill>
@@ -1815,8 +1929,8 @@
           <a:cs typeface="+mn-cs"/>
         </a:defRPr>
       </a:lvl5pPr>
-      <a:lvl6pPr marL="2286000" algn="l" defTabSz="914400" rtl="0" eaLnBrk="1" latinLnBrk="0" hangingPunct="1">
-        <a:defRPr sz="1800" kern="1200">
+      <a:lvl6pPr marL="2286000" algn="l" defTabSz="914400" rtl="0">
+        <a:defRPr sz="1800">
           <a:solidFill>
             <a:schemeClr val="tx1"/>
           </a:solidFill>
@@ -1825,8 +1939,8 @@
           <a:cs typeface="+mn-cs"/>
         </a:defRPr>
       </a:lvl6pPr>
-      <a:lvl7pPr marL="2743200" algn="l" defTabSz="914400" rtl="0" eaLnBrk="1" latinLnBrk="0" hangingPunct="1">
-        <a:defRPr sz="1800" kern="1200">
+      <a:lvl7pPr marL="2743200" algn="l" defTabSz="914400" rtl="0">
+        <a:defRPr sz="1800">
           <a:solidFill>
             <a:schemeClr val="tx1"/>
           </a:solidFill>
@@ -1835,8 +1949,8 @@
           <a:cs typeface="+mn-cs"/>
         </a:defRPr>
       </a:lvl7pPr>
-      <a:lvl8pPr marL="3200400" algn="l" defTabSz="914400" rtl="0" eaLnBrk="1" latinLnBrk="0" hangingPunct="1">
-        <a:defRPr sz="1800" kern="1200">
+      <a:lvl8pPr marL="3200400" algn="l" defTabSz="914400" rtl="0">
+        <a:defRPr sz="1800">
           <a:solidFill>
             <a:schemeClr val="tx1"/>
           </a:solidFill>
@@ -1845,8 +1959,8 @@
           <a:cs typeface="+mn-cs"/>
         </a:defRPr>
       </a:lvl8pPr>
-      <a:lvl9pPr marL="3657600" algn="l" defTabSz="914400" rtl="0" eaLnBrk="1" latinLnBrk="0" hangingPunct="1">
-        <a:defRPr sz="1800" kern="1200">
+      <a:lvl9pPr marL="3657600" algn="l" defTabSz="914400" rtl="0">
+        <a:defRPr sz="1800">
           <a:solidFill>
             <a:schemeClr val="tx1"/>
           </a:solidFill>
@@ -1861,7 +1975,7 @@
 </file>
 
 <file path=ppt/slides/slide1.xml><?xml version="1.0" encoding="utf-8"?>
-<p:sld xmlns:a="http://schemas.openxmlformats.org/drawingml/2006/main" xmlns:r="http://schemas.openxmlformats.org/officeDocument/2006/relationships" xmlns:p="http://schemas.openxmlformats.org/presentationml/2006/main">
+<p:sld xmlns:a="http://schemas.openxmlformats.org/drawingml/2006/main" xmlns:r="http://schemas.openxmlformats.org/officeDocument/2006/relationships" xmlns:p="http://schemas.openxmlformats.org/presentationml/2006/main" xmlns:m="http://schemas.openxmlformats.org/officeDocument/2006/math" xmlns:w="http://schemas.openxmlformats.org/wordprocessingml/2006/main" xmlns:mc="http://schemas.openxmlformats.org/markup-compatibility/2006" showMasterPhAnim="0" showMasterSp="1" show="1">
   <p:cSld name="Slide 1">
     <p:spTree>
       <p:nvGrpSpPr>
@@ -1869,7 +1983,7 @@
         <p:cNvGrpSpPr/>
         <p:nvPr/>
       </p:nvGrpSpPr>
-      <p:grpSpPr>
+      <p:grpSpPr bwMode="auto">
         <a:xfrm>
           <a:off x="0" y="0"/>
           <a:ext cx="0" cy="0"/>
@@ -1879,11 +1993,11 @@
       </p:grpSpPr>
       <p:sp>
         <p:nvSpPr>
-          <p:cNvPr id="2" name="Shape 0"/>
+          <p:cNvPr id="918129145" name="Shape 0"/>
           <p:cNvSpPr/>
           <p:nvPr/>
         </p:nvSpPr>
-        <p:spPr>
+        <p:spPr bwMode="auto">
           <a:xfrm>
             <a:off x="0" y="0"/>
             <a:ext cx="9144000" cy="5143500"/>
@@ -1899,11 +2013,11 @@
       </p:sp>
       <p:sp>
         <p:nvSpPr>
-          <p:cNvPr id="3" name="Shape 1"/>
+          <p:cNvPr id="1199059621" name="Shape 1"/>
           <p:cNvSpPr/>
           <p:nvPr/>
         </p:nvSpPr>
-        <p:spPr>
+        <p:spPr bwMode="auto">
           <a:xfrm>
             <a:off x="6766560" y="0"/>
             <a:ext cx="2377440" cy="5143500"/>
@@ -1919,11 +2033,11 @@
       </p:sp>
       <p:sp>
         <p:nvSpPr>
-          <p:cNvPr id="4" name="Shape 2"/>
+          <p:cNvPr id="1740470895" name="Shape 2"/>
           <p:cNvSpPr/>
           <p:nvPr/>
         </p:nvSpPr>
-        <p:spPr>
+        <p:spPr bwMode="auto">
           <a:xfrm>
             <a:off x="6748272" y="0"/>
             <a:ext cx="45720" cy="5143500"/>
@@ -1939,11 +2053,11 @@
       </p:sp>
       <p:sp>
         <p:nvSpPr>
-          <p:cNvPr id="5" name="Text 3"/>
-          <p:cNvSpPr txBox="1"/>
-          <p:nvPr/>
-        </p:nvSpPr>
-        <p:spPr>
+          <p:cNvPr id="2018607044" name="Text 3"/>
+          <p:cNvSpPr txBox="1"/>
+          <p:nvPr/>
+        </p:nvSpPr>
+        <p:spPr bwMode="auto">
           <a:xfrm>
             <a:off x="502920" y="475488"/>
             <a:ext cx="5943600" cy="347472"/>
@@ -1958,93 +2072,96 @@
           <a:bodyPr wrap="square" rtlCol="0" anchor="ctr"/>
           <a:lstStyle/>
           <a:p>
-            <a:pPr indent="0" marL="0">
-              <a:buNone/>
-            </a:pPr>
-            <a:r>
-              <a:rPr lang="en-US" sz="1100" b="1" spc="500" kern="0" dirty="0">
+            <a:pPr marL="0" indent="0">
+              <a:buNone/>
+              <a:defRPr/>
+            </a:pPr>
+            <a:r>
+              <a:rPr lang="en-US" sz="1100" b="1" spc="500">
                 <a:solidFill>
                   <a:srgbClr val="00897B"/>
                 </a:solidFill>
-                <a:latin typeface="Calibri" pitchFamily="34" charset="0"/>
-                <a:ea typeface="Calibri" pitchFamily="34" charset="-122"/>
-                <a:cs typeface="Calibri" pitchFamily="34" charset="-120"/>
+                <a:latin typeface="Calibri"/>
+                <a:ea typeface="Calibri"/>
+                <a:cs typeface="Calibri"/>
               </a:rPr>
               <a:t>ASTRAPAY</a:t>
             </a:r>
-            <a:endParaRPr lang="en-US" sz="1100" dirty="0"/>
-          </a:p>
-        </p:txBody>
-      </p:sp>
-      <p:sp>
-        <p:nvSpPr>
-          <p:cNvPr id="6" name="Text 4"/>
-          <p:cNvSpPr txBox="1"/>
-          <p:nvPr/>
-        </p:nvSpPr>
-        <p:spPr>
+            <a:endParaRPr lang="en-US" sz="1100"/>
+          </a:p>
+        </p:txBody>
+      </p:sp>
+      <p:sp>
+        <p:nvSpPr>
+          <p:cNvPr id="1922756989" name="Text 4"/>
+          <p:cNvSpPr txBox="1"/>
+          <p:nvPr/>
+        </p:nvSpPr>
+        <p:spPr bwMode="auto">
           <a:xfrm>
             <a:off x="502920" y="877824"/>
-            <a:ext cx="5943600" cy="1508760"/>
-          </a:xfrm>
-          <a:prstGeom prst="rect">
-            <a:avLst/>
-          </a:prstGeom>
-          <a:noFill/>
-          <a:ln/>
-        </p:spPr>
-        <p:txBody>
-          <a:bodyPr wrap="square" rtlCol="0" anchor="ctr"/>
-          <a:lstStyle/>
-          <a:p>
-            <a:pPr indent="0" marL="0">
+            <a:ext cx="5943600" cy="1508759"/>
+          </a:xfrm>
+          <a:prstGeom prst="rect">
+            <a:avLst/>
+          </a:prstGeom>
+          <a:noFill/>
+          <a:ln/>
+        </p:spPr>
+        <p:txBody>
+          <a:bodyPr wrap="square" rtlCol="0" anchor="ctr"/>
+          <a:lstStyle/>
+          <a:p>
+            <a:pPr marL="0" indent="0">
               <a:lnSpc>
                 <a:spcPct val="110000"/>
               </a:lnSpc>
               <a:buNone/>
-            </a:pPr>
-            <a:r>
-              <a:rPr lang="en-US" sz="4400" b="1" dirty="0">
+              <a:defRPr/>
+            </a:pPr>
+            <a:r>
+              <a:rPr lang="en-US" sz="4400" b="1">
                 <a:solidFill>
                   <a:srgbClr val="FFFFFF"/>
                 </a:solidFill>
-                <a:latin typeface="Cambria" pitchFamily="34" charset="0"/>
-                <a:ea typeface="Cambria" pitchFamily="34" charset="-122"/>
-                <a:cs typeface="Cambria" pitchFamily="34" charset="-120"/>
+                <a:latin typeface="Cambria"/>
+                <a:ea typeface="Cambria"/>
+                <a:cs typeface="Cambria"/>
               </a:rPr>
               <a:t>Payment Profitability</a:t>
             </a:r>
-            <a:endParaRPr lang="en-US" sz="4400" dirty="0"/>
-          </a:p>
-          <a:p>
-            <a:pPr indent="0" marL="0">
+            <a:endParaRPr lang="en-US" sz="4400"/>
+          </a:p>
+          <a:p>
+            <a:pPr marL="0" indent="0">
               <a:lnSpc>
                 <a:spcPct val="110000"/>
               </a:lnSpc>
               <a:buNone/>
-            </a:pPr>
-            <a:r>
-              <a:rPr lang="en-US" sz="4400" b="1" dirty="0">
+              <a:defRPr/>
+            </a:pPr>
+            <a:r>
+              <a:rPr lang="en-US" sz="4400" b="1">
                 <a:solidFill>
                   <a:srgbClr val="FFFFFF"/>
                 </a:solidFill>
-                <a:latin typeface="Cambria" pitchFamily="34" charset="0"/>
-                <a:ea typeface="Cambria" pitchFamily="34" charset="-122"/>
-                <a:cs typeface="Cambria" pitchFamily="34" charset="-120"/>
+                <a:latin typeface="Cambria"/>
+                <a:ea typeface="Cambria"/>
+                <a:cs typeface="Cambria"/>
               </a:rPr>
               <a:t>Diagnostic</a:t>
             </a:r>
-            <a:endParaRPr lang="en-US" sz="4400" dirty="0"/>
-          </a:p>
-        </p:txBody>
-      </p:sp>
-      <p:sp>
-        <p:nvSpPr>
-          <p:cNvPr id="7" name="Text 5"/>
-          <p:cNvSpPr txBox="1"/>
-          <p:nvPr/>
-        </p:nvSpPr>
-        <p:spPr>
+            <a:endParaRPr lang="en-US" sz="4400"/>
+          </a:p>
+        </p:txBody>
+      </p:sp>
+      <p:sp>
+        <p:nvSpPr>
+          <p:cNvPr id="89660754" name="Text 5"/>
+          <p:cNvSpPr txBox="1"/>
+          <p:nvPr/>
+        </p:nvSpPr>
+        <p:spPr bwMode="auto">
           <a:xfrm>
             <a:off x="502920" y="2487168"/>
             <a:ext cx="5943600" cy="329184"/>
@@ -2059,31 +2176,32 @@
           <a:bodyPr wrap="square" rtlCol="0" anchor="ctr"/>
           <a:lstStyle/>
           <a:p>
-            <a:pPr indent="0" marL="0">
-              <a:buNone/>
-            </a:pPr>
-            <a:r>
-              <a:rPr lang="en-US" sz="1600" dirty="0">
+            <a:pPr marL="0" indent="0">
+              <a:buNone/>
+              <a:defRPr/>
+            </a:pPr>
+            <a:r>
+              <a:rPr lang="en-US" sz="1600">
                 <a:solidFill>
                   <a:srgbClr val="00897B"/>
                 </a:solidFill>
-                <a:latin typeface="Cambria" pitchFamily="34" charset="0"/>
-                <a:ea typeface="Cambria" pitchFamily="34" charset="-122"/>
-                <a:cs typeface="Cambria" pitchFamily="34" charset="-120"/>
+                <a:latin typeface="Cambria"/>
+                <a:ea typeface="Cambria"/>
+                <a:cs typeface="Cambria"/>
               </a:rPr>
               <a:t>Executive Recommendation</a:t>
             </a:r>
-            <a:endParaRPr lang="en-US" sz="1600" dirty="0"/>
-          </a:p>
-        </p:txBody>
-      </p:sp>
-      <p:sp>
-        <p:nvSpPr>
-          <p:cNvPr id="8" name="Text 6"/>
-          <p:cNvSpPr txBox="1"/>
-          <p:nvPr/>
-        </p:nvSpPr>
-        <p:spPr>
+            <a:endParaRPr lang="en-US" sz="1600"/>
+          </a:p>
+        </p:txBody>
+      </p:sp>
+      <p:sp>
+        <p:nvSpPr>
+          <p:cNvPr id="1068263580" name="Text 6"/>
+          <p:cNvSpPr txBox="1"/>
+          <p:nvPr/>
+        </p:nvSpPr>
+        <p:spPr bwMode="auto">
           <a:xfrm>
             <a:off x="502920" y="2907792"/>
             <a:ext cx="5943600" cy="256032"/>
@@ -2098,31 +2216,32 @@
           <a:bodyPr wrap="square" rtlCol="0" anchor="ctr"/>
           <a:lstStyle/>
           <a:p>
-            <a:pPr indent="0" marL="0">
-              <a:buNone/>
-            </a:pPr>
-            <a:r>
-              <a:rPr lang="en-US" sz="1100" dirty="0">
+            <a:pPr marL="0" indent="0">
+              <a:buNone/>
+              <a:defRPr/>
+            </a:pPr>
+            <a:r>
+              <a:rPr lang="en-US" sz="1100">
                 <a:solidFill>
                   <a:srgbClr val="8FA0AF"/>
                 </a:solidFill>
-                <a:latin typeface="Calibri" pitchFamily="34" charset="0"/>
-                <a:ea typeface="Calibri" pitchFamily="34" charset="-122"/>
-                <a:cs typeface="Calibri" pitchFamily="34" charset="-120"/>
+                <a:latin typeface="Calibri"/>
+                <a:ea typeface="Calibri"/>
+                <a:cs typeface="Calibri"/>
               </a:rPr>
               <a:t>Jan – Jun 2025  ·  India · Singapore · UAE</a:t>
             </a:r>
-            <a:endParaRPr lang="en-US" sz="1100" dirty="0"/>
-          </a:p>
-        </p:txBody>
-      </p:sp>
-      <p:sp>
-        <p:nvSpPr>
-          <p:cNvPr id="9" name="Text 7"/>
-          <p:cNvSpPr txBox="1"/>
-          <p:nvPr/>
-        </p:nvSpPr>
-        <p:spPr>
+            <a:endParaRPr lang="en-US" sz="1100"/>
+          </a:p>
+        </p:txBody>
+      </p:sp>
+      <p:sp>
+        <p:nvSpPr>
+          <p:cNvPr id="601168649" name="Text 7"/>
+          <p:cNvSpPr txBox="1"/>
+          <p:nvPr/>
+        </p:nvSpPr>
+        <p:spPr bwMode="auto">
           <a:xfrm>
             <a:off x="6903720" y="640080"/>
             <a:ext cx="2103120" cy="640080"/>
@@ -2137,31 +2256,32 @@
           <a:bodyPr wrap="square" rtlCol="0" anchor="ctr"/>
           <a:lstStyle/>
           <a:p>
-            <a:pPr algn="ctr" indent="0" marL="0">
-              <a:buNone/>
-            </a:pPr>
-            <a:r>
-              <a:rPr lang="en-US" sz="3000" b="1" dirty="0">
+            <a:pPr marL="0" indent="0" algn="ctr">
+              <a:buNone/>
+              <a:defRPr/>
+            </a:pPr>
+            <a:r>
+              <a:rPr lang="en-US" sz="3000" b="1">
                 <a:solidFill>
                   <a:srgbClr val="FFFFFF"/>
                 </a:solidFill>
-                <a:latin typeface="Cambria" pitchFamily="34" charset="0"/>
-                <a:ea typeface="Cambria" pitchFamily="34" charset="-122"/>
-                <a:cs typeface="Cambria" pitchFamily="34" charset="-120"/>
+                <a:latin typeface="Cambria"/>
+                <a:ea typeface="Cambria"/>
+                <a:cs typeface="Cambria"/>
               </a:rPr>
               <a:t>8,000</a:t>
             </a:r>
-            <a:endParaRPr lang="en-US" sz="3000" dirty="0"/>
-          </a:p>
-        </p:txBody>
-      </p:sp>
-      <p:sp>
-        <p:nvSpPr>
-          <p:cNvPr id="10" name="Text 8"/>
-          <p:cNvSpPr txBox="1"/>
-          <p:nvPr/>
-        </p:nvSpPr>
-        <p:spPr>
+            <a:endParaRPr lang="en-US" sz="3000"/>
+          </a:p>
+        </p:txBody>
+      </p:sp>
+      <p:sp>
+        <p:nvSpPr>
+          <p:cNvPr id="1009005164" name="Text 8"/>
+          <p:cNvSpPr txBox="1"/>
+          <p:nvPr/>
+        </p:nvSpPr>
+        <p:spPr bwMode="auto">
           <a:xfrm>
             <a:off x="6903720" y="1207008"/>
             <a:ext cx="2103120" cy="237744"/>
@@ -2176,31 +2296,32 @@
           <a:bodyPr wrap="square" rtlCol="0" anchor="ctr"/>
           <a:lstStyle/>
           <a:p>
-            <a:pPr algn="ctr" indent="0" marL="0">
-              <a:buNone/>
-            </a:pPr>
-            <a:r>
-              <a:rPr lang="en-US" sz="1000" dirty="0">
+            <a:pPr marL="0" indent="0" algn="ctr">
+              <a:buNone/>
+              <a:defRPr/>
+            </a:pPr>
+            <a:r>
+              <a:rPr lang="en-US" sz="1000">
                 <a:solidFill>
                   <a:srgbClr val="8FA0AF"/>
                 </a:solidFill>
-                <a:latin typeface="Calibri" pitchFamily="34" charset="0"/>
-                <a:ea typeface="Calibri" pitchFamily="34" charset="-122"/>
-                <a:cs typeface="Calibri" pitchFamily="34" charset="-120"/>
+                <a:latin typeface="Calibri"/>
+                <a:ea typeface="Calibri"/>
+                <a:cs typeface="Calibri"/>
               </a:rPr>
               <a:t>Payment attempts</a:t>
             </a:r>
-            <a:endParaRPr lang="en-US" sz="1000" dirty="0"/>
-          </a:p>
-        </p:txBody>
-      </p:sp>
-      <p:sp>
-        <p:nvSpPr>
-          <p:cNvPr id="11" name="Text 9"/>
-          <p:cNvSpPr txBox="1"/>
-          <p:nvPr/>
-        </p:nvSpPr>
-        <p:spPr>
+            <a:endParaRPr lang="en-US" sz="1000"/>
+          </a:p>
+        </p:txBody>
+      </p:sp>
+      <p:sp>
+        <p:nvSpPr>
+          <p:cNvPr id="19648917" name="Text 9"/>
+          <p:cNvSpPr txBox="1"/>
+          <p:nvPr/>
+        </p:nvSpPr>
+        <p:spPr bwMode="auto">
           <a:xfrm>
             <a:off x="6903720" y="2011680"/>
             <a:ext cx="2103120" cy="640080"/>
@@ -2215,31 +2336,32 @@
           <a:bodyPr wrap="square" rtlCol="0" anchor="ctr"/>
           <a:lstStyle/>
           <a:p>
-            <a:pPr algn="ctr" indent="0" marL="0">
-              <a:buNone/>
-            </a:pPr>
-            <a:r>
-              <a:rPr lang="en-US" sz="3000" b="1" dirty="0">
+            <a:pPr marL="0" indent="0" algn="ctr">
+              <a:buNone/>
+              <a:defRPr/>
+            </a:pPr>
+            <a:r>
+              <a:rPr lang="en-US" sz="3000" b="1">
                 <a:solidFill>
                   <a:srgbClr val="FFFFFF"/>
                 </a:solidFill>
-                <a:latin typeface="Cambria" pitchFamily="34" charset="0"/>
-                <a:ea typeface="Cambria" pitchFamily="34" charset="-122"/>
-                <a:cs typeface="Cambria" pitchFamily="34" charset="-120"/>
+                <a:latin typeface="Cambria"/>
+                <a:ea typeface="Cambria"/>
+                <a:cs typeface="Cambria"/>
               </a:rPr>
               <a:t>88%</a:t>
             </a:r>
-            <a:endParaRPr lang="en-US" sz="3000" dirty="0"/>
-          </a:p>
-        </p:txBody>
-      </p:sp>
-      <p:sp>
-        <p:nvSpPr>
-          <p:cNvPr id="12" name="Text 10"/>
-          <p:cNvSpPr txBox="1"/>
-          <p:nvPr/>
-        </p:nvSpPr>
-        <p:spPr>
+            <a:endParaRPr lang="en-US" sz="3000"/>
+          </a:p>
+        </p:txBody>
+      </p:sp>
+      <p:sp>
+        <p:nvSpPr>
+          <p:cNvPr id="978961168" name="Text 10"/>
+          <p:cNvSpPr txBox="1"/>
+          <p:nvPr/>
+        </p:nvSpPr>
+        <p:spPr bwMode="auto">
           <a:xfrm>
             <a:off x="6903720" y="2578608"/>
             <a:ext cx="2103120" cy="237744"/>
@@ -2254,31 +2376,32 @@
           <a:bodyPr wrap="square" rtlCol="0" anchor="ctr"/>
           <a:lstStyle/>
           <a:p>
-            <a:pPr algn="ctr" indent="0" marL="0">
-              <a:buNone/>
-            </a:pPr>
-            <a:r>
-              <a:rPr lang="en-US" sz="1000" dirty="0">
+            <a:pPr marL="0" indent="0" algn="ctr">
+              <a:buNone/>
+              <a:defRPr/>
+            </a:pPr>
+            <a:r>
+              <a:rPr lang="en-US" sz="1000">
                 <a:solidFill>
                   <a:srgbClr val="8FA0AF"/>
                 </a:solidFill>
-                <a:latin typeface="Calibri" pitchFamily="34" charset="0"/>
-                <a:ea typeface="Calibri" pitchFamily="34" charset="-122"/>
-                <a:cs typeface="Calibri" pitchFamily="34" charset="-120"/>
+                <a:latin typeface="Calibri"/>
+                <a:ea typeface="Calibri"/>
+                <a:cs typeface="Calibri"/>
               </a:rPr>
               <a:t>Success rate</a:t>
             </a:r>
-            <a:endParaRPr lang="en-US" sz="1000" dirty="0"/>
-          </a:p>
-        </p:txBody>
-      </p:sp>
-      <p:sp>
-        <p:nvSpPr>
-          <p:cNvPr id="13" name="Text 11"/>
-          <p:cNvSpPr txBox="1"/>
-          <p:nvPr/>
-        </p:nvSpPr>
-        <p:spPr>
+            <a:endParaRPr lang="en-US" sz="1000"/>
+          </a:p>
+        </p:txBody>
+      </p:sp>
+      <p:sp>
+        <p:nvSpPr>
+          <p:cNvPr id="567035293" name="Text 11"/>
+          <p:cNvSpPr txBox="1"/>
+          <p:nvPr/>
+        </p:nvSpPr>
+        <p:spPr bwMode="auto">
           <a:xfrm>
             <a:off x="6903720" y="3383280"/>
             <a:ext cx="2103120" cy="640080"/>
@@ -2293,31 +2416,32 @@
           <a:bodyPr wrap="square" rtlCol="0" anchor="ctr"/>
           <a:lstStyle/>
           <a:p>
-            <a:pPr algn="ctr" indent="0" marL="0">
-              <a:buNone/>
-            </a:pPr>
-            <a:r>
-              <a:rPr lang="en-US" sz="3000" b="1" dirty="0">
+            <a:pPr marL="0" indent="0" algn="ctr">
+              <a:buNone/>
+              <a:defRPr/>
+            </a:pPr>
+            <a:r>
+              <a:rPr lang="en-US" sz="3000" b="1">
                 <a:solidFill>
                   <a:srgbClr val="FFFFFF"/>
                 </a:solidFill>
-                <a:latin typeface="Cambria" pitchFamily="34" charset="0"/>
-                <a:ea typeface="Cambria" pitchFamily="34" charset="-122"/>
-                <a:cs typeface="Cambria" pitchFamily="34" charset="-120"/>
+                <a:latin typeface="Cambria"/>
+                <a:ea typeface="Cambria"/>
+                <a:cs typeface="Cambria"/>
               </a:rPr>
               <a:t>10 CSVs</a:t>
             </a:r>
-            <a:endParaRPr lang="en-US" sz="3000" dirty="0"/>
-          </a:p>
-        </p:txBody>
-      </p:sp>
-      <p:sp>
-        <p:nvSpPr>
-          <p:cNvPr id="14" name="Text 12"/>
-          <p:cNvSpPr txBox="1"/>
-          <p:nvPr/>
-        </p:nvSpPr>
-        <p:spPr>
+            <a:endParaRPr lang="en-US" sz="3000"/>
+          </a:p>
+        </p:txBody>
+      </p:sp>
+      <p:sp>
+        <p:nvSpPr>
+          <p:cNvPr id="2121598474" name="Text 12"/>
+          <p:cNvSpPr txBox="1"/>
+          <p:nvPr/>
+        </p:nvSpPr>
+        <p:spPr bwMode="auto">
           <a:xfrm>
             <a:off x="6903720" y="3950208"/>
             <a:ext cx="2103120" cy="237744"/>
@@ -2332,31 +2456,32 @@
           <a:bodyPr wrap="square" rtlCol="0" anchor="ctr"/>
           <a:lstStyle/>
           <a:p>
-            <a:pPr algn="ctr" indent="0" marL="0">
-              <a:buNone/>
-            </a:pPr>
-            <a:r>
-              <a:rPr lang="en-US" sz="1000" dirty="0">
+            <a:pPr marL="0" indent="0" algn="ctr">
+              <a:buNone/>
+              <a:defRPr/>
+            </a:pPr>
+            <a:r>
+              <a:rPr lang="en-US" sz="1000">
                 <a:solidFill>
                   <a:srgbClr val="8FA0AF"/>
                 </a:solidFill>
-                <a:latin typeface="Calibri" pitchFamily="34" charset="0"/>
-                <a:ea typeface="Calibri" pitchFamily="34" charset="-122"/>
-                <a:cs typeface="Calibri" pitchFamily="34" charset="-120"/>
+                <a:latin typeface="Calibri"/>
+                <a:ea typeface="Calibri"/>
+                <a:cs typeface="Calibri"/>
               </a:rPr>
               <a:t>Data sources</a:t>
             </a:r>
-            <a:endParaRPr lang="en-US" sz="1000" dirty="0"/>
-          </a:p>
-        </p:txBody>
-      </p:sp>
-      <p:sp>
-        <p:nvSpPr>
-          <p:cNvPr id="15" name="Shape 13"/>
+            <a:endParaRPr lang="en-US" sz="1000"/>
+          </a:p>
+        </p:txBody>
+      </p:sp>
+      <p:sp>
+        <p:nvSpPr>
+          <p:cNvPr id="1348718488" name="Shape 13"/>
           <p:cNvSpPr/>
           <p:nvPr/>
         </p:nvSpPr>
-        <p:spPr>
+        <p:spPr bwMode="auto">
           <a:xfrm>
             <a:off x="0" y="4828032"/>
             <a:ext cx="9144000" cy="310896"/>
@@ -2372,11 +2497,11 @@
       </p:sp>
       <p:sp>
         <p:nvSpPr>
-          <p:cNvPr id="16" name="Text 14"/>
-          <p:cNvSpPr txBox="1"/>
-          <p:nvPr/>
-        </p:nvSpPr>
-        <p:spPr>
+          <p:cNvPr id="1957968015" name="Text 14"/>
+          <p:cNvSpPr txBox="1"/>
+          <p:nvPr/>
+        </p:nvSpPr>
+        <p:spPr bwMode="auto">
           <a:xfrm>
             <a:off x="274320" y="4846320"/>
             <a:ext cx="8595360" cy="237744"/>
@@ -2391,21 +2516,22 @@
           <a:bodyPr wrap="square" rtlCol="0" anchor="ctr"/>
           <a:lstStyle/>
           <a:p>
-            <a:pPr indent="0" marL="0">
-              <a:buNone/>
-            </a:pPr>
-            <a:r>
-              <a:rPr lang="en-US" sz="800" dirty="0">
+            <a:pPr marL="0" indent="0">
+              <a:buNone/>
+              <a:defRPr/>
+            </a:pPr>
+            <a:r>
+              <a:rPr lang="en-US" sz="800">
                 <a:solidFill>
                   <a:srgbClr val="8FA0AF"/>
                 </a:solidFill>
-                <a:latin typeface="Calibri" pitchFamily="34" charset="0"/>
-                <a:ea typeface="Calibri" pitchFamily="34" charset="-122"/>
-                <a:cs typeface="Calibri" pitchFamily="34" charset="-120"/>
+                <a:latin typeface="Calibri"/>
+                <a:ea typeface="Calibri"/>
+                <a:cs typeface="Calibri"/>
               </a:rPr>
               <a:t>CONFIDENTIAL  ·  Diagnostic period: 2025-01-01 to 2025-06-30</a:t>
             </a:r>
-            <a:endParaRPr lang="en-US" sz="800" dirty="0"/>
+            <a:endParaRPr lang="en-US" sz="800"/>
           </a:p>
         </p:txBody>
       </p:sp>
@@ -2414,11 +2540,19 @@
   <p:clrMapOvr>
     <a:masterClrMapping/>
   </p:clrMapOvr>
+  <mc:AlternateContent xmlns:mc="http://schemas.openxmlformats.org/markup-compatibility/2006">
+    <mc:Choice xmlns:p159="http://schemas.microsoft.com/office/powerpoint/2015/09/main" xmlns:p14="http://schemas.microsoft.com/office/powerpoint/2010/main" Requires="p159">
+      <p:transition p14:dur="500" advClick="1"/>
+    </mc:Choice>
+    <mc:Fallback>
+      <p:transition advClick="1"/>
+    </mc:Fallback>
+  </mc:AlternateContent>
 </p:sld>
 </file>
 
 <file path=ppt/slides/slide2.xml><?xml version="1.0" encoding="utf-8"?>
-<p:sld xmlns:a="http://schemas.openxmlformats.org/drawingml/2006/main" xmlns:r="http://schemas.openxmlformats.org/officeDocument/2006/relationships" xmlns:p="http://schemas.openxmlformats.org/presentationml/2006/main">
+<p:sld xmlns:a="http://schemas.openxmlformats.org/drawingml/2006/main" xmlns:r="http://schemas.openxmlformats.org/officeDocument/2006/relationships" xmlns:p="http://schemas.openxmlformats.org/presentationml/2006/main" xmlns:m="http://schemas.openxmlformats.org/officeDocument/2006/math" xmlns:w="http://schemas.openxmlformats.org/wordprocessingml/2006/main" xmlns:mc="http://schemas.openxmlformats.org/markup-compatibility/2006" showMasterPhAnim="0" showMasterSp="1" show="1">
   <p:cSld name="Slide 2">
     <p:spTree>
       <p:nvGrpSpPr>
@@ -2426,7 +2560,7 @@
         <p:cNvGrpSpPr/>
         <p:nvPr/>
       </p:nvGrpSpPr>
-      <p:grpSpPr>
+      <p:grpSpPr bwMode="auto">
         <a:xfrm>
           <a:off x="0" y="0"/>
           <a:ext cx="0" cy="0"/>
@@ -2436,11 +2570,11 @@
       </p:grpSpPr>
       <p:sp>
         <p:nvSpPr>
-          <p:cNvPr id="2" name="Shape 0"/>
+          <p:cNvPr id="145836329" name="Shape 0"/>
           <p:cNvSpPr/>
           <p:nvPr/>
         </p:nvSpPr>
-        <p:spPr>
+        <p:spPr bwMode="auto">
           <a:xfrm>
             <a:off x="0" y="0"/>
             <a:ext cx="9144000" cy="5143500"/>
@@ -2456,11 +2590,11 @@
       </p:sp>
       <p:sp>
         <p:nvSpPr>
-          <p:cNvPr id="3" name="Shape 1"/>
+          <p:cNvPr id="282748725" name="Shape 1"/>
           <p:cNvSpPr/>
           <p:nvPr/>
         </p:nvSpPr>
-        <p:spPr>
+        <p:spPr bwMode="auto">
           <a:xfrm>
             <a:off x="0" y="0"/>
             <a:ext cx="9144000" cy="1005840"/>
@@ -2476,11 +2610,11 @@
       </p:sp>
       <p:sp>
         <p:nvSpPr>
-          <p:cNvPr id="4" name="Text 2"/>
-          <p:cNvSpPr txBox="1"/>
-          <p:nvPr/>
-        </p:nvSpPr>
-        <p:spPr>
+          <p:cNvPr id="401376709" name="Text 2"/>
+          <p:cNvSpPr txBox="1"/>
+          <p:nvPr/>
+        </p:nvSpPr>
+        <p:spPr bwMode="auto">
           <a:xfrm>
             <a:off x="365760" y="73152"/>
             <a:ext cx="3657600" cy="237744"/>
@@ -2495,31 +2629,32 @@
           <a:bodyPr wrap="square" rtlCol="0" anchor="ctr"/>
           <a:lstStyle/>
           <a:p>
-            <a:pPr indent="0" marL="0">
-              <a:buNone/>
-            </a:pPr>
-            <a:r>
-              <a:rPr lang="en-US" sz="800" b="1" spc="300" kern="0" dirty="0">
+            <a:pPr marL="0" indent="0">
+              <a:buNone/>
+              <a:defRPr/>
+            </a:pPr>
+            <a:r>
+              <a:rPr lang="en-US" sz="800" b="1" spc="300">
                 <a:solidFill>
                   <a:srgbClr val="00897B"/>
                 </a:solidFill>
-                <a:latin typeface="Calibri" pitchFamily="34" charset="0"/>
-                <a:ea typeface="Calibri" pitchFamily="34" charset="-122"/>
-                <a:cs typeface="Calibri" pitchFamily="34" charset="-120"/>
+                <a:latin typeface="Calibri"/>
+                <a:ea typeface="Calibri"/>
+                <a:cs typeface="Calibri"/>
               </a:rPr>
               <a:t>SITUATION</a:t>
             </a:r>
-            <a:endParaRPr lang="en-US" sz="800" dirty="0"/>
-          </a:p>
-        </p:txBody>
-      </p:sp>
-      <p:sp>
-        <p:nvSpPr>
-          <p:cNvPr id="5" name="Text 3"/>
-          <p:cNvSpPr txBox="1"/>
-          <p:nvPr/>
-        </p:nvSpPr>
-        <p:spPr>
+            <a:endParaRPr lang="en-US" sz="800"/>
+          </a:p>
+        </p:txBody>
+      </p:sp>
+      <p:sp>
+        <p:nvSpPr>
+          <p:cNvPr id="154874835" name="Text 3"/>
+          <p:cNvSpPr txBox="1"/>
+          <p:nvPr/>
+        </p:nvSpPr>
+        <p:spPr bwMode="auto">
           <a:xfrm>
             <a:off x="365760" y="310896"/>
             <a:ext cx="8412480" cy="530352"/>
@@ -2534,31 +2669,32 @@
           <a:bodyPr wrap="square" rtlCol="0" anchor="ctr"/>
           <a:lstStyle/>
           <a:p>
-            <a:pPr indent="0" marL="0">
-              <a:buNone/>
-            </a:pPr>
-            <a:r>
-              <a:rPr lang="en-US" sz="2200" b="1" dirty="0">
+            <a:pPr marL="0" indent="0">
+              <a:buNone/>
+              <a:defRPr/>
+            </a:pPr>
+            <a:r>
+              <a:rPr lang="en-US" sz="2200" b="1">
                 <a:solidFill>
                   <a:srgbClr val="FFFFFF"/>
                 </a:solidFill>
-                <a:latin typeface="Cambria" pitchFamily="34" charset="0"/>
-                <a:ea typeface="Cambria" pitchFamily="34" charset="-122"/>
-                <a:cs typeface="Cambria" pitchFamily="34" charset="-120"/>
+                <a:latin typeface="Cambria"/>
+                <a:ea typeface="Cambria"/>
+                <a:cs typeface="Cambria"/>
               </a:rPr>
               <a:t>Volume is growing — profit per transaction is collapsing</a:t>
             </a:r>
-            <a:endParaRPr lang="en-US" sz="2200" dirty="0"/>
-          </a:p>
-        </p:txBody>
-      </p:sp>
-      <p:sp>
-        <p:nvSpPr>
-          <p:cNvPr id="6" name="Shape 4"/>
+            <a:endParaRPr lang="en-US" sz="2200"/>
+          </a:p>
+        </p:txBody>
+      </p:sp>
+      <p:sp>
+        <p:nvSpPr>
+          <p:cNvPr id="1417254622" name="Shape 4"/>
           <p:cNvSpPr/>
           <p:nvPr/>
         </p:nvSpPr>
-        <p:spPr>
+        <p:spPr bwMode="auto">
           <a:xfrm>
             <a:off x="274320" y="1170432"/>
             <a:ext cx="1828800" cy="1115568"/>
@@ -2579,11 +2715,11 @@
       </p:sp>
       <p:sp>
         <p:nvSpPr>
-          <p:cNvPr id="7" name="Text 5"/>
-          <p:cNvSpPr txBox="1"/>
-          <p:nvPr/>
-        </p:nvSpPr>
-        <p:spPr>
+          <p:cNvPr id="310506218" name="Text 5"/>
+          <p:cNvSpPr txBox="1"/>
+          <p:nvPr/>
+        </p:nvSpPr>
+        <p:spPr bwMode="auto">
           <a:xfrm>
             <a:off x="347472" y="1280160"/>
             <a:ext cx="1682496" cy="475488"/>
@@ -2598,31 +2734,32 @@
           <a:bodyPr wrap="square" rtlCol="0" anchor="ctr"/>
           <a:lstStyle/>
           <a:p>
-            <a:pPr indent="0" marL="0">
-              <a:buNone/>
-            </a:pPr>
-            <a:r>
-              <a:rPr lang="en-US" sz="3400" b="1" dirty="0">
+            <a:pPr marL="0" indent="0">
+              <a:buNone/>
+              <a:defRPr/>
+            </a:pPr>
+            <a:r>
+              <a:rPr lang="en-US" sz="3400" b="1">
                 <a:solidFill>
                   <a:srgbClr val="00897B"/>
                 </a:solidFill>
-                <a:latin typeface="Cambria" pitchFamily="34" charset="0"/>
-                <a:ea typeface="Cambria" pitchFamily="34" charset="-122"/>
-                <a:cs typeface="Cambria" pitchFamily="34" charset="-120"/>
+                <a:latin typeface="Cambria"/>
+                <a:ea typeface="Cambria"/>
+                <a:cs typeface="Cambria"/>
               </a:rPr>
               <a:t>+62%</a:t>
             </a:r>
-            <a:endParaRPr lang="en-US" sz="3400" dirty="0"/>
-          </a:p>
-        </p:txBody>
-      </p:sp>
-      <p:sp>
-        <p:nvSpPr>
-          <p:cNvPr id="8" name="Text 6"/>
-          <p:cNvSpPr txBox="1"/>
-          <p:nvPr/>
-        </p:nvSpPr>
-        <p:spPr>
+            <a:endParaRPr lang="en-US" sz="3400"/>
+          </a:p>
+        </p:txBody>
+      </p:sp>
+      <p:sp>
+        <p:nvSpPr>
+          <p:cNvPr id="8241707" name="Text 6"/>
+          <p:cNvSpPr txBox="1"/>
+          <p:nvPr/>
+        </p:nvSpPr>
+        <p:spPr bwMode="auto">
           <a:xfrm>
             <a:off x="347472" y="1719072"/>
             <a:ext cx="1682496" cy="274320"/>
@@ -2637,31 +2774,32 @@
           <a:bodyPr wrap="square" rtlCol="0" anchor="ctr"/>
           <a:lstStyle/>
           <a:p>
-            <a:pPr indent="0" marL="0">
-              <a:buNone/>
-            </a:pPr>
-            <a:r>
-              <a:rPr lang="en-US" sz="1100" b="1" dirty="0">
+            <a:pPr marL="0" indent="0">
+              <a:buNone/>
+              <a:defRPr/>
+            </a:pPr>
+            <a:r>
+              <a:rPr lang="en-US" sz="1100" b="1">
                 <a:solidFill>
                   <a:srgbClr val="2C3E50"/>
                 </a:solidFill>
-                <a:latin typeface="Calibri" pitchFamily="34" charset="0"/>
-                <a:ea typeface="Calibri" pitchFamily="34" charset="-122"/>
-                <a:cs typeface="Calibri" pitchFamily="34" charset="-120"/>
+                <a:latin typeface="Calibri"/>
+                <a:ea typeface="Calibri"/>
+                <a:cs typeface="Calibri"/>
               </a:rPr>
               <a:t>Volume growth</a:t>
             </a:r>
-            <a:endParaRPr lang="en-US" sz="1100" dirty="0"/>
-          </a:p>
-        </p:txBody>
-      </p:sp>
-      <p:sp>
-        <p:nvSpPr>
-          <p:cNvPr id="9" name="Text 7"/>
-          <p:cNvSpPr txBox="1"/>
-          <p:nvPr/>
-        </p:nvSpPr>
-        <p:spPr>
+            <a:endParaRPr lang="en-US" sz="1100"/>
+          </a:p>
+        </p:txBody>
+      </p:sp>
+      <p:sp>
+        <p:nvSpPr>
+          <p:cNvPr id="1980140960" name="Text 7"/>
+          <p:cNvSpPr txBox="1"/>
+          <p:nvPr/>
+        </p:nvSpPr>
+        <p:spPr bwMode="auto">
           <a:xfrm>
             <a:off x="347472" y="1975104"/>
             <a:ext cx="1682496" cy="237744"/>
@@ -2676,31 +2814,32 @@
           <a:bodyPr wrap="square" rtlCol="0" anchor="ctr"/>
           <a:lstStyle/>
           <a:p>
-            <a:pPr indent="0" marL="0">
-              <a:buNone/>
-            </a:pPr>
-            <a:r>
-              <a:rPr lang="en-US" sz="900" dirty="0">
+            <a:pPr marL="0" indent="0">
+              <a:buNone/>
+              <a:defRPr/>
+            </a:pPr>
+            <a:r>
+              <a:rPr lang="en-US" sz="900">
                 <a:solidFill>
                   <a:srgbClr val="8FA0AF"/>
                 </a:solidFill>
-                <a:latin typeface="Calibri" pitchFamily="34" charset="0"/>
-                <a:ea typeface="Calibri" pitchFamily="34" charset="-122"/>
-                <a:cs typeface="Calibri" pitchFamily="34" charset="-120"/>
+                <a:latin typeface="Calibri"/>
+                <a:ea typeface="Calibri"/>
+                <a:cs typeface="Calibri"/>
               </a:rPr>
               <a:t>Jan → Jun 2025</a:t>
             </a:r>
-            <a:endParaRPr lang="en-US" sz="900" dirty="0"/>
-          </a:p>
-        </p:txBody>
-      </p:sp>
-      <p:sp>
-        <p:nvSpPr>
-          <p:cNvPr id="10" name="Shape 8"/>
+            <a:endParaRPr lang="en-US" sz="900"/>
+          </a:p>
+        </p:txBody>
+      </p:sp>
+      <p:sp>
+        <p:nvSpPr>
+          <p:cNvPr id="99734351" name="Shape 8"/>
           <p:cNvSpPr/>
           <p:nvPr/>
         </p:nvSpPr>
-        <p:spPr>
+        <p:spPr bwMode="auto">
           <a:xfrm>
             <a:off x="2286000" y="1170432"/>
             <a:ext cx="1828800" cy="1115568"/>
@@ -2721,11 +2860,11 @@
       </p:sp>
       <p:sp>
         <p:nvSpPr>
-          <p:cNvPr id="11" name="Text 9"/>
-          <p:cNvSpPr txBox="1"/>
-          <p:nvPr/>
-        </p:nvSpPr>
-        <p:spPr>
+          <p:cNvPr id="817983473" name="Text 9"/>
+          <p:cNvSpPr txBox="1"/>
+          <p:nvPr/>
+        </p:nvSpPr>
+        <p:spPr bwMode="auto">
           <a:xfrm>
             <a:off x="2359152" y="1280160"/>
             <a:ext cx="1682496" cy="475488"/>
@@ -2740,31 +2879,32 @@
           <a:bodyPr wrap="square" rtlCol="0" anchor="ctr"/>
           <a:lstStyle/>
           <a:p>
-            <a:pPr indent="0" marL="0">
-              <a:buNone/>
-            </a:pPr>
-            <a:r>
-              <a:rPr lang="en-US" sz="3400" b="1" dirty="0">
+            <a:pPr marL="0" indent="0">
+              <a:buNone/>
+              <a:defRPr/>
+            </a:pPr>
+            <a:r>
+              <a:rPr lang="en-US" sz="3400" b="1">
                 <a:solidFill>
                   <a:srgbClr val="C0392B"/>
                 </a:solidFill>
-                <a:latin typeface="Cambria" pitchFamily="34" charset="0"/>
-                <a:ea typeface="Cambria" pitchFamily="34" charset="-122"/>
-                <a:cs typeface="Cambria" pitchFamily="34" charset="-120"/>
+                <a:latin typeface="Cambria"/>
+                <a:ea typeface="Cambria"/>
+                <a:cs typeface="Cambria"/>
               </a:rPr>
               <a:t>–85%</a:t>
             </a:r>
-            <a:endParaRPr lang="en-US" sz="3400" dirty="0"/>
-          </a:p>
-        </p:txBody>
-      </p:sp>
-      <p:sp>
-        <p:nvSpPr>
-          <p:cNvPr id="12" name="Text 10"/>
-          <p:cNvSpPr txBox="1"/>
-          <p:nvPr/>
-        </p:nvSpPr>
-        <p:spPr>
+            <a:endParaRPr lang="en-US" sz="3400"/>
+          </a:p>
+        </p:txBody>
+      </p:sp>
+      <p:sp>
+        <p:nvSpPr>
+          <p:cNvPr id="1572143951" name="Text 10"/>
+          <p:cNvSpPr txBox="1"/>
+          <p:nvPr/>
+        </p:nvSpPr>
+        <p:spPr bwMode="auto">
           <a:xfrm>
             <a:off x="2359152" y="1719072"/>
             <a:ext cx="1682496" cy="274320"/>
@@ -2779,31 +2919,32 @@
           <a:bodyPr wrap="square" rtlCol="0" anchor="ctr"/>
           <a:lstStyle/>
           <a:p>
-            <a:pPr indent="0" marL="0">
-              <a:buNone/>
-            </a:pPr>
-            <a:r>
-              <a:rPr lang="en-US" sz="1100" b="1" dirty="0">
+            <a:pPr marL="0" indent="0">
+              <a:buNone/>
+              <a:defRPr/>
+            </a:pPr>
+            <a:r>
+              <a:rPr lang="en-US" sz="1100" b="1">
                 <a:solidFill>
                   <a:srgbClr val="2C3E50"/>
                 </a:solidFill>
-                <a:latin typeface="Calibri" pitchFamily="34" charset="0"/>
-                <a:ea typeface="Calibri" pitchFamily="34" charset="-122"/>
-                <a:cs typeface="Calibri" pitchFamily="34" charset="-120"/>
+                <a:latin typeface="Calibri"/>
+                <a:ea typeface="Calibri"/>
+                <a:cs typeface="Calibri"/>
               </a:rPr>
               <a:t>Profit / txn</a:t>
             </a:r>
-            <a:endParaRPr lang="en-US" sz="1100" dirty="0"/>
-          </a:p>
-        </p:txBody>
-      </p:sp>
-      <p:sp>
-        <p:nvSpPr>
-          <p:cNvPr id="13" name="Text 11"/>
-          <p:cNvSpPr txBox="1"/>
-          <p:nvPr/>
-        </p:nvSpPr>
-        <p:spPr>
+            <a:endParaRPr lang="en-US" sz="1100"/>
+          </a:p>
+        </p:txBody>
+      </p:sp>
+      <p:sp>
+        <p:nvSpPr>
+          <p:cNvPr id="2127001022" name="Text 11"/>
+          <p:cNvSpPr txBox="1"/>
+          <p:nvPr/>
+        </p:nvSpPr>
+        <p:spPr bwMode="auto">
           <a:xfrm>
             <a:off x="2359152" y="1975104"/>
             <a:ext cx="1682496" cy="237744"/>
@@ -2818,31 +2959,32 @@
           <a:bodyPr wrap="square" rtlCol="0" anchor="ctr"/>
           <a:lstStyle/>
           <a:p>
-            <a:pPr indent="0" marL="0">
-              <a:buNone/>
-            </a:pPr>
-            <a:r>
-              <a:rPr lang="en-US" sz="900" dirty="0">
+            <a:pPr marL="0" indent="0">
+              <a:buNone/>
+              <a:defRPr/>
+            </a:pPr>
+            <a:r>
+              <a:rPr lang="en-US" sz="900">
                 <a:solidFill>
                   <a:srgbClr val="8FA0AF"/>
                 </a:solidFill>
-                <a:latin typeface="Calibri" pitchFamily="34" charset="0"/>
-                <a:ea typeface="Calibri" pitchFamily="34" charset="-122"/>
-                <a:cs typeface="Calibri" pitchFamily="34" charset="-120"/>
+                <a:latin typeface="Calibri"/>
+                <a:ea typeface="Calibri"/>
+                <a:cs typeface="Calibri"/>
               </a:rPr>
               <a:t>$0.29 → $0.04</a:t>
             </a:r>
-            <a:endParaRPr lang="en-US" sz="900" dirty="0"/>
-          </a:p>
-        </p:txBody>
-      </p:sp>
-      <p:sp>
-        <p:nvSpPr>
-          <p:cNvPr id="14" name="Shape 12"/>
+            <a:endParaRPr lang="en-US" sz="900"/>
+          </a:p>
+        </p:txBody>
+      </p:sp>
+      <p:sp>
+        <p:nvSpPr>
+          <p:cNvPr id="74738280" name="Shape 12"/>
           <p:cNvSpPr/>
           <p:nvPr/>
         </p:nvSpPr>
-        <p:spPr>
+        <p:spPr bwMode="auto">
           <a:xfrm>
             <a:off x="4297680" y="1170432"/>
             <a:ext cx="1828800" cy="1115568"/>
@@ -2863,11 +3005,11 @@
       </p:sp>
       <p:sp>
         <p:nvSpPr>
-          <p:cNvPr id="15" name="Text 13"/>
-          <p:cNvSpPr txBox="1"/>
-          <p:nvPr/>
-        </p:nvSpPr>
-        <p:spPr>
+          <p:cNvPr id="1853351254" name="Text 13"/>
+          <p:cNvSpPr txBox="1"/>
+          <p:nvPr/>
+        </p:nvSpPr>
+        <p:spPr bwMode="auto">
           <a:xfrm>
             <a:off x="4370832" y="1280160"/>
             <a:ext cx="1682496" cy="475488"/>
@@ -2882,31 +3024,32 @@
           <a:bodyPr wrap="square" rtlCol="0" anchor="ctr"/>
           <a:lstStyle/>
           <a:p>
-            <a:pPr indent="0" marL="0">
-              <a:buNone/>
-            </a:pPr>
-            <a:r>
-              <a:rPr lang="en-US" sz="3400" b="1" dirty="0">
+            <a:pPr marL="0" indent="0">
+              <a:buNone/>
+              <a:defRPr/>
+            </a:pPr>
+            <a:r>
+              <a:rPr lang="en-US" sz="3400" b="1">
                 <a:solidFill>
                   <a:srgbClr val="F4A31A"/>
                 </a:solidFill>
-                <a:latin typeface="Cambria" pitchFamily="34" charset="0"/>
-                <a:ea typeface="Cambria" pitchFamily="34" charset="-122"/>
-                <a:cs typeface="Cambria" pitchFamily="34" charset="-120"/>
+                <a:latin typeface="Cambria"/>
+                <a:ea typeface="Cambria"/>
+                <a:cs typeface="Cambria"/>
               </a:rPr>
               <a:t>3.8%</a:t>
             </a:r>
-            <a:endParaRPr lang="en-US" sz="3400" dirty="0"/>
-          </a:p>
-        </p:txBody>
-      </p:sp>
-      <p:sp>
-        <p:nvSpPr>
-          <p:cNvPr id="16" name="Text 14"/>
-          <p:cNvSpPr txBox="1"/>
-          <p:nvPr/>
-        </p:nvSpPr>
-        <p:spPr>
+            <a:endParaRPr lang="en-US" sz="3400"/>
+          </a:p>
+        </p:txBody>
+      </p:sp>
+      <p:sp>
+        <p:nvSpPr>
+          <p:cNvPr id="301412769" name="Text 14"/>
+          <p:cNvSpPr txBox="1"/>
+          <p:nvPr/>
+        </p:nvSpPr>
+        <p:spPr bwMode="auto">
           <a:xfrm>
             <a:off x="4370832" y="1719072"/>
             <a:ext cx="1682496" cy="274320"/>
@@ -2921,31 +3064,32 @@
           <a:bodyPr wrap="square" rtlCol="0" anchor="ctr"/>
           <a:lstStyle/>
           <a:p>
-            <a:pPr indent="0" marL="0">
-              <a:buNone/>
-            </a:pPr>
-            <a:r>
-              <a:rPr lang="en-US" sz="1100" b="1" dirty="0">
+            <a:pPr marL="0" indent="0">
+              <a:buNone/>
+              <a:defRPr/>
+            </a:pPr>
+            <a:r>
+              <a:rPr lang="en-US" sz="1100" b="1">
                 <a:solidFill>
                   <a:srgbClr val="2C3E50"/>
                 </a:solidFill>
-                <a:latin typeface="Calibri" pitchFamily="34" charset="0"/>
-                <a:ea typeface="Calibri" pitchFamily="34" charset="-122"/>
-                <a:cs typeface="Calibri" pitchFamily="34" charset="-120"/>
+                <a:latin typeface="Calibri"/>
+                <a:ea typeface="Calibri"/>
+                <a:cs typeface="Calibri"/>
               </a:rPr>
               <a:t>Unsettled</a:t>
             </a:r>
-            <a:endParaRPr lang="en-US" sz="1100" dirty="0"/>
-          </a:p>
-        </p:txBody>
-      </p:sp>
-      <p:sp>
-        <p:nvSpPr>
-          <p:cNvPr id="17" name="Text 15"/>
-          <p:cNvSpPr txBox="1"/>
-          <p:nvPr/>
-        </p:nvSpPr>
-        <p:spPr>
+            <a:endParaRPr lang="en-US" sz="1100"/>
+          </a:p>
+        </p:txBody>
+      </p:sp>
+      <p:sp>
+        <p:nvSpPr>
+          <p:cNvPr id="227779387" name="Text 15"/>
+          <p:cNvSpPr txBox="1"/>
+          <p:nvPr/>
+        </p:nvSpPr>
+        <p:spPr bwMode="auto">
           <a:xfrm>
             <a:off x="4370832" y="1975104"/>
             <a:ext cx="1682496" cy="237744"/>
@@ -2960,31 +3104,32 @@
           <a:bodyPr wrap="square" rtlCol="0" anchor="ctr"/>
           <a:lstStyle/>
           <a:p>
-            <a:pPr indent="0" marL="0">
-              <a:buNone/>
-            </a:pPr>
-            <a:r>
-              <a:rPr lang="en-US" sz="900" dirty="0">
+            <a:pPr marL="0" indent="0">
+              <a:buNone/>
+              <a:defRPr/>
+            </a:pPr>
+            <a:r>
+              <a:rPr lang="en-US" sz="900">
                 <a:solidFill>
                   <a:srgbClr val="8FA0AF"/>
                 </a:solidFill>
-                <a:latin typeface="Calibri" pitchFamily="34" charset="0"/>
-                <a:ea typeface="Calibri" pitchFamily="34" charset="-122"/>
-                <a:cs typeface="Calibri" pitchFamily="34" charset="-120"/>
+                <a:latin typeface="Calibri"/>
+                <a:ea typeface="Calibri"/>
+                <a:cs typeface="Calibri"/>
               </a:rPr>
               <a:t>232 transactions</a:t>
             </a:r>
-            <a:endParaRPr lang="en-US" sz="900" dirty="0"/>
-          </a:p>
-        </p:txBody>
-      </p:sp>
-      <p:sp>
-        <p:nvSpPr>
-          <p:cNvPr id="18" name="Shape 16"/>
+            <a:endParaRPr lang="en-US" sz="900"/>
+          </a:p>
+        </p:txBody>
+      </p:sp>
+      <p:sp>
+        <p:nvSpPr>
+          <p:cNvPr id="305912966" name="Shape 16"/>
           <p:cNvSpPr/>
           <p:nvPr/>
         </p:nvSpPr>
-        <p:spPr>
+        <p:spPr bwMode="auto">
           <a:xfrm>
             <a:off x="6309360" y="1170432"/>
             <a:ext cx="1828800" cy="1115568"/>
@@ -3005,13 +3150,13 @@
       </p:sp>
       <p:sp>
         <p:nvSpPr>
-          <p:cNvPr id="19" name="Text 17"/>
-          <p:cNvSpPr txBox="1"/>
-          <p:nvPr/>
-        </p:nvSpPr>
-        <p:spPr>
-          <a:xfrm>
-            <a:off x="6382512" y="1280160"/>
+          <p:cNvPr id="1515678250" name="Text 17"/>
+          <p:cNvSpPr txBox="1"/>
+          <p:nvPr/>
+        </p:nvSpPr>
+        <p:spPr bwMode="auto">
+          <a:xfrm>
+            <a:off x="6382512" y="1252728"/>
             <a:ext cx="1682496" cy="475488"/>
           </a:xfrm>
           <a:prstGeom prst="rect">
@@ -3024,31 +3169,32 @@
           <a:bodyPr wrap="square" rtlCol="0" anchor="ctr"/>
           <a:lstStyle/>
           <a:p>
-            <a:pPr indent="0" marL="0">
-              <a:buNone/>
-            </a:pPr>
-            <a:r>
-              <a:rPr lang="en-US" sz="3400" b="1" dirty="0">
+            <a:pPr marL="0" indent="0">
+              <a:buNone/>
+              <a:defRPr/>
+            </a:pPr>
+            <a:r>
+              <a:rPr lang="en-US" sz="3400" b="1">
                 <a:solidFill>
                   <a:srgbClr val="C0392B"/>
                 </a:solidFill>
-                <a:latin typeface="Cambria" pitchFamily="34" charset="0"/>
-                <a:ea typeface="Cambria" pitchFamily="34" charset="-122"/>
-                <a:cs typeface="Cambria" pitchFamily="34" charset="-120"/>
+                <a:latin typeface="Cambria"/>
+                <a:ea typeface="Cambria"/>
+                <a:cs typeface="Cambria"/>
               </a:rPr>
               <a:t>10</a:t>
             </a:r>
-            <a:endParaRPr lang="en-US" sz="3400" dirty="0"/>
-          </a:p>
-        </p:txBody>
-      </p:sp>
-      <p:sp>
-        <p:nvSpPr>
-          <p:cNvPr id="20" name="Text 18"/>
-          <p:cNvSpPr txBox="1"/>
-          <p:nvPr/>
-        </p:nvSpPr>
-        <p:spPr>
+            <a:endParaRPr lang="en-US" sz="3400"/>
+          </a:p>
+        </p:txBody>
+      </p:sp>
+      <p:sp>
+        <p:nvSpPr>
+          <p:cNvPr id="1377292446" name="Text 18"/>
+          <p:cNvSpPr txBox="1"/>
+          <p:nvPr/>
+        </p:nvSpPr>
+        <p:spPr bwMode="auto">
           <a:xfrm>
             <a:off x="6382512" y="1719072"/>
             <a:ext cx="1682496" cy="274320"/>
@@ -3063,31 +3209,32 @@
           <a:bodyPr wrap="square" rtlCol="0" anchor="ctr"/>
           <a:lstStyle/>
           <a:p>
-            <a:pPr indent="0" marL="0">
-              <a:buNone/>
-            </a:pPr>
-            <a:r>
-              <a:rPr lang="en-US" sz="1100" b="1" dirty="0">
+            <a:pPr marL="0" indent="0">
+              <a:buNone/>
+              <a:defRPr/>
+            </a:pPr>
+            <a:r>
+              <a:rPr lang="en-US" sz="1100" b="1">
                 <a:solidFill>
                   <a:srgbClr val="2C3E50"/>
                 </a:solidFill>
-                <a:latin typeface="Calibri" pitchFamily="34" charset="0"/>
-                <a:ea typeface="Calibri" pitchFamily="34" charset="-122"/>
-                <a:cs typeface="Calibri" pitchFamily="34" charset="-120"/>
+                <a:latin typeface="Calibri"/>
+                <a:ea typeface="Calibri"/>
+                <a:cs typeface="Calibri"/>
               </a:rPr>
               <a:t>DQ defects</a:t>
             </a:r>
-            <a:endParaRPr lang="en-US" sz="1100" dirty="0"/>
-          </a:p>
-        </p:txBody>
-      </p:sp>
-      <p:sp>
-        <p:nvSpPr>
-          <p:cNvPr id="21" name="Text 19"/>
-          <p:cNvSpPr txBox="1"/>
-          <p:nvPr/>
-        </p:nvSpPr>
-        <p:spPr>
+            <a:endParaRPr lang="en-US" sz="1100"/>
+          </a:p>
+        </p:txBody>
+      </p:sp>
+      <p:sp>
+        <p:nvSpPr>
+          <p:cNvPr id="1483892628" name="Text 19"/>
+          <p:cNvSpPr txBox="1"/>
+          <p:nvPr/>
+        </p:nvSpPr>
+        <p:spPr bwMode="auto">
           <a:xfrm>
             <a:off x="6382512" y="1975104"/>
             <a:ext cx="1682496" cy="237744"/>
@@ -3102,31 +3249,32 @@
           <a:bodyPr wrap="square" rtlCol="0" anchor="ctr"/>
           <a:lstStyle/>
           <a:p>
-            <a:pPr indent="0" marL="0">
-              <a:buNone/>
-            </a:pPr>
-            <a:r>
-              <a:rPr lang="en-US" sz="900" dirty="0">
+            <a:pPr marL="0" indent="0">
+              <a:buNone/>
+              <a:defRPr/>
+            </a:pPr>
+            <a:r>
+              <a:rPr lang="en-US" sz="900">
                 <a:solidFill>
                   <a:srgbClr val="8FA0AF"/>
                 </a:solidFill>
-                <a:latin typeface="Calibri" pitchFamily="34" charset="0"/>
-                <a:ea typeface="Calibri" pitchFamily="34" charset="-122"/>
-                <a:cs typeface="Calibri" pitchFamily="34" charset="-120"/>
+                <a:latin typeface="Calibri"/>
+                <a:ea typeface="Calibri"/>
+                <a:cs typeface="Calibri"/>
               </a:rPr>
               <a:t>8 Blocking</a:t>
             </a:r>
-            <a:endParaRPr lang="en-US" sz="900" dirty="0"/>
-          </a:p>
-        </p:txBody>
-      </p:sp>
-      <p:sp>
-        <p:nvSpPr>
-          <p:cNvPr id="22" name="Shape 20"/>
+            <a:endParaRPr lang="en-US" sz="900"/>
+          </a:p>
+        </p:txBody>
+      </p:sp>
+      <p:sp>
+        <p:nvSpPr>
+          <p:cNvPr id="93529243" name="Shape 20"/>
           <p:cNvSpPr/>
           <p:nvPr/>
         </p:nvSpPr>
-        <p:spPr>
+        <p:spPr bwMode="auto">
           <a:xfrm>
             <a:off x="274320" y="2487168"/>
             <a:ext cx="8595360" cy="731520"/>
@@ -3147,11 +3295,11 @@
       </p:sp>
       <p:sp>
         <p:nvSpPr>
-          <p:cNvPr id="23" name="Shape 21"/>
+          <p:cNvPr id="614230330" name="Shape 21"/>
           <p:cNvSpPr/>
           <p:nvPr/>
         </p:nvSpPr>
-        <p:spPr>
+        <p:spPr bwMode="auto">
           <a:xfrm>
             <a:off x="274320" y="2487168"/>
             <a:ext cx="54864" cy="731520"/>
@@ -3167,11 +3315,11 @@
       </p:sp>
       <p:sp>
         <p:nvSpPr>
-          <p:cNvPr id="24" name="Text 22"/>
-          <p:cNvSpPr txBox="1"/>
-          <p:nvPr/>
-        </p:nvSpPr>
-        <p:spPr>
+          <p:cNvPr id="1167601376" name="Text 22"/>
+          <p:cNvSpPr txBox="1"/>
+          <p:nvPr/>
+        </p:nvSpPr>
+        <p:spPr bwMode="auto">
           <a:xfrm>
             <a:off x="438912" y="2560320"/>
             <a:ext cx="1371600" cy="256032"/>
@@ -3186,31 +3334,32 @@
           <a:bodyPr wrap="square" rtlCol="0" anchor="ctr"/>
           <a:lstStyle/>
           <a:p>
-            <a:pPr indent="0" marL="0">
-              <a:buNone/>
-            </a:pPr>
-            <a:r>
-              <a:rPr lang="en-US" sz="1100" b="1" dirty="0">
+            <a:pPr marL="0" indent="0">
+              <a:buNone/>
+              <a:defRPr/>
+            </a:pPr>
+            <a:r>
+              <a:rPr lang="en-US" sz="1100" b="1">
                 <a:solidFill>
                   <a:srgbClr val="2C3E50"/>
                 </a:solidFill>
-                <a:latin typeface="Calibri" pitchFamily="34" charset="0"/>
-                <a:ea typeface="Calibri" pitchFamily="34" charset="-122"/>
-                <a:cs typeface="Calibri" pitchFamily="34" charset="-120"/>
+                <a:latin typeface="Calibri"/>
+                <a:ea typeface="Calibri"/>
+                <a:cs typeface="Calibri"/>
               </a:rPr>
               <a:t>The paradox:</a:t>
             </a:r>
-            <a:endParaRPr lang="en-US" sz="1100" dirty="0"/>
-          </a:p>
-        </p:txBody>
-      </p:sp>
-      <p:sp>
-        <p:nvSpPr>
-          <p:cNvPr id="25" name="Text 23"/>
-          <p:cNvSpPr txBox="1"/>
-          <p:nvPr/>
-        </p:nvSpPr>
-        <p:spPr>
+            <a:endParaRPr lang="en-US" sz="1100"/>
+          </a:p>
+        </p:txBody>
+      </p:sp>
+      <p:sp>
+        <p:nvSpPr>
+          <p:cNvPr id="937137542" name="Text 23"/>
+          <p:cNvSpPr txBox="1"/>
+          <p:nvPr/>
+        </p:nvSpPr>
+        <p:spPr bwMode="auto">
           <a:xfrm>
             <a:off x="1737360" y="2542032"/>
             <a:ext cx="7040880" cy="621792"/>
@@ -3225,31 +3374,32 @@
           <a:bodyPr wrap="square" rtlCol="0" anchor="ctr"/>
           <a:lstStyle/>
           <a:p>
-            <a:pPr indent="0" marL="0">
-              <a:buNone/>
-            </a:pPr>
-            <a:r>
-              <a:rPr lang="en-US" sz="1100" dirty="0">
+            <a:pPr marL="0" indent="0">
+              <a:buNone/>
+              <a:defRPr/>
+            </a:pPr>
+            <a:r>
+              <a:rPr lang="en-US" sz="1100">
                 <a:solidFill>
                   <a:srgbClr val="2C3E50"/>
                 </a:solidFill>
-                <a:latin typeface="Calibri" pitchFamily="34" charset="0"/>
-                <a:ea typeface="Calibri" pitchFamily="34" charset="-122"/>
-                <a:cs typeface="Calibri" pitchFamily="34" charset="-120"/>
+                <a:latin typeface="Calibri"/>
+                <a:ea typeface="Calibri"/>
+                <a:cs typeface="Calibri"/>
               </a:rPr>
               <a:t>More customers paid AstraPay every month. More money moved. Yet contribution profit per successful transaction fell from $0.29 in January to $0.04 in June — an 85% collapse — driven by costs rising faster than revenue on the transactions that actually succeeded.</a:t>
             </a:r>
-            <a:endParaRPr lang="en-US" sz="1100" dirty="0"/>
-          </a:p>
-        </p:txBody>
-      </p:sp>
-      <p:sp>
-        <p:nvSpPr>
-          <p:cNvPr id="26" name="Text 24"/>
-          <p:cNvSpPr txBox="1"/>
-          <p:nvPr/>
-        </p:nvSpPr>
-        <p:spPr>
+            <a:endParaRPr lang="en-US" sz="1100"/>
+          </a:p>
+        </p:txBody>
+      </p:sp>
+      <p:sp>
+        <p:nvSpPr>
+          <p:cNvPr id="775977444" name="Text 24"/>
+          <p:cNvSpPr txBox="1"/>
+          <p:nvPr/>
+        </p:nvSpPr>
+        <p:spPr bwMode="auto">
           <a:xfrm>
             <a:off x="274320" y="3401568"/>
             <a:ext cx="8412480" cy="201168"/>
@@ -3264,31 +3414,32 @@
           <a:bodyPr wrap="square" rtlCol="0" anchor="ctr"/>
           <a:lstStyle/>
           <a:p>
-            <a:pPr indent="0" marL="0">
-              <a:buNone/>
-            </a:pPr>
-            <a:r>
-              <a:rPr lang="en-US" sz="800" b="1" spc="200" kern="0" dirty="0">
+            <a:pPr marL="0" indent="0">
+              <a:buNone/>
+              <a:defRPr/>
+            </a:pPr>
+            <a:r>
+              <a:rPr lang="en-US" sz="800" b="1" spc="200">
                 <a:solidFill>
                   <a:srgbClr val="8FA0AF"/>
                 </a:solidFill>
-                <a:latin typeface="Calibri" pitchFamily="34" charset="0"/>
-                <a:ea typeface="Calibri" pitchFamily="34" charset="-122"/>
-                <a:cs typeface="Calibri" pitchFamily="34" charset="-120"/>
+                <a:latin typeface="Calibri"/>
+                <a:ea typeface="Calibri"/>
+                <a:cs typeface="Calibri"/>
               </a:rPr>
               <a:t>FOUR COMPETING HYPOTHESES — TESTED AGAINST THE DATA</a:t>
             </a:r>
-            <a:endParaRPr lang="en-US" sz="800" dirty="0"/>
-          </a:p>
-        </p:txBody>
-      </p:sp>
-      <p:sp>
-        <p:nvSpPr>
-          <p:cNvPr id="27" name="Shape 25"/>
+            <a:endParaRPr lang="en-US" sz="800"/>
+          </a:p>
+        </p:txBody>
+      </p:sp>
+      <p:sp>
+        <p:nvSpPr>
+          <p:cNvPr id="1569131857" name="Shape 25"/>
           <p:cNvSpPr/>
           <p:nvPr/>
         </p:nvSpPr>
-        <p:spPr>
+        <p:spPr bwMode="auto">
           <a:xfrm>
             <a:off x="274320" y="3621024"/>
             <a:ext cx="2084832" cy="1188720"/>
@@ -3309,11 +3460,11 @@
       </p:sp>
       <p:sp>
         <p:nvSpPr>
-          <p:cNvPr id="28" name="Shape 26"/>
+          <p:cNvPr id="445070364" name="Shape 26"/>
           <p:cNvSpPr/>
           <p:nvPr/>
         </p:nvSpPr>
-        <p:spPr>
+        <p:spPr bwMode="auto">
           <a:xfrm>
             <a:off x="274320" y="3621024"/>
             <a:ext cx="2084832" cy="54864"/>
@@ -3329,11 +3480,11 @@
       </p:sp>
       <p:sp>
         <p:nvSpPr>
-          <p:cNvPr id="29" name="Text 27"/>
-          <p:cNvSpPr txBox="1"/>
-          <p:nvPr/>
-        </p:nvSpPr>
-        <p:spPr>
+          <p:cNvPr id="1400829249" name="Text 27"/>
+          <p:cNvSpPr txBox="1"/>
+          <p:nvPr/>
+        </p:nvSpPr>
+        <p:spPr bwMode="auto">
           <a:xfrm>
             <a:off x="384048" y="3694176"/>
             <a:ext cx="1865376" cy="219456"/>
@@ -3348,33 +3499,34 @@
           <a:bodyPr wrap="square" rtlCol="0" anchor="ctr"/>
           <a:lstStyle/>
           <a:p>
-            <a:pPr indent="0" marL="0">
-              <a:buNone/>
-            </a:pPr>
-            <a:r>
-              <a:rPr lang="en-US" sz="900" b="1" dirty="0">
+            <a:pPr marL="0" indent="0">
+              <a:buNone/>
+              <a:defRPr/>
+            </a:pPr>
+            <a:r>
+              <a:rPr lang="en-US" sz="900" b="1">
                 <a:solidFill>
                   <a:srgbClr val="F4A31A"/>
                 </a:solidFill>
-                <a:latin typeface="Calibri" pitchFamily="34" charset="0"/>
-                <a:ea typeface="Calibri" pitchFamily="34" charset="-122"/>
-                <a:cs typeface="Calibri" pitchFamily="34" charset="-120"/>
+                <a:latin typeface="Calibri"/>
+                <a:ea typeface="Calibri"/>
+                <a:cs typeface="Calibri"/>
               </a:rPr>
               <a:t>CFO</a:t>
             </a:r>
-            <a:endParaRPr lang="en-US" sz="900" dirty="0"/>
-          </a:p>
-        </p:txBody>
-      </p:sp>
-      <p:sp>
-        <p:nvSpPr>
-          <p:cNvPr id="30" name="Text 28"/>
-          <p:cNvSpPr txBox="1"/>
-          <p:nvPr/>
-        </p:nvSpPr>
-        <p:spPr>
-          <a:xfrm>
-            <a:off x="384048" y="3895344"/>
+            <a:endParaRPr lang="en-US" sz="900"/>
+          </a:p>
+        </p:txBody>
+      </p:sp>
+      <p:sp>
+        <p:nvSpPr>
+          <p:cNvPr id="910284800" name="Text 28"/>
+          <p:cNvSpPr txBox="1"/>
+          <p:nvPr/>
+        </p:nvSpPr>
+        <p:spPr bwMode="auto">
+          <a:xfrm>
+            <a:off x="384048" y="3895343"/>
             <a:ext cx="1865376" cy="512064"/>
           </a:xfrm>
           <a:prstGeom prst="rect">
@@ -3387,54 +3539,56 @@
           <a:bodyPr wrap="square" rtlCol="0" anchor="ctr"/>
           <a:lstStyle/>
           <a:p>
-            <a:pPr indent="0" marL="0">
+            <a:pPr marL="0" indent="0">
               <a:lnSpc>
                 <a:spcPct val="110000"/>
               </a:lnSpc>
               <a:buNone/>
-            </a:pPr>
-            <a:r>
-              <a:rPr lang="en-US" sz="1100" b="1" dirty="0">
+              <a:defRPr/>
+            </a:pPr>
+            <a:r>
+              <a:rPr lang="en-US" sz="1100" b="1">
                 <a:solidFill>
                   <a:srgbClr val="2C3E50"/>
                 </a:solidFill>
-                <a:latin typeface="Calibri" pitchFamily="34" charset="0"/>
-                <a:ea typeface="Calibri" pitchFamily="34" charset="-122"/>
-                <a:cs typeface="Calibri" pitchFamily="34" charset="-120"/>
+                <a:latin typeface="Calibri"/>
+                <a:ea typeface="Calibri"/>
+                <a:cs typeface="Calibri"/>
               </a:rPr>
               <a:t>Merchant pricing</a:t>
             </a:r>
-            <a:endParaRPr lang="en-US" sz="1100" dirty="0"/>
-          </a:p>
-          <a:p>
-            <a:pPr indent="0" marL="0">
+            <a:endParaRPr lang="en-US" sz="1100"/>
+          </a:p>
+          <a:p>
+            <a:pPr marL="0" indent="0">
               <a:lnSpc>
                 <a:spcPct val="110000"/>
               </a:lnSpc>
               <a:buNone/>
-            </a:pPr>
-            <a:r>
-              <a:rPr lang="en-US" sz="1100" b="1" dirty="0">
+              <a:defRPr/>
+            </a:pPr>
+            <a:r>
+              <a:rPr lang="en-US" sz="1100" b="1">
                 <a:solidFill>
                   <a:srgbClr val="2C3E50"/>
                 </a:solidFill>
-                <a:latin typeface="Calibri" pitchFamily="34" charset="0"/>
-                <a:ea typeface="Calibri" pitchFamily="34" charset="-122"/>
-                <a:cs typeface="Calibri" pitchFamily="34" charset="-120"/>
+                <a:latin typeface="Calibri"/>
+                <a:ea typeface="Calibri"/>
+                <a:cs typeface="Calibri"/>
               </a:rPr>
               <a:t>eroded</a:t>
             </a:r>
-            <a:endParaRPr lang="en-US" sz="1100" dirty="0"/>
-          </a:p>
-        </p:txBody>
-      </p:sp>
-      <p:sp>
-        <p:nvSpPr>
-          <p:cNvPr id="31" name="Shape 29"/>
+            <a:endParaRPr lang="en-US" sz="1100"/>
+          </a:p>
+        </p:txBody>
+      </p:sp>
+      <p:sp>
+        <p:nvSpPr>
+          <p:cNvPr id="870004324" name="Shape 29"/>
           <p:cNvSpPr/>
           <p:nvPr/>
         </p:nvSpPr>
-        <p:spPr>
+        <p:spPr bwMode="auto">
           <a:xfrm>
             <a:off x="2487168" y="3621024"/>
             <a:ext cx="2084832" cy="1188720"/>
@@ -3455,11 +3609,11 @@
       </p:sp>
       <p:sp>
         <p:nvSpPr>
-          <p:cNvPr id="32" name="Shape 30"/>
+          <p:cNvPr id="1202305704" name="Shape 30"/>
           <p:cNvSpPr/>
           <p:nvPr/>
         </p:nvSpPr>
-        <p:spPr>
+        <p:spPr bwMode="auto">
           <a:xfrm>
             <a:off x="2487168" y="3621024"/>
             <a:ext cx="2084832" cy="54864"/>
@@ -3475,11 +3629,11 @@
       </p:sp>
       <p:sp>
         <p:nvSpPr>
-          <p:cNvPr id="33" name="Text 31"/>
-          <p:cNvSpPr txBox="1"/>
-          <p:nvPr/>
-        </p:nvSpPr>
-        <p:spPr>
+          <p:cNvPr id="73287531" name="Text 31"/>
+          <p:cNvSpPr txBox="1"/>
+          <p:nvPr/>
+        </p:nvSpPr>
+        <p:spPr bwMode="auto">
           <a:xfrm>
             <a:off x="2596896" y="3694176"/>
             <a:ext cx="1865376" cy="219456"/>
@@ -3494,33 +3648,34 @@
           <a:bodyPr wrap="square" rtlCol="0" anchor="ctr"/>
           <a:lstStyle/>
           <a:p>
-            <a:pPr indent="0" marL="0">
-              <a:buNone/>
-            </a:pPr>
-            <a:r>
-              <a:rPr lang="en-US" sz="900" b="1" dirty="0">
+            <a:pPr marL="0" indent="0">
+              <a:buNone/>
+              <a:defRPr/>
+            </a:pPr>
+            <a:r>
+              <a:rPr lang="en-US" sz="900" b="1">
                 <a:solidFill>
                   <a:srgbClr val="00897B"/>
                 </a:solidFill>
-                <a:latin typeface="Calibri" pitchFamily="34" charset="0"/>
-                <a:ea typeface="Calibri" pitchFamily="34" charset="-122"/>
-                <a:cs typeface="Calibri" pitchFamily="34" charset="-120"/>
+                <a:latin typeface="Calibri"/>
+                <a:ea typeface="Calibri"/>
+                <a:cs typeface="Calibri"/>
               </a:rPr>
               <a:t>Payments Head</a:t>
             </a:r>
-            <a:endParaRPr lang="en-US" sz="900" dirty="0"/>
-          </a:p>
-        </p:txBody>
-      </p:sp>
-      <p:sp>
-        <p:nvSpPr>
-          <p:cNvPr id="34" name="Text 32"/>
-          <p:cNvSpPr txBox="1"/>
-          <p:nvPr/>
-        </p:nvSpPr>
-        <p:spPr>
-          <a:xfrm>
-            <a:off x="2596896" y="3895344"/>
+            <a:endParaRPr lang="en-US" sz="900"/>
+          </a:p>
+        </p:txBody>
+      </p:sp>
+      <p:sp>
+        <p:nvSpPr>
+          <p:cNvPr id="929244374" name="Text 32"/>
+          <p:cNvSpPr txBox="1"/>
+          <p:nvPr/>
+        </p:nvSpPr>
+        <p:spPr bwMode="auto">
+          <a:xfrm>
+            <a:off x="2596896" y="3895343"/>
             <a:ext cx="1865376" cy="512064"/>
           </a:xfrm>
           <a:prstGeom prst="rect">
@@ -3533,54 +3688,56 @@
           <a:bodyPr wrap="square" rtlCol="0" anchor="ctr"/>
           <a:lstStyle/>
           <a:p>
-            <a:pPr indent="0" marL="0">
+            <a:pPr marL="0" indent="0">
               <a:lnSpc>
                 <a:spcPct val="110000"/>
               </a:lnSpc>
               <a:buNone/>
-            </a:pPr>
-            <a:r>
-              <a:rPr lang="en-US" sz="1100" b="1" dirty="0">
+              <a:defRPr/>
+            </a:pPr>
+            <a:r>
+              <a:rPr lang="en-US" sz="1100" b="1">
                 <a:solidFill>
                   <a:srgbClr val="2C3E50"/>
                 </a:solidFill>
-                <a:latin typeface="Calibri" pitchFamily="34" charset="0"/>
-                <a:ea typeface="Calibri" pitchFamily="34" charset="-122"/>
-                <a:cs typeface="Calibri" pitchFamily="34" charset="-120"/>
+                <a:latin typeface="Calibri"/>
+                <a:ea typeface="Calibri"/>
+                <a:cs typeface="Calibri"/>
               </a:rPr>
               <a:t>Routing costs</a:t>
             </a:r>
-            <a:endParaRPr lang="en-US" sz="1100" dirty="0"/>
-          </a:p>
-          <a:p>
-            <a:pPr indent="0" marL="0">
+            <a:endParaRPr lang="en-US" sz="1100"/>
+          </a:p>
+          <a:p>
+            <a:pPr marL="0" indent="0">
               <a:lnSpc>
                 <a:spcPct val="110000"/>
               </a:lnSpc>
               <a:buNone/>
-            </a:pPr>
-            <a:r>
-              <a:rPr lang="en-US" sz="1100" b="1" dirty="0">
+              <a:defRPr/>
+            </a:pPr>
+            <a:r>
+              <a:rPr lang="en-US" sz="1100" b="1">
                 <a:solidFill>
                   <a:srgbClr val="2C3E50"/>
                 </a:solidFill>
-                <a:latin typeface="Calibri" pitchFamily="34" charset="0"/>
-                <a:ea typeface="Calibri" pitchFamily="34" charset="-122"/>
-                <a:cs typeface="Calibri" pitchFamily="34" charset="-120"/>
+                <a:latin typeface="Calibri"/>
+                <a:ea typeface="Calibri"/>
+                <a:cs typeface="Calibri"/>
               </a:rPr>
               <a:t>increased</a:t>
             </a:r>
-            <a:endParaRPr lang="en-US" sz="1100" dirty="0"/>
-          </a:p>
-        </p:txBody>
-      </p:sp>
-      <p:sp>
-        <p:nvSpPr>
-          <p:cNvPr id="35" name="Shape 33"/>
+            <a:endParaRPr lang="en-US" sz="1100"/>
+          </a:p>
+        </p:txBody>
+      </p:sp>
+      <p:sp>
+        <p:nvSpPr>
+          <p:cNvPr id="1873936793" name="Shape 33"/>
           <p:cNvSpPr/>
           <p:nvPr/>
         </p:nvSpPr>
-        <p:spPr>
+        <p:spPr bwMode="auto">
           <a:xfrm>
             <a:off x="4700016" y="3621024"/>
             <a:ext cx="2084832" cy="1188720"/>
@@ -3601,11 +3758,11 @@
       </p:sp>
       <p:sp>
         <p:nvSpPr>
-          <p:cNvPr id="36" name="Shape 34"/>
+          <p:cNvPr id="1415758679" name="Shape 34"/>
           <p:cNvSpPr/>
           <p:nvPr/>
         </p:nvSpPr>
-        <p:spPr>
+        <p:spPr bwMode="auto">
           <a:xfrm>
             <a:off x="4700016" y="3621024"/>
             <a:ext cx="2084832" cy="54864"/>
@@ -3621,11 +3778,11 @@
       </p:sp>
       <p:sp>
         <p:nvSpPr>
-          <p:cNvPr id="37" name="Text 35"/>
-          <p:cNvSpPr txBox="1"/>
-          <p:nvPr/>
-        </p:nvSpPr>
-        <p:spPr>
+          <p:cNvPr id="2022947512" name="Text 35"/>
+          <p:cNvSpPr txBox="1"/>
+          <p:nvPr/>
+        </p:nvSpPr>
+        <p:spPr bwMode="auto">
           <a:xfrm>
             <a:off x="4809744" y="3694176"/>
             <a:ext cx="1865376" cy="219456"/>
@@ -3640,33 +3797,34 @@
           <a:bodyPr wrap="square" rtlCol="0" anchor="ctr"/>
           <a:lstStyle/>
           <a:p>
-            <a:pPr indent="0" marL="0">
-              <a:buNone/>
-            </a:pPr>
-            <a:r>
-              <a:rPr lang="en-US" sz="900" b="1" dirty="0">
+            <a:pPr marL="0" indent="0">
+              <a:buNone/>
+              <a:defRPr/>
+            </a:pPr>
+            <a:r>
+              <a:rPr lang="en-US" sz="900" b="1">
                 <a:solidFill>
                   <a:srgbClr val="F4A31A"/>
                 </a:solidFill>
-                <a:latin typeface="Calibri" pitchFamily="34" charset="0"/>
-                <a:ea typeface="Calibri" pitchFamily="34" charset="-122"/>
-                <a:cs typeface="Calibri" pitchFamily="34" charset="-120"/>
+                <a:latin typeface="Calibri"/>
+                <a:ea typeface="Calibri"/>
+                <a:cs typeface="Calibri"/>
               </a:rPr>
               <a:t>Risk Head</a:t>
             </a:r>
-            <a:endParaRPr lang="en-US" sz="900" dirty="0"/>
-          </a:p>
-        </p:txBody>
-      </p:sp>
-      <p:sp>
-        <p:nvSpPr>
-          <p:cNvPr id="38" name="Text 36"/>
-          <p:cNvSpPr txBox="1"/>
-          <p:nvPr/>
-        </p:nvSpPr>
-        <p:spPr>
-          <a:xfrm>
-            <a:off x="4809744" y="3895344"/>
+            <a:endParaRPr lang="en-US" sz="900"/>
+          </a:p>
+        </p:txBody>
+      </p:sp>
+      <p:sp>
+        <p:nvSpPr>
+          <p:cNvPr id="430366267" name="Text 36"/>
+          <p:cNvSpPr txBox="1"/>
+          <p:nvPr/>
+        </p:nvSpPr>
+        <p:spPr bwMode="auto">
+          <a:xfrm>
+            <a:off x="4809744" y="3895343"/>
             <a:ext cx="1865376" cy="512064"/>
           </a:xfrm>
           <a:prstGeom prst="rect">
@@ -3679,54 +3837,56 @@
           <a:bodyPr wrap="square" rtlCol="0" anchor="ctr"/>
           <a:lstStyle/>
           <a:p>
-            <a:pPr indent="0" marL="0">
+            <a:pPr marL="0" indent="0">
               <a:lnSpc>
                 <a:spcPct val="110000"/>
               </a:lnSpc>
               <a:buNone/>
-            </a:pPr>
-            <a:r>
-              <a:rPr lang="en-US" sz="1100" b="1" dirty="0">
+              <a:defRPr/>
+            </a:pPr>
+            <a:r>
+              <a:rPr lang="en-US" sz="1100" b="1">
                 <a:solidFill>
                   <a:srgbClr val="2C3E50"/>
                 </a:solidFill>
-                <a:latin typeface="Calibri" pitchFamily="34" charset="0"/>
-                <a:ea typeface="Calibri" pitchFamily="34" charset="-122"/>
-                <a:cs typeface="Calibri" pitchFamily="34" charset="-120"/>
+                <a:latin typeface="Calibri"/>
+                <a:ea typeface="Calibri"/>
+                <a:cs typeface="Calibri"/>
               </a:rPr>
               <a:t>Fraud controls</a:t>
             </a:r>
-            <a:endParaRPr lang="en-US" sz="1100" dirty="0"/>
-          </a:p>
-          <a:p>
-            <a:pPr indent="0" marL="0">
+            <a:endParaRPr lang="en-US" sz="1100"/>
+          </a:p>
+          <a:p>
+            <a:pPr marL="0" indent="0">
               <a:lnSpc>
                 <a:spcPct val="110000"/>
               </a:lnSpc>
               <a:buNone/>
-            </a:pPr>
-            <a:r>
-              <a:rPr lang="en-US" sz="1100" b="1" dirty="0">
+              <a:defRPr/>
+            </a:pPr>
+            <a:r>
+              <a:rPr lang="en-US" sz="1100" b="1">
                 <a:solidFill>
                   <a:srgbClr val="2C3E50"/>
                 </a:solidFill>
-                <a:latin typeface="Calibri" pitchFamily="34" charset="0"/>
-                <a:ea typeface="Calibri" pitchFamily="34" charset="-122"/>
-                <a:cs typeface="Calibri" pitchFamily="34" charset="-120"/>
+                <a:latin typeface="Calibri"/>
+                <a:ea typeface="Calibri"/>
+                <a:cs typeface="Calibri"/>
               </a:rPr>
               <a:t>caused declines</a:t>
             </a:r>
-            <a:endParaRPr lang="en-US" sz="1100" dirty="0"/>
-          </a:p>
-        </p:txBody>
-      </p:sp>
-      <p:sp>
-        <p:nvSpPr>
-          <p:cNvPr id="39" name="Shape 37"/>
+            <a:endParaRPr lang="en-US" sz="1100"/>
+          </a:p>
+        </p:txBody>
+      </p:sp>
+      <p:sp>
+        <p:nvSpPr>
+          <p:cNvPr id="767581505" name="Shape 37"/>
           <p:cNvSpPr/>
           <p:nvPr/>
         </p:nvSpPr>
-        <p:spPr>
+        <p:spPr bwMode="auto">
           <a:xfrm>
             <a:off x="6912864" y="3621024"/>
             <a:ext cx="2084832" cy="1188720"/>
@@ -3747,11 +3907,11 @@
       </p:sp>
       <p:sp>
         <p:nvSpPr>
-          <p:cNvPr id="40" name="Shape 38"/>
+          <p:cNvPr id="974406169" name="Shape 38"/>
           <p:cNvSpPr/>
           <p:nvPr/>
         </p:nvSpPr>
-        <p:spPr>
+        <p:spPr bwMode="auto">
           <a:xfrm>
             <a:off x="6912864" y="3621024"/>
             <a:ext cx="2084832" cy="54864"/>
@@ -3767,11 +3927,11 @@
       </p:sp>
       <p:sp>
         <p:nvSpPr>
-          <p:cNvPr id="41" name="Text 39"/>
-          <p:cNvSpPr txBox="1"/>
-          <p:nvPr/>
-        </p:nvSpPr>
-        <p:spPr>
+          <p:cNvPr id="1181286564" name="Text 39"/>
+          <p:cNvSpPr txBox="1"/>
+          <p:nvPr/>
+        </p:nvSpPr>
+        <p:spPr bwMode="auto">
           <a:xfrm>
             <a:off x="7022592" y="3694176"/>
             <a:ext cx="1865376" cy="219456"/>
@@ -3786,33 +3946,34 @@
           <a:bodyPr wrap="square" rtlCol="0" anchor="ctr"/>
           <a:lstStyle/>
           <a:p>
-            <a:pPr indent="0" marL="0">
-              <a:buNone/>
-            </a:pPr>
-            <a:r>
-              <a:rPr lang="en-US" sz="900" b="1" dirty="0">
+            <a:pPr marL="0" indent="0">
+              <a:buNone/>
+              <a:defRPr/>
+            </a:pPr>
+            <a:r>
+              <a:rPr lang="en-US" sz="900" b="1">
                 <a:solidFill>
                   <a:srgbClr val="C0392B"/>
                 </a:solidFill>
-                <a:latin typeface="Calibri" pitchFamily="34" charset="0"/>
-                <a:ea typeface="Calibri" pitchFamily="34" charset="-122"/>
-                <a:cs typeface="Calibri" pitchFamily="34" charset="-120"/>
+                <a:latin typeface="Calibri"/>
+                <a:ea typeface="Calibri"/>
+                <a:cs typeface="Calibri"/>
               </a:rPr>
               <a:t>Data Head</a:t>
             </a:r>
-            <a:endParaRPr lang="en-US" sz="900" dirty="0"/>
-          </a:p>
-        </p:txBody>
-      </p:sp>
-      <p:sp>
-        <p:nvSpPr>
-          <p:cNvPr id="42" name="Text 40"/>
-          <p:cNvSpPr txBox="1"/>
-          <p:nvPr/>
-        </p:nvSpPr>
-        <p:spPr>
-          <a:xfrm>
-            <a:off x="7022592" y="3895344"/>
+            <a:endParaRPr lang="en-US" sz="900"/>
+          </a:p>
+        </p:txBody>
+      </p:sp>
+      <p:sp>
+        <p:nvSpPr>
+          <p:cNvPr id="1092722000" name="Text 40"/>
+          <p:cNvSpPr txBox="1"/>
+          <p:nvPr/>
+        </p:nvSpPr>
+        <p:spPr bwMode="auto">
+          <a:xfrm>
+            <a:off x="7022592" y="3895343"/>
             <a:ext cx="1865376" cy="512064"/>
           </a:xfrm>
           <a:prstGeom prst="rect">
@@ -3825,44 +3986,46 @@
           <a:bodyPr wrap="square" rtlCol="0" anchor="ctr"/>
           <a:lstStyle/>
           <a:p>
-            <a:pPr indent="0" marL="0">
+            <a:pPr marL="0" indent="0">
               <a:lnSpc>
                 <a:spcPct val="110000"/>
               </a:lnSpc>
               <a:buNone/>
-            </a:pPr>
-            <a:r>
-              <a:rPr lang="en-US" sz="1100" b="1" dirty="0">
+              <a:defRPr/>
+            </a:pPr>
+            <a:r>
+              <a:rPr lang="en-US" sz="1100" b="1">
                 <a:solidFill>
                   <a:srgbClr val="2C3E50"/>
                 </a:solidFill>
-                <a:latin typeface="Calibri" pitchFamily="34" charset="0"/>
-                <a:ea typeface="Calibri" pitchFamily="34" charset="-122"/>
-                <a:cs typeface="Calibri" pitchFamily="34" charset="-120"/>
+                <a:latin typeface="Calibri"/>
+                <a:ea typeface="Calibri"/>
+                <a:cs typeface="Calibri"/>
               </a:rPr>
               <a:t>Reporting</a:t>
             </a:r>
-            <a:endParaRPr lang="en-US" sz="1100" dirty="0"/>
-          </a:p>
-          <a:p>
-            <a:pPr indent="0" marL="0">
+            <a:endParaRPr lang="en-US" sz="1100"/>
+          </a:p>
+          <a:p>
+            <a:pPr marL="0" indent="0">
               <a:lnSpc>
                 <a:spcPct val="110000"/>
               </a:lnSpc>
               <a:buNone/>
-            </a:pPr>
-            <a:r>
-              <a:rPr lang="en-US" sz="1100" b="1" dirty="0">
+              <a:defRPr/>
+            </a:pPr>
+            <a:r>
+              <a:rPr lang="en-US" sz="1100" b="1">
                 <a:solidFill>
                   <a:srgbClr val="2C3E50"/>
                 </a:solidFill>
-                <a:latin typeface="Calibri" pitchFamily="34" charset="0"/>
-                <a:ea typeface="Calibri" pitchFamily="34" charset="-122"/>
-                <a:cs typeface="Calibri" pitchFamily="34" charset="-120"/>
+                <a:latin typeface="Calibri"/>
+                <a:ea typeface="Calibri"/>
+                <a:cs typeface="Calibri"/>
               </a:rPr>
               <a:t>cannot be trusted</a:t>
             </a:r>
-            <a:endParaRPr lang="en-US" sz="1100" dirty="0"/>
+            <a:endParaRPr lang="en-US" sz="1100"/>
           </a:p>
         </p:txBody>
       </p:sp>
@@ -3871,11 +4034,19 @@
   <p:clrMapOvr>
     <a:masterClrMapping/>
   </p:clrMapOvr>
+  <mc:AlternateContent xmlns:mc="http://schemas.openxmlformats.org/markup-compatibility/2006">
+    <mc:Choice xmlns:p159="http://schemas.microsoft.com/office/powerpoint/2015/09/main" xmlns:p14="http://schemas.microsoft.com/office/powerpoint/2010/main" Requires="p159">
+      <p:transition p14:dur="500" advClick="1"/>
+    </mc:Choice>
+    <mc:Fallback>
+      <p:transition advClick="1"/>
+    </mc:Fallback>
+  </mc:AlternateContent>
 </p:sld>
 </file>
 
 <file path=ppt/slides/slide3.xml><?xml version="1.0" encoding="utf-8"?>
-<p:sld xmlns:a="http://schemas.openxmlformats.org/drawingml/2006/main" xmlns:r="http://schemas.openxmlformats.org/officeDocument/2006/relationships" xmlns:p="http://schemas.openxmlformats.org/presentationml/2006/main">
+<p:sld xmlns:a="http://schemas.openxmlformats.org/drawingml/2006/main" xmlns:r="http://schemas.openxmlformats.org/officeDocument/2006/relationships" xmlns:p="http://schemas.openxmlformats.org/presentationml/2006/main" xmlns:m="http://schemas.openxmlformats.org/officeDocument/2006/math" xmlns:w="http://schemas.openxmlformats.org/wordprocessingml/2006/main" xmlns:mc="http://schemas.openxmlformats.org/markup-compatibility/2006" showMasterPhAnim="0" showMasterSp="1" show="1">
   <p:cSld name="Slide 3">
     <p:spTree>
       <p:nvGrpSpPr>
@@ -3883,7 +4054,7 @@
         <p:cNvGrpSpPr/>
         <p:nvPr/>
       </p:nvGrpSpPr>
-      <p:grpSpPr>
+      <p:grpSpPr bwMode="auto">
         <a:xfrm>
           <a:off x="0" y="0"/>
           <a:ext cx="0" cy="0"/>
@@ -3893,11 +4064,11 @@
       </p:grpSpPr>
       <p:sp>
         <p:nvSpPr>
-          <p:cNvPr id="2" name="Shape 0"/>
+          <p:cNvPr id="1289826178" name="Shape 0"/>
           <p:cNvSpPr/>
           <p:nvPr/>
         </p:nvSpPr>
-        <p:spPr>
+        <p:spPr bwMode="auto">
           <a:xfrm>
             <a:off x="0" y="0"/>
             <a:ext cx="9144000" cy="5143500"/>
@@ -3913,11 +4084,11 @@
       </p:sp>
       <p:sp>
         <p:nvSpPr>
-          <p:cNvPr id="3" name="Shape 1"/>
+          <p:cNvPr id="1774122602" name="Shape 1"/>
           <p:cNvSpPr/>
           <p:nvPr/>
         </p:nvSpPr>
-        <p:spPr>
+        <p:spPr bwMode="auto">
           <a:xfrm>
             <a:off x="0" y="0"/>
             <a:ext cx="9144000" cy="1005840"/>
@@ -3933,11 +4104,11 @@
       </p:sp>
       <p:sp>
         <p:nvSpPr>
-          <p:cNvPr id="4" name="Text 2"/>
-          <p:cNvSpPr txBox="1"/>
-          <p:nvPr/>
-        </p:nvSpPr>
-        <p:spPr>
+          <p:cNvPr id="2127320685" name="Text 2"/>
+          <p:cNvSpPr txBox="1"/>
+          <p:nvPr/>
+        </p:nvSpPr>
+        <p:spPr bwMode="auto">
           <a:xfrm>
             <a:off x="365760" y="73152"/>
             <a:ext cx="3657600" cy="237744"/>
@@ -3952,31 +4123,32 @@
           <a:bodyPr wrap="square" rtlCol="0" anchor="ctr"/>
           <a:lstStyle/>
           <a:p>
-            <a:pPr indent="0" marL="0">
-              <a:buNone/>
-            </a:pPr>
-            <a:r>
-              <a:rPr lang="en-US" sz="800" b="1" spc="300" kern="0" dirty="0">
+            <a:pPr marL="0" indent="0">
+              <a:buNone/>
+              <a:defRPr/>
+            </a:pPr>
+            <a:r>
+              <a:rPr lang="en-US" sz="800" b="1" spc="300">
                 <a:solidFill>
                   <a:srgbClr val="00897B"/>
                 </a:solidFill>
-                <a:latin typeface="Calibri" pitchFamily="34" charset="0"/>
-                <a:ea typeface="Calibri" pitchFamily="34" charset="-122"/>
-                <a:cs typeface="Calibri" pitchFamily="34" charset="-120"/>
+                <a:latin typeface="Calibri"/>
+                <a:ea typeface="Calibri"/>
+                <a:cs typeface="Calibri"/>
               </a:rPr>
               <a:t>EVIDENCE</a:t>
             </a:r>
-            <a:endParaRPr lang="en-US" sz="800" dirty="0"/>
-          </a:p>
-        </p:txBody>
-      </p:sp>
-      <p:sp>
-        <p:nvSpPr>
-          <p:cNvPr id="5" name="Text 3"/>
-          <p:cNvSpPr txBox="1"/>
-          <p:nvPr/>
-        </p:nvSpPr>
-        <p:spPr>
+            <a:endParaRPr lang="en-US" sz="800"/>
+          </a:p>
+        </p:txBody>
+      </p:sp>
+      <p:sp>
+        <p:nvSpPr>
+          <p:cNvPr id="1312704303" name="Text 3"/>
+          <p:cNvSpPr txBox="1"/>
+          <p:nvPr/>
+        </p:nvSpPr>
+        <p:spPr bwMode="auto">
           <a:xfrm>
             <a:off x="365760" y="310896"/>
             <a:ext cx="8412480" cy="530352"/>
@@ -3991,63 +4163,68 @@
           <a:bodyPr wrap="square" rtlCol="0" anchor="ctr"/>
           <a:lstStyle/>
           <a:p>
-            <a:pPr indent="0" marL="0">
-              <a:buNone/>
-            </a:pPr>
-            <a:r>
-              <a:rPr lang="en-US" sz="2200" b="1" dirty="0">
+            <a:pPr marL="0" indent="0">
+              <a:buNone/>
+              <a:defRPr/>
+            </a:pPr>
+            <a:r>
+              <a:rPr lang="en-US" sz="2200" b="1">
                 <a:solidFill>
                   <a:srgbClr val="FFFFFF"/>
                 </a:solidFill>
-                <a:latin typeface="Cambria" pitchFamily="34" charset="0"/>
-                <a:ea typeface="Cambria" pitchFamily="34" charset="-122"/>
-                <a:cs typeface="Cambria" pitchFamily="34" charset="-120"/>
+                <a:latin typeface="Cambria"/>
+                <a:ea typeface="Cambria"/>
+                <a:cs typeface="Cambria"/>
               </a:rPr>
               <a:t>Route R3 explains 62% of the profit decline — two compounding causes</a:t>
             </a:r>
-            <a:endParaRPr lang="en-US" sz="2200" dirty="0"/>
+            <a:endParaRPr lang="en-US" sz="2200"/>
           </a:p>
         </p:txBody>
       </p:sp>
       <p:graphicFrame>
         <p:nvGraphicFramePr>
-          <p:cNvPr id="6" name="Chart 0" descr=""/>
-          <p:cNvGraphicFramePr/>
+          <p:cNvPr id="812227226" name="Chart 0" descr=""/>
+          <p:cNvGraphicFramePr>
+            <a:graphicFrameLocks xmlns:a="http://schemas.openxmlformats.org/drawingml/2006/main"/>
+          </p:cNvGraphicFramePr>
           <p:nvPr/>
         </p:nvGraphicFramePr>
-        <p:xfrm>
+        <p:xfrm rot="0">
           <a:off x="274320" y="1115568"/>
           <a:ext cx="3931920" cy="2286000"/>
         </p:xfrm>
-        <a:graphic xmlns:a="http://schemas.openxmlformats.org/drawingml/2006/main">
+        <a:graphic>
           <a:graphicData uri="http://schemas.openxmlformats.org/drawingml/2006/chart">
-            <c:chart xmlns:c="http://schemas.openxmlformats.org/drawingml/2006/chart" r:id="rId1"/>
+            <c:chart xmlns:c="http://schemas.openxmlformats.org/drawingml/2006/chart" xmlns:r="http://schemas.openxmlformats.org/officeDocument/2006/relationships" r:id="rId3"/>
           </a:graphicData>
         </a:graphic>
       </p:graphicFrame>
       <p:graphicFrame>
         <p:nvGraphicFramePr>
-          <p:cNvPr id="7" name="Chart 1" descr=""/>
-          <p:cNvGraphicFramePr/>
+          <p:cNvPr id="1037835403" name="Chart 1" descr=""/>
+          <p:cNvGraphicFramePr>
+            <a:graphicFrameLocks xmlns:a="http://schemas.openxmlformats.org/drawingml/2006/main"/>
+          </p:cNvGraphicFramePr>
           <p:nvPr/>
         </p:nvGraphicFramePr>
-        <p:xfrm>
+        <p:xfrm rot="0">
           <a:off x="4389120" y="1115568"/>
           <a:ext cx="4480560" cy="2286000"/>
         </p:xfrm>
-        <a:graphic xmlns:a="http://schemas.openxmlformats.org/drawingml/2006/main">
+        <a:graphic>
           <a:graphicData uri="http://schemas.openxmlformats.org/drawingml/2006/chart">
-            <c:chart xmlns:c="http://schemas.openxmlformats.org/drawingml/2006/chart" r:id="rId2"/>
+            <c:chart xmlns:c="http://schemas.openxmlformats.org/drawingml/2006/chart" xmlns:r="http://schemas.openxmlformats.org/officeDocument/2006/relationships" r:id="rId4"/>
           </a:graphicData>
         </a:graphic>
       </p:graphicFrame>
       <p:sp>
         <p:nvSpPr>
-          <p:cNvPr id="8" name="Text 4"/>
-          <p:cNvSpPr txBox="1"/>
-          <p:nvPr/>
-        </p:nvSpPr>
-        <p:spPr>
+          <p:cNvPr id="1349042319" name="Text 4"/>
+          <p:cNvSpPr txBox="1"/>
+          <p:nvPr/>
+        </p:nvSpPr>
+        <p:spPr bwMode="auto">
           <a:xfrm>
             <a:off x="274320" y="3566160"/>
             <a:ext cx="8412480" cy="201168"/>
@@ -4062,31 +4239,32 @@
           <a:bodyPr wrap="square" rtlCol="0" anchor="ctr"/>
           <a:lstStyle/>
           <a:p>
-            <a:pPr indent="0" marL="0">
-              <a:buNone/>
-            </a:pPr>
-            <a:r>
-              <a:rPr lang="en-US" sz="800" b="1" spc="200" kern="0" dirty="0">
+            <a:pPr marL="0" indent="0">
+              <a:buNone/>
+              <a:defRPr/>
+            </a:pPr>
+            <a:r>
+              <a:rPr lang="en-US" sz="800" b="1" spc="200">
                 <a:solidFill>
                   <a:srgbClr val="8FA0AF"/>
                 </a:solidFill>
-                <a:latin typeface="Calibri" pitchFamily="34" charset="0"/>
-                <a:ea typeface="Calibri" pitchFamily="34" charset="-122"/>
-                <a:cs typeface="Calibri" pitchFamily="34" charset="-120"/>
+                <a:latin typeface="Calibri"/>
+                <a:ea typeface="Calibri"/>
+                <a:cs typeface="Calibri"/>
               </a:rPr>
               <a:t>KEY FINDINGS FROM THE MIX-VS-RATE DECOMPOSITION</a:t>
             </a:r>
-            <a:endParaRPr lang="en-US" sz="800" dirty="0"/>
-          </a:p>
-        </p:txBody>
-      </p:sp>
-      <p:sp>
-        <p:nvSpPr>
-          <p:cNvPr id="9" name="Shape 5"/>
+            <a:endParaRPr lang="en-US" sz="800"/>
+          </a:p>
+        </p:txBody>
+      </p:sp>
+      <p:sp>
+        <p:nvSpPr>
+          <p:cNvPr id="1255480516" name="Shape 5"/>
           <p:cNvSpPr/>
           <p:nvPr/>
         </p:nvSpPr>
-        <p:spPr>
+        <p:spPr bwMode="auto">
           <a:xfrm>
             <a:off x="274320" y="3767328"/>
             <a:ext cx="2788920" cy="1078992"/>
@@ -4107,11 +4285,11 @@
       </p:sp>
       <p:sp>
         <p:nvSpPr>
-          <p:cNvPr id="10" name="Shape 6"/>
+          <p:cNvPr id="325726068" name="Shape 6"/>
           <p:cNvSpPr/>
           <p:nvPr/>
         </p:nvSpPr>
-        <p:spPr>
+        <p:spPr bwMode="auto">
           <a:xfrm>
             <a:off x="274320" y="3767328"/>
             <a:ext cx="2788920" cy="54864"/>
@@ -4127,11 +4305,11 @@
       </p:sp>
       <p:sp>
         <p:nvSpPr>
-          <p:cNvPr id="11" name="Text 7"/>
-          <p:cNvSpPr txBox="1"/>
-          <p:nvPr/>
-        </p:nvSpPr>
-        <p:spPr>
+          <p:cNvPr id="262446419" name="Text 7"/>
+          <p:cNvSpPr txBox="1"/>
+          <p:nvPr/>
+        </p:nvSpPr>
+        <p:spPr bwMode="auto">
           <a:xfrm>
             <a:off x="384048" y="3840480"/>
             <a:ext cx="804672" cy="475488"/>
@@ -4146,31 +4324,32 @@
           <a:bodyPr wrap="square" rtlCol="0" anchor="ctr"/>
           <a:lstStyle/>
           <a:p>
-            <a:pPr indent="0" marL="0">
-              <a:buNone/>
-            </a:pPr>
-            <a:r>
-              <a:rPr lang="en-US" sz="2600" b="1" dirty="0">
+            <a:pPr marL="0" indent="0">
+              <a:buNone/>
+              <a:defRPr/>
+            </a:pPr>
+            <a:r>
+              <a:rPr lang="en-US" sz="1500" b="1">
                 <a:solidFill>
                   <a:srgbClr val="C0392B"/>
                 </a:solidFill>
-                <a:latin typeface="Cambria" pitchFamily="34" charset="0"/>
-                <a:ea typeface="Cambria" pitchFamily="34" charset="-122"/>
-                <a:cs typeface="Cambria" pitchFamily="34" charset="-120"/>
+                <a:latin typeface="Cambria"/>
+                <a:ea typeface="Cambria"/>
+                <a:cs typeface="Cambria"/>
               </a:rPr>
               <a:t>61.7%</a:t>
             </a:r>
-            <a:endParaRPr lang="en-US" sz="2600" dirty="0"/>
-          </a:p>
-        </p:txBody>
-      </p:sp>
-      <p:sp>
-        <p:nvSpPr>
-          <p:cNvPr id="12" name="Text 8"/>
-          <p:cNvSpPr txBox="1"/>
-          <p:nvPr/>
-        </p:nvSpPr>
-        <p:spPr>
+            <a:endParaRPr lang="en-US" sz="2600"/>
+          </a:p>
+        </p:txBody>
+      </p:sp>
+      <p:sp>
+        <p:nvSpPr>
+          <p:cNvPr id="1363895801" name="Text 8"/>
+          <p:cNvSpPr txBox="1"/>
+          <p:nvPr/>
+        </p:nvSpPr>
+        <p:spPr bwMode="auto">
           <a:xfrm>
             <a:off x="1234440" y="3858768"/>
             <a:ext cx="1719072" cy="274320"/>
@@ -4185,31 +4364,32 @@
           <a:bodyPr wrap="square" rtlCol="0" anchor="ctr"/>
           <a:lstStyle/>
           <a:p>
-            <a:pPr indent="0" marL="0">
-              <a:buNone/>
-            </a:pPr>
-            <a:r>
-              <a:rPr lang="en-US" sz="1000" b="1" dirty="0">
+            <a:pPr marL="0" indent="0">
+              <a:buNone/>
+              <a:defRPr/>
+            </a:pPr>
+            <a:r>
+              <a:rPr lang="en-US" sz="1000" b="1">
                 <a:solidFill>
                   <a:srgbClr val="2C3E50"/>
                 </a:solidFill>
-                <a:latin typeface="Calibri" pitchFamily="34" charset="0"/>
-                <a:ea typeface="Calibri" pitchFamily="34" charset="-122"/>
-                <a:cs typeface="Calibri" pitchFamily="34" charset="-120"/>
+                <a:latin typeface="Calibri"/>
+                <a:ea typeface="Calibri"/>
+                <a:cs typeface="Calibri"/>
               </a:rPr>
               <a:t>Route R3 (PayGlobal)</a:t>
             </a:r>
-            <a:endParaRPr lang="en-US" sz="1000" dirty="0"/>
-          </a:p>
-        </p:txBody>
-      </p:sp>
-      <p:sp>
-        <p:nvSpPr>
-          <p:cNvPr id="13" name="Text 9"/>
-          <p:cNvSpPr txBox="1"/>
-          <p:nvPr/>
-        </p:nvSpPr>
-        <p:spPr>
+            <a:endParaRPr lang="en-US" sz="1000"/>
+          </a:p>
+        </p:txBody>
+      </p:sp>
+      <p:sp>
+        <p:nvSpPr>
+          <p:cNvPr id="946799300" name="Text 9"/>
+          <p:cNvSpPr txBox="1"/>
+          <p:nvPr/>
+        </p:nvSpPr>
+        <p:spPr bwMode="auto">
           <a:xfrm>
             <a:off x="1234440" y="4133088"/>
             <a:ext cx="1719072" cy="548640"/>
@@ -4224,54 +4404,56 @@
           <a:bodyPr wrap="square" rtlCol="0" anchor="ctr"/>
           <a:lstStyle/>
           <a:p>
-            <a:pPr indent="0" marL="0">
+            <a:pPr marL="0" indent="0">
               <a:lnSpc>
                 <a:spcPct val="120000"/>
               </a:lnSpc>
               <a:buNone/>
-            </a:pPr>
-            <a:r>
-              <a:rPr lang="en-US" sz="900" dirty="0">
+              <a:defRPr/>
+            </a:pPr>
+            <a:r>
+              <a:rPr lang="en-US" sz="900">
                 <a:solidFill>
                   <a:srgbClr val="8FA0AF"/>
                 </a:solidFill>
-                <a:latin typeface="Calibri" pitchFamily="34" charset="0"/>
-                <a:ea typeface="Calibri" pitchFamily="34" charset="-122"/>
-                <a:cs typeface="Calibri" pitchFamily="34" charset="-120"/>
+                <a:latin typeface="Calibri"/>
+                <a:ea typeface="Calibri"/>
+                <a:cs typeface="Calibri"/>
               </a:rPr>
               <a:t>1-Apr fee: 1.2% → 1.6%</a:t>
             </a:r>
-            <a:endParaRPr lang="en-US" sz="900" dirty="0"/>
-          </a:p>
-          <a:p>
-            <a:pPr indent="0" marL="0">
+            <a:endParaRPr lang="en-US" sz="900"/>
+          </a:p>
+          <a:p>
+            <a:pPr marL="0" indent="0">
               <a:lnSpc>
                 <a:spcPct val="120000"/>
               </a:lnSpc>
               <a:buNone/>
-            </a:pPr>
-            <a:r>
-              <a:rPr lang="en-US" sz="900" dirty="0">
+              <a:defRPr/>
+            </a:pPr>
+            <a:r>
+              <a:rPr lang="en-US" sz="900">
                 <a:solidFill>
                   <a:srgbClr val="8FA0AF"/>
                 </a:solidFill>
-                <a:latin typeface="Calibri" pitchFamily="34" charset="0"/>
-                <a:ea typeface="Calibri" pitchFamily="34" charset="-122"/>
-                <a:cs typeface="Calibri" pitchFamily="34" charset="-120"/>
+                <a:latin typeface="Calibri"/>
+                <a:ea typeface="Calibri"/>
+                <a:cs typeface="Calibri"/>
               </a:rPr>
               <a:t>+ growing volume share</a:t>
             </a:r>
-            <a:endParaRPr lang="en-US" sz="900" dirty="0"/>
-          </a:p>
-        </p:txBody>
-      </p:sp>
-      <p:sp>
-        <p:nvSpPr>
-          <p:cNvPr id="14" name="Shape 10"/>
+            <a:endParaRPr lang="en-US" sz="900"/>
+          </a:p>
+        </p:txBody>
+      </p:sp>
+      <p:sp>
+        <p:nvSpPr>
+          <p:cNvPr id="548203591" name="Shape 10"/>
           <p:cNvSpPr/>
           <p:nvPr/>
         </p:nvSpPr>
-        <p:spPr>
+        <p:spPr bwMode="auto">
           <a:xfrm>
             <a:off x="3227832" y="3767328"/>
             <a:ext cx="2788920" cy="1078992"/>
@@ -4292,11 +4474,11 @@
       </p:sp>
       <p:sp>
         <p:nvSpPr>
-          <p:cNvPr id="15" name="Shape 11"/>
+          <p:cNvPr id="950611678" name="Shape 11"/>
           <p:cNvSpPr/>
           <p:nvPr/>
         </p:nvSpPr>
-        <p:spPr>
+        <p:spPr bwMode="auto">
           <a:xfrm>
             <a:off x="3227832" y="3767328"/>
             <a:ext cx="2788920" cy="54864"/>
@@ -4312,11 +4494,11 @@
       </p:sp>
       <p:sp>
         <p:nvSpPr>
-          <p:cNvPr id="16" name="Text 12"/>
-          <p:cNvSpPr txBox="1"/>
-          <p:nvPr/>
-        </p:nvSpPr>
-        <p:spPr>
+          <p:cNvPr id="2030851393" name="Text 12"/>
+          <p:cNvSpPr txBox="1"/>
+          <p:nvPr/>
+        </p:nvSpPr>
+        <p:spPr bwMode="auto">
           <a:xfrm>
             <a:off x="3337560" y="3840480"/>
             <a:ext cx="804672" cy="475488"/>
@@ -4331,31 +4513,32 @@
           <a:bodyPr wrap="square" rtlCol="0" anchor="ctr"/>
           <a:lstStyle/>
           <a:p>
-            <a:pPr indent="0" marL="0">
-              <a:buNone/>
-            </a:pPr>
-            <a:r>
-              <a:rPr lang="en-US" sz="2600" b="1" dirty="0">
+            <a:pPr marL="0" indent="0">
+              <a:buNone/>
+              <a:defRPr/>
+            </a:pPr>
+            <a:r>
+              <a:rPr lang="en-US" sz="1500" b="1">
                 <a:solidFill>
                   <a:srgbClr val="F4A31A"/>
                 </a:solidFill>
-                <a:latin typeface="Cambria" pitchFamily="34" charset="0"/>
-                <a:ea typeface="Cambria" pitchFamily="34" charset="-122"/>
-                <a:cs typeface="Cambria" pitchFamily="34" charset="-120"/>
+                <a:latin typeface="Cambria"/>
+                <a:ea typeface="Cambria"/>
+                <a:cs typeface="Cambria"/>
               </a:rPr>
               <a:t>22.5%</a:t>
             </a:r>
-            <a:endParaRPr lang="en-US" sz="2600" dirty="0"/>
-          </a:p>
-        </p:txBody>
-      </p:sp>
-      <p:sp>
-        <p:nvSpPr>
-          <p:cNvPr id="17" name="Text 13"/>
-          <p:cNvSpPr txBox="1"/>
-          <p:nvPr/>
-        </p:nvSpPr>
-        <p:spPr>
+            <a:endParaRPr lang="en-US" sz="2600"/>
+          </a:p>
+        </p:txBody>
+      </p:sp>
+      <p:sp>
+        <p:nvSpPr>
+          <p:cNvPr id="784647147" name="Text 13"/>
+          <p:cNvSpPr txBox="1"/>
+          <p:nvPr/>
+        </p:nvSpPr>
+        <p:spPr bwMode="auto">
           <a:xfrm>
             <a:off x="4187952" y="3858768"/>
             <a:ext cx="1719072" cy="274320"/>
@@ -4370,31 +4553,32 @@
           <a:bodyPr wrap="square" rtlCol="0" anchor="ctr"/>
           <a:lstStyle/>
           <a:p>
-            <a:pPr indent="0" marL="0">
-              <a:buNone/>
-            </a:pPr>
-            <a:r>
-              <a:rPr lang="en-US" sz="1000" b="1" dirty="0">
+            <a:pPr marL="0" indent="0">
+              <a:buNone/>
+              <a:defRPr/>
+            </a:pPr>
+            <a:r>
+              <a:rPr lang="en-US" sz="1000" b="1">
                 <a:solidFill>
                   <a:srgbClr val="2C3E50"/>
                 </a:solidFill>
-                <a:latin typeface="Calibri" pitchFamily="34" charset="0"/>
-                <a:ea typeface="Calibri" pitchFamily="34" charset="-122"/>
-                <a:cs typeface="Calibri" pitchFamily="34" charset="-120"/>
+                <a:latin typeface="Calibri"/>
+                <a:ea typeface="Calibri"/>
+                <a:cs typeface="Calibri"/>
               </a:rPr>
               <a:t>Route R4 (LocalBank UAE)</a:t>
             </a:r>
-            <a:endParaRPr lang="en-US" sz="1000" dirty="0"/>
-          </a:p>
-        </p:txBody>
-      </p:sp>
-      <p:sp>
-        <p:nvSpPr>
-          <p:cNvPr id="18" name="Text 14"/>
-          <p:cNvSpPr txBox="1"/>
-          <p:nvPr/>
-        </p:nvSpPr>
-        <p:spPr>
+            <a:endParaRPr lang="en-US" sz="1000"/>
+          </a:p>
+        </p:txBody>
+      </p:sp>
+      <p:sp>
+        <p:nvSpPr>
+          <p:cNvPr id="1330210715" name="Text 14"/>
+          <p:cNvSpPr txBox="1"/>
+          <p:nvPr/>
+        </p:nvSpPr>
+        <p:spPr bwMode="auto">
           <a:xfrm>
             <a:off x="4187952" y="4133088"/>
             <a:ext cx="1719072" cy="548640"/>
@@ -4409,54 +4593,56 @@
           <a:bodyPr wrap="square" rtlCol="0" anchor="ctr"/>
           <a:lstStyle/>
           <a:p>
-            <a:pPr indent="0" marL="0">
+            <a:pPr marL="0" indent="0">
               <a:lnSpc>
                 <a:spcPct val="120000"/>
               </a:lnSpc>
               <a:buNone/>
-            </a:pPr>
-            <a:r>
-              <a:rPr lang="en-US" sz="900" dirty="0">
+              <a:defRPr/>
+            </a:pPr>
+            <a:r>
+              <a:rPr lang="en-US" sz="900">
                 <a:solidFill>
                   <a:srgbClr val="8FA0AF"/>
                 </a:solidFill>
-                <a:latin typeface="Calibri" pitchFamily="34" charset="0"/>
-                <a:ea typeface="Calibri" pitchFamily="34" charset="-122"/>
-                <a:cs typeface="Calibri" pitchFamily="34" charset="-120"/>
+                <a:latin typeface="Calibri"/>
+                <a:ea typeface="Calibri"/>
+                <a:cs typeface="Calibri"/>
               </a:rPr>
               <a:t>Blended cost rising</a:t>
             </a:r>
-            <a:endParaRPr lang="en-US" sz="900" dirty="0"/>
-          </a:p>
-          <a:p>
-            <a:pPr indent="0" marL="0">
+            <a:endParaRPr lang="en-US" sz="900"/>
+          </a:p>
+          <a:p>
+            <a:pPr marL="0" indent="0">
               <a:lnSpc>
                 <a:spcPct val="120000"/>
               </a:lnSpc>
               <a:buNone/>
-            </a:pPr>
-            <a:r>
-              <a:rPr lang="en-US" sz="900" dirty="0">
+              <a:defRPr/>
+            </a:pPr>
+            <a:r>
+              <a:rPr lang="en-US" sz="900">
                 <a:solidFill>
                   <a:srgbClr val="8FA0AF"/>
                 </a:solidFill>
-                <a:latin typeface="Calibri" pitchFamily="34" charset="0"/>
-                <a:ea typeface="Calibri" pitchFamily="34" charset="-122"/>
-                <a:cs typeface="Calibri" pitchFamily="34" charset="-120"/>
+                <a:latin typeface="Calibri"/>
+                <a:ea typeface="Calibri"/>
+                <a:cs typeface="Calibri"/>
               </a:rPr>
               <a:t>as R3 mix shifts UAE volume</a:t>
             </a:r>
-            <a:endParaRPr lang="en-US" sz="900" dirty="0"/>
-          </a:p>
-        </p:txBody>
-      </p:sp>
-      <p:sp>
-        <p:nvSpPr>
-          <p:cNvPr id="19" name="Shape 15"/>
+            <a:endParaRPr lang="en-US" sz="900"/>
+          </a:p>
+        </p:txBody>
+      </p:sp>
+      <p:sp>
+        <p:nvSpPr>
+          <p:cNvPr id="164966287" name="Shape 15"/>
           <p:cNvSpPr/>
           <p:nvPr/>
         </p:nvSpPr>
-        <p:spPr>
+        <p:spPr bwMode="auto">
           <a:xfrm>
             <a:off x="6181344" y="3767328"/>
             <a:ext cx="2788920" cy="1078992"/>
@@ -4477,11 +4663,11 @@
       </p:sp>
       <p:sp>
         <p:nvSpPr>
-          <p:cNvPr id="20" name="Shape 16"/>
+          <p:cNvPr id="414844173" name="Shape 16"/>
           <p:cNvSpPr/>
           <p:nvPr/>
         </p:nvSpPr>
-        <p:spPr>
+        <p:spPr bwMode="auto">
           <a:xfrm>
             <a:off x="6181344" y="3767328"/>
             <a:ext cx="2788920" cy="54864"/>
@@ -4497,11 +4683,11 @@
       </p:sp>
       <p:sp>
         <p:nvSpPr>
-          <p:cNvPr id="21" name="Text 17"/>
-          <p:cNvSpPr txBox="1"/>
-          <p:nvPr/>
-        </p:nvSpPr>
-        <p:spPr>
+          <p:cNvPr id="704599750" name="Text 17"/>
+          <p:cNvSpPr txBox="1"/>
+          <p:nvPr/>
+        </p:nvSpPr>
+        <p:spPr bwMode="auto">
           <a:xfrm>
             <a:off x="6291072" y="3840480"/>
             <a:ext cx="804672" cy="475488"/>
@@ -4516,31 +4702,32 @@
           <a:bodyPr wrap="square" rtlCol="0" anchor="ctr"/>
           <a:lstStyle/>
           <a:p>
-            <a:pPr indent="0" marL="0">
-              <a:buNone/>
-            </a:pPr>
-            <a:r>
-              <a:rPr lang="en-US" sz="2600" b="1" dirty="0">
+            <a:pPr marL="0" indent="0">
+              <a:buNone/>
+              <a:defRPr/>
+            </a:pPr>
+            <a:r>
+              <a:rPr lang="en-US" sz="1500" b="1">
                 <a:solidFill>
                   <a:srgbClr val="00897B"/>
                 </a:solidFill>
-                <a:latin typeface="Cambria" pitchFamily="34" charset="0"/>
-                <a:ea typeface="Cambria" pitchFamily="34" charset="-122"/>
-                <a:cs typeface="Cambria" pitchFamily="34" charset="-120"/>
+                <a:latin typeface="Cambria"/>
+                <a:ea typeface="Cambria"/>
+                <a:cs typeface="Cambria"/>
               </a:rPr>
               <a:t>×2</a:t>
             </a:r>
-            <a:endParaRPr lang="en-US" sz="2600" dirty="0"/>
-          </a:p>
-        </p:txBody>
-      </p:sp>
-      <p:sp>
-        <p:nvSpPr>
-          <p:cNvPr id="22" name="Text 18"/>
-          <p:cNvSpPr txBox="1"/>
-          <p:nvPr/>
-        </p:nvSpPr>
-        <p:spPr>
+            <a:endParaRPr lang="en-US" sz="2600"/>
+          </a:p>
+        </p:txBody>
+      </p:sp>
+      <p:sp>
+        <p:nvSpPr>
+          <p:cNvPr id="667292920" name="Text 18"/>
+          <p:cNvSpPr txBox="1"/>
+          <p:nvPr/>
+        </p:nvSpPr>
+        <p:spPr bwMode="auto">
           <a:xfrm>
             <a:off x="7141464" y="3858768"/>
             <a:ext cx="1719072" cy="274320"/>
@@ -4555,31 +4742,32 @@
           <a:bodyPr wrap="square" rtlCol="0" anchor="ctr"/>
           <a:lstStyle/>
           <a:p>
-            <a:pPr indent="0" marL="0">
-              <a:buNone/>
-            </a:pPr>
-            <a:r>
-              <a:rPr lang="en-US" sz="1000" b="1" dirty="0">
+            <a:pPr marL="0" indent="0">
+              <a:buNone/>
+              <a:defRPr/>
+            </a:pPr>
+            <a:r>
+              <a:rPr lang="en-US" sz="1000" b="1">
                 <a:solidFill>
                   <a:srgbClr val="2C3E50"/>
                 </a:solidFill>
-                <a:latin typeface="Calibri" pitchFamily="34" charset="0"/>
-                <a:ea typeface="Calibri" pitchFamily="34" charset="-122"/>
-                <a:cs typeface="Calibri" pitchFamily="34" charset="-120"/>
+                <a:latin typeface="Calibri"/>
+                <a:ea typeface="Calibri"/>
+                <a:cs typeface="Calibri"/>
               </a:rPr>
               <a:t>Chargeback cost doubled</a:t>
             </a:r>
-            <a:endParaRPr lang="en-US" sz="1000" dirty="0"/>
-          </a:p>
-        </p:txBody>
-      </p:sp>
-      <p:sp>
-        <p:nvSpPr>
-          <p:cNvPr id="23" name="Text 19"/>
-          <p:cNvSpPr txBox="1"/>
-          <p:nvPr/>
-        </p:nvSpPr>
-        <p:spPr>
+            <a:endParaRPr lang="en-US" sz="1000"/>
+          </a:p>
+        </p:txBody>
+      </p:sp>
+      <p:sp>
+        <p:nvSpPr>
+          <p:cNvPr id="327470060" name="Text 19"/>
+          <p:cNvSpPr txBox="1"/>
+          <p:nvPr/>
+        </p:nvSpPr>
+        <p:spPr bwMode="auto">
           <a:xfrm>
             <a:off x="7141464" y="4133088"/>
             <a:ext cx="1719072" cy="548640"/>
@@ -4594,44 +4782,46 @@
           <a:bodyPr wrap="square" rtlCol="0" anchor="ctr"/>
           <a:lstStyle/>
           <a:p>
-            <a:pPr indent="0" marL="0">
+            <a:pPr marL="0" indent="0">
               <a:lnSpc>
                 <a:spcPct val="120000"/>
               </a:lnSpc>
               <a:buNone/>
-            </a:pPr>
-            <a:r>
-              <a:rPr lang="en-US" sz="900" dirty="0">
+              <a:defRPr/>
+            </a:pPr>
+            <a:r>
+              <a:rPr lang="en-US" sz="900">
                 <a:solidFill>
                   <a:srgbClr val="8FA0AF"/>
                 </a:solidFill>
-                <a:latin typeface="Calibri" pitchFamily="34" charset="0"/>
-                <a:ea typeface="Calibri" pitchFamily="34" charset="-122"/>
-                <a:cs typeface="Calibri" pitchFamily="34" charset="-120"/>
+                <a:latin typeface="Calibri"/>
+                <a:ea typeface="Calibri"/>
+                <a:cs typeface="Calibri"/>
               </a:rPr>
               <a:t>Electronics &amp; Digital Goods</a:t>
             </a:r>
-            <a:endParaRPr lang="en-US" sz="900" dirty="0"/>
-          </a:p>
-          <a:p>
-            <a:pPr indent="0" marL="0">
+            <a:endParaRPr lang="en-US" sz="900"/>
+          </a:p>
+          <a:p>
+            <a:pPr marL="0" indent="0">
               <a:lnSpc>
                 <a:spcPct val="120000"/>
               </a:lnSpc>
               <a:buNone/>
-            </a:pPr>
-            <a:r>
-              <a:rPr lang="en-US" sz="900" dirty="0">
+              <a:defRPr/>
+            </a:pPr>
+            <a:r>
+              <a:rPr lang="en-US" sz="900">
                 <a:solidFill>
                   <a:srgbClr val="8FA0AF"/>
                 </a:solidFill>
-                <a:latin typeface="Calibri" pitchFamily="34" charset="0"/>
-                <a:ea typeface="Calibri" pitchFamily="34" charset="-122"/>
-                <a:cs typeface="Calibri" pitchFamily="34" charset="-120"/>
+                <a:latin typeface="Calibri"/>
+                <a:ea typeface="Calibri"/>
+                <a:cs typeface="Calibri"/>
               </a:rPr>
               <a:t>Jan $230 → Jun $580</a:t>
             </a:r>
-            <a:endParaRPr lang="en-US" sz="900" dirty="0"/>
+            <a:endParaRPr lang="en-US" sz="900"/>
           </a:p>
         </p:txBody>
       </p:sp>
@@ -4640,11 +4830,19 @@
   <p:clrMapOvr>
     <a:masterClrMapping/>
   </p:clrMapOvr>
+  <mc:AlternateContent xmlns:mc="http://schemas.openxmlformats.org/markup-compatibility/2006">
+    <mc:Choice xmlns:p159="http://schemas.microsoft.com/office/powerpoint/2015/09/main" xmlns:p14="http://schemas.microsoft.com/office/powerpoint/2010/main" Requires="p159">
+      <p:transition p14:dur="500" advClick="1"/>
+    </mc:Choice>
+    <mc:Fallback>
+      <p:transition advClick="1"/>
+    </mc:Fallback>
+  </mc:AlternateContent>
 </p:sld>
 </file>
 
 <file path=ppt/slides/slide4.xml><?xml version="1.0" encoding="utf-8"?>
-<p:sld xmlns:a="http://schemas.openxmlformats.org/drawingml/2006/main" xmlns:r="http://schemas.openxmlformats.org/officeDocument/2006/relationships" xmlns:p="http://schemas.openxmlformats.org/presentationml/2006/main">
+<p:sld xmlns:a="http://schemas.openxmlformats.org/drawingml/2006/main" xmlns:r="http://schemas.openxmlformats.org/officeDocument/2006/relationships" xmlns:p="http://schemas.openxmlformats.org/presentationml/2006/main" xmlns:m="http://schemas.openxmlformats.org/officeDocument/2006/math" xmlns:w="http://schemas.openxmlformats.org/wordprocessingml/2006/main" xmlns:mc="http://schemas.openxmlformats.org/markup-compatibility/2006" showMasterPhAnim="0" showMasterSp="1" show="1">
   <p:cSld name="Slide 4">
     <p:spTree>
       <p:nvGrpSpPr>
@@ -4652,7 +4850,7 @@
         <p:cNvGrpSpPr/>
         <p:nvPr/>
       </p:nvGrpSpPr>
-      <p:grpSpPr>
+      <p:grpSpPr bwMode="auto">
         <a:xfrm>
           <a:off x="0" y="0"/>
           <a:ext cx="0" cy="0"/>
@@ -4662,11 +4860,11 @@
       </p:grpSpPr>
       <p:sp>
         <p:nvSpPr>
-          <p:cNvPr id="2" name="Shape 0"/>
+          <p:cNvPr id="1123657446" name="Shape 0"/>
           <p:cNvSpPr/>
           <p:nvPr/>
         </p:nvSpPr>
-        <p:spPr>
+        <p:spPr bwMode="auto">
           <a:xfrm>
             <a:off x="0" y="0"/>
             <a:ext cx="9144000" cy="5143500"/>
@@ -4682,11 +4880,11 @@
       </p:sp>
       <p:sp>
         <p:nvSpPr>
-          <p:cNvPr id="3" name="Shape 1"/>
+          <p:cNvPr id="1525733538" name="Shape 1"/>
           <p:cNvSpPr/>
           <p:nvPr/>
         </p:nvSpPr>
-        <p:spPr>
+        <p:spPr bwMode="auto">
           <a:xfrm>
             <a:off x="0" y="0"/>
             <a:ext cx="9144000" cy="1005840"/>
@@ -4702,11 +4900,11 @@
       </p:sp>
       <p:sp>
         <p:nvSpPr>
-          <p:cNvPr id="4" name="Text 2"/>
-          <p:cNvSpPr txBox="1"/>
-          <p:nvPr/>
-        </p:nvSpPr>
-        <p:spPr>
+          <p:cNvPr id="1909057589" name="Text 2"/>
+          <p:cNvSpPr txBox="1"/>
+          <p:nvPr/>
+        </p:nvSpPr>
+        <p:spPr bwMode="auto">
           <a:xfrm>
             <a:off x="365760" y="73152"/>
             <a:ext cx="3657600" cy="237744"/>
@@ -4721,31 +4919,32 @@
           <a:bodyPr wrap="square" rtlCol="0" anchor="ctr"/>
           <a:lstStyle/>
           <a:p>
-            <a:pPr indent="0" marL="0">
-              <a:buNone/>
-            </a:pPr>
-            <a:r>
-              <a:rPr lang="en-US" sz="800" b="1" spc="300" kern="0" dirty="0">
+            <a:pPr marL="0" indent="0">
+              <a:buNone/>
+              <a:defRPr/>
+            </a:pPr>
+            <a:r>
+              <a:rPr lang="en-US" sz="800" b="1" spc="300">
                 <a:solidFill>
                   <a:srgbClr val="00897B"/>
                 </a:solidFill>
-                <a:latin typeface="Calibri" pitchFamily="34" charset="0"/>
-                <a:ea typeface="Calibri" pitchFamily="34" charset="-122"/>
-                <a:cs typeface="Calibri" pitchFamily="34" charset="-120"/>
+                <a:latin typeface="Calibri"/>
+                <a:ea typeface="Calibri"/>
+                <a:cs typeface="Calibri"/>
               </a:rPr>
               <a:t>DIAGNOSIS</a:t>
             </a:r>
-            <a:endParaRPr lang="en-US" sz="800" dirty="0"/>
-          </a:p>
-        </p:txBody>
-      </p:sp>
-      <p:sp>
-        <p:nvSpPr>
-          <p:cNvPr id="5" name="Text 3"/>
-          <p:cNvSpPr txBox="1"/>
-          <p:nvPr/>
-        </p:nvSpPr>
-        <p:spPr>
+            <a:endParaRPr lang="en-US" sz="800"/>
+          </a:p>
+        </p:txBody>
+      </p:sp>
+      <p:sp>
+        <p:nvSpPr>
+          <p:cNvPr id="931827520" name="Text 3"/>
+          <p:cNvSpPr txBox="1"/>
+          <p:nvPr/>
+        </p:nvSpPr>
+        <p:spPr bwMode="auto">
           <a:xfrm>
             <a:off x="365760" y="310896"/>
             <a:ext cx="8412480" cy="530352"/>
@@ -4760,31 +4959,32 @@
           <a:bodyPr wrap="square" rtlCol="0" anchor="ctr"/>
           <a:lstStyle/>
           <a:p>
-            <a:pPr indent="0" marL="0">
-              <a:buNone/>
-            </a:pPr>
-            <a:r>
-              <a:rPr lang="en-US" sz="2200" b="1" dirty="0">
+            <a:pPr marL="0" indent="0">
+              <a:buNone/>
+              <a:defRPr/>
+            </a:pPr>
+            <a:r>
+              <a:rPr lang="en-US" sz="2200" b="1">
                 <a:solidFill>
                   <a:srgbClr val="FFFFFF"/>
                 </a:solidFill>
-                <a:latin typeface="Cambria" pitchFamily="34" charset="0"/>
-                <a:ea typeface="Cambria" pitchFamily="34" charset="-122"/>
-                <a:cs typeface="Cambria" pitchFamily="34" charset="-120"/>
+                <a:latin typeface="Cambria"/>
+                <a:ea typeface="Cambria"/>
+                <a:cs typeface="Cambria"/>
               </a:rPr>
               <a:t>Two drivers confirmed. Two stakeholder claims do not hold for this KPI.</a:t>
             </a:r>
-            <a:endParaRPr lang="en-US" sz="2200" dirty="0"/>
-          </a:p>
-        </p:txBody>
-      </p:sp>
-      <p:sp>
-        <p:nvSpPr>
-          <p:cNvPr id="6" name="Shape 4"/>
+            <a:endParaRPr lang="en-US" sz="2200"/>
+          </a:p>
+        </p:txBody>
+      </p:sp>
+      <p:sp>
+        <p:nvSpPr>
+          <p:cNvPr id="29518382" name="Shape 4"/>
           <p:cNvSpPr/>
           <p:nvPr/>
         </p:nvSpPr>
-        <p:spPr>
+        <p:spPr bwMode="auto">
           <a:xfrm>
             <a:off x="274320" y="1115568"/>
             <a:ext cx="8595360" cy="841248"/>
@@ -4805,11 +5005,11 @@
       </p:sp>
       <p:sp>
         <p:nvSpPr>
-          <p:cNvPr id="7" name="Shape 5"/>
+          <p:cNvPr id="392084869" name="Shape 5"/>
           <p:cNvSpPr/>
           <p:nvPr/>
         </p:nvSpPr>
-        <p:spPr>
+        <p:spPr bwMode="auto">
           <a:xfrm>
             <a:off x="5394960" y="1225296"/>
             <a:ext cx="3291840" cy="292608"/>
@@ -4827,11 +5027,11 @@
       </p:sp>
       <p:sp>
         <p:nvSpPr>
-          <p:cNvPr id="8" name="Text 6"/>
-          <p:cNvSpPr txBox="1"/>
-          <p:nvPr/>
-        </p:nvSpPr>
-        <p:spPr>
+          <p:cNvPr id="1711323619" name="Text 6"/>
+          <p:cNvSpPr txBox="1"/>
+          <p:nvPr/>
+        </p:nvSpPr>
+        <p:spPr bwMode="auto">
           <a:xfrm>
             <a:off x="5394960" y="1225296"/>
             <a:ext cx="3291840" cy="292608"/>
@@ -4846,31 +5046,32 @@
           <a:bodyPr wrap="square" lIns="0" tIns="0" rIns="0" bIns="0" rtlCol="0" anchor="ctr"/>
           <a:lstStyle/>
           <a:p>
-            <a:pPr algn="ctr" indent="0" marL="0">
-              <a:buNone/>
-            </a:pPr>
-            <a:r>
-              <a:rPr lang="en-US" sz="900" b="1" dirty="0">
+            <a:pPr marL="0" indent="0" algn="ctr">
+              <a:buNone/>
+              <a:defRPr/>
+            </a:pPr>
+            <a:r>
+              <a:rPr lang="en-US" sz="900" b="1">
                 <a:solidFill>
                   <a:srgbClr val="FFFFFF"/>
                 </a:solidFill>
-                <a:latin typeface="Calibri" pitchFamily="34" charset="0"/>
-                <a:ea typeface="Calibri" pitchFamily="34" charset="-122"/>
-                <a:cs typeface="Calibri" pitchFamily="34" charset="-120"/>
+                <a:latin typeface="Calibri"/>
+                <a:ea typeface="Calibri"/>
+                <a:cs typeface="Calibri"/>
               </a:rPr>
               <a:t>CONFIRMED — PRIMARY DRIVER</a:t>
             </a:r>
-            <a:endParaRPr lang="en-US" sz="900" dirty="0"/>
-          </a:p>
-        </p:txBody>
-      </p:sp>
-      <p:sp>
-        <p:nvSpPr>
-          <p:cNvPr id="9" name="Text 7"/>
-          <p:cNvSpPr txBox="1"/>
-          <p:nvPr/>
-        </p:nvSpPr>
-        <p:spPr>
+            <a:endParaRPr lang="en-US" sz="900"/>
+          </a:p>
+        </p:txBody>
+      </p:sp>
+      <p:sp>
+        <p:nvSpPr>
+          <p:cNvPr id="1187627011" name="Text 7"/>
+          <p:cNvSpPr txBox="1"/>
+          <p:nvPr/>
+        </p:nvSpPr>
+        <p:spPr bwMode="auto">
           <a:xfrm>
             <a:off x="402336" y="1188720"/>
             <a:ext cx="4846320" cy="256032"/>
@@ -4885,31 +5086,32 @@
           <a:bodyPr wrap="square" rtlCol="0" anchor="ctr"/>
           <a:lstStyle/>
           <a:p>
-            <a:pPr indent="0" marL="0">
-              <a:buNone/>
-            </a:pPr>
-            <a:r>
-              <a:rPr lang="en-US" sz="1100" b="1" dirty="0">
+            <a:pPr marL="0" indent="0">
+              <a:buNone/>
+              <a:defRPr/>
+            </a:pPr>
+            <a:r>
+              <a:rPr lang="en-US" sz="1100" b="1">
                 <a:solidFill>
                   <a:srgbClr val="2C3E50"/>
                 </a:solidFill>
-                <a:latin typeface="Calibri" pitchFamily="34" charset="0"/>
-                <a:ea typeface="Calibri" pitchFamily="34" charset="-122"/>
-                <a:cs typeface="Calibri" pitchFamily="34" charset="-120"/>
+                <a:latin typeface="Calibri"/>
+                <a:ea typeface="Calibri"/>
+                <a:cs typeface="Calibri"/>
               </a:rPr>
               <a:t>Routing cost &amp; mix (Head of Payments)</a:t>
             </a:r>
-            <a:endParaRPr lang="en-US" sz="1100" dirty="0"/>
-          </a:p>
-        </p:txBody>
-      </p:sp>
-      <p:sp>
-        <p:nvSpPr>
-          <p:cNvPr id="10" name="Text 8"/>
-          <p:cNvSpPr txBox="1"/>
-          <p:nvPr/>
-        </p:nvSpPr>
-        <p:spPr>
+            <a:endParaRPr lang="en-US" sz="1100"/>
+          </a:p>
+        </p:txBody>
+      </p:sp>
+      <p:sp>
+        <p:nvSpPr>
+          <p:cNvPr id="1129999671" name="Text 8"/>
+          <p:cNvSpPr txBox="1"/>
+          <p:nvPr/>
+        </p:nvSpPr>
+        <p:spPr bwMode="auto">
           <a:xfrm>
             <a:off x="402336" y="1481328"/>
             <a:ext cx="8357616" cy="420624"/>
@@ -4924,34 +5126,35 @@
           <a:bodyPr wrap="square" rtlCol="0" anchor="ctr"/>
           <a:lstStyle/>
           <a:p>
-            <a:pPr indent="0" marL="0">
+            <a:pPr marL="0" indent="0">
               <a:lnSpc>
-                <a:spcPct val="115000"/>
+                <a:spcPct val="114999"/>
               </a:lnSpc>
               <a:buNone/>
-            </a:pPr>
-            <a:r>
-              <a:rPr lang="en-US" sz="950" dirty="0">
+              <a:defRPr/>
+            </a:pPr>
+            <a:r>
+              <a:rPr lang="en-US" sz="950">
                 <a:solidFill>
                   <a:srgbClr val="2C3E50"/>
                 </a:solidFill>
-                <a:latin typeface="Calibri" pitchFamily="34" charset="0"/>
-                <a:ea typeface="Calibri" pitchFamily="34" charset="-122"/>
-                <a:cs typeface="Calibri" pitchFamily="34" charset="-120"/>
+                <a:latin typeface="Calibri"/>
+                <a:ea typeface="Calibri"/>
+                <a:cs typeface="Calibri"/>
               </a:rPr>
               <a:t>Route R3 fee rose 33% on 1 Apr. R3 share of volume grew every month in all 3 countries. Together: 61.7% of the total profit decline. Two separable sub-causes: the fee increase (rate effect) and the mix shift (volume moving to the costlier route).</a:t>
             </a:r>
-            <a:endParaRPr lang="en-US" sz="950" dirty="0"/>
-          </a:p>
-        </p:txBody>
-      </p:sp>
-      <p:sp>
-        <p:nvSpPr>
-          <p:cNvPr id="11" name="Shape 9"/>
+            <a:endParaRPr lang="en-US" sz="950"/>
+          </a:p>
+        </p:txBody>
+      </p:sp>
+      <p:sp>
+        <p:nvSpPr>
+          <p:cNvPr id="846368089" name="Shape 9"/>
           <p:cNvSpPr/>
           <p:nvPr/>
         </p:nvSpPr>
-        <p:spPr>
+        <p:spPr bwMode="auto">
           <a:xfrm>
             <a:off x="274320" y="2039112"/>
             <a:ext cx="8595360" cy="841248"/>
@@ -4972,11 +5175,11 @@
       </p:sp>
       <p:sp>
         <p:nvSpPr>
-          <p:cNvPr id="12" name="Shape 10"/>
+          <p:cNvPr id="1704347406" name="Shape 10"/>
           <p:cNvSpPr/>
           <p:nvPr/>
         </p:nvSpPr>
-        <p:spPr>
+        <p:spPr bwMode="auto">
           <a:xfrm>
             <a:off x="5394960" y="2148840"/>
             <a:ext cx="3291840" cy="292608"/>
@@ -4994,11 +5197,11 @@
       </p:sp>
       <p:sp>
         <p:nvSpPr>
-          <p:cNvPr id="13" name="Text 11"/>
-          <p:cNvSpPr txBox="1"/>
-          <p:nvPr/>
-        </p:nvSpPr>
-        <p:spPr>
+          <p:cNvPr id="1022522636" name="Text 11"/>
+          <p:cNvSpPr txBox="1"/>
+          <p:nvPr/>
+        </p:nvSpPr>
+        <p:spPr bwMode="auto">
           <a:xfrm>
             <a:off x="5394960" y="2148840"/>
             <a:ext cx="3291840" cy="292608"/>
@@ -5013,31 +5216,32 @@
           <a:bodyPr wrap="square" lIns="0" tIns="0" rIns="0" bIns="0" rtlCol="0" anchor="ctr"/>
           <a:lstStyle/>
           <a:p>
-            <a:pPr algn="ctr" indent="0" marL="0">
-              <a:buNone/>
-            </a:pPr>
-            <a:r>
-              <a:rPr lang="en-US" sz="900" b="1" dirty="0">
+            <a:pPr marL="0" indent="0" algn="ctr">
+              <a:buNone/>
+              <a:defRPr/>
+            </a:pPr>
+            <a:r>
+              <a:rPr lang="en-US" sz="900" b="1">
                 <a:solidFill>
                   <a:srgbClr val="FFFFFF"/>
                 </a:solidFill>
-                <a:latin typeface="Calibri" pitchFamily="34" charset="0"/>
-                <a:ea typeface="Calibri" pitchFamily="34" charset="-122"/>
-                <a:cs typeface="Calibri" pitchFamily="34" charset="-120"/>
+                <a:latin typeface="Calibri"/>
+                <a:ea typeface="Calibri"/>
+                <a:cs typeface="Calibri"/>
               </a:rPr>
               <a:t>CONFIRMED — SECONDARY</a:t>
             </a:r>
-            <a:endParaRPr lang="en-US" sz="900" dirty="0"/>
-          </a:p>
-        </p:txBody>
-      </p:sp>
-      <p:sp>
-        <p:nvSpPr>
-          <p:cNvPr id="14" name="Text 12"/>
-          <p:cNvSpPr txBox="1"/>
-          <p:nvPr/>
-        </p:nvSpPr>
-        <p:spPr>
+            <a:endParaRPr lang="en-US" sz="900"/>
+          </a:p>
+        </p:txBody>
+      </p:sp>
+      <p:sp>
+        <p:nvSpPr>
+          <p:cNvPr id="1429341841" name="Text 12"/>
+          <p:cNvSpPr txBox="1"/>
+          <p:nvPr/>
+        </p:nvSpPr>
+        <p:spPr bwMode="auto">
           <a:xfrm>
             <a:off x="402336" y="2112264"/>
             <a:ext cx="4846320" cy="256032"/>
@@ -5052,31 +5256,32 @@
           <a:bodyPr wrap="square" rtlCol="0" anchor="ctr"/>
           <a:lstStyle/>
           <a:p>
-            <a:pPr indent="0" marL="0">
-              <a:buNone/>
-            </a:pPr>
-            <a:r>
-              <a:rPr lang="en-US" sz="1100" b="1" dirty="0">
+            <a:pPr marL="0" indent="0">
+              <a:buNone/>
+              <a:defRPr/>
+            </a:pPr>
+            <a:r>
+              <a:rPr lang="en-US" sz="1100" b="1">
                 <a:solidFill>
                   <a:srgbClr val="2C3E50"/>
                 </a:solidFill>
-                <a:latin typeface="Calibri" pitchFamily="34" charset="0"/>
-                <a:ea typeface="Calibri" pitchFamily="34" charset="-122"/>
-                <a:cs typeface="Calibri" pitchFamily="34" charset="-120"/>
+                <a:latin typeface="Calibri"/>
+                <a:ea typeface="Calibri"/>
+                <a:cs typeface="Calibri"/>
               </a:rPr>
               <a:t>Chargeback drift — Electronics &amp; Digital Goods</a:t>
             </a:r>
-            <a:endParaRPr lang="en-US" sz="1100" dirty="0"/>
-          </a:p>
-        </p:txBody>
-      </p:sp>
-      <p:sp>
-        <p:nvSpPr>
-          <p:cNvPr id="15" name="Text 13"/>
-          <p:cNvSpPr txBox="1"/>
-          <p:nvPr/>
-        </p:nvSpPr>
-        <p:spPr>
+            <a:endParaRPr lang="en-US" sz="1100"/>
+          </a:p>
+        </p:txBody>
+      </p:sp>
+      <p:sp>
+        <p:nvSpPr>
+          <p:cNvPr id="1918734636" name="Text 13"/>
+          <p:cNvSpPr txBox="1"/>
+          <p:nvPr/>
+        </p:nvSpPr>
+        <p:spPr bwMode="auto">
           <a:xfrm>
             <a:off x="402336" y="2404872"/>
             <a:ext cx="8357616" cy="420624"/>
@@ -5091,34 +5296,35 @@
           <a:bodyPr wrap="square" rtlCol="0" anchor="ctr"/>
           <a:lstStyle/>
           <a:p>
-            <a:pPr indent="0" marL="0">
+            <a:pPr marL="0" indent="0">
               <a:lnSpc>
-                <a:spcPct val="115000"/>
+                <a:spcPct val="114999"/>
               </a:lnSpc>
               <a:buNone/>
-            </a:pPr>
-            <a:r>
-              <a:rPr lang="en-US" sz="950" dirty="0">
+              <a:defRPr/>
+            </a:pPr>
+            <a:r>
+              <a:rPr lang="en-US" sz="950">
                 <a:solidFill>
                   <a:srgbClr val="2C3E50"/>
                 </a:solidFill>
-                <a:latin typeface="Calibri" pitchFamily="34" charset="0"/>
-                <a:ea typeface="Calibri" pitchFamily="34" charset="-122"/>
-                <a:cs typeface="Calibri" pitchFamily="34" charset="-120"/>
+                <a:latin typeface="Calibri"/>
+                <a:ea typeface="Calibri"/>
+                <a:cs typeface="Calibri"/>
               </a:rPr>
               <a:t>Chargeback cost doubled Jan → Jun, concentrated in two merchant categories. Electronics explains 42.9% of the merchant-attributable decline. Independent of the routing story — needs its own remediation track.</a:t>
             </a:r>
-            <a:endParaRPr lang="en-US" sz="950" dirty="0"/>
-          </a:p>
-        </p:txBody>
-      </p:sp>
-      <p:sp>
-        <p:nvSpPr>
-          <p:cNvPr id="16" name="Shape 14"/>
+            <a:endParaRPr lang="en-US" sz="950"/>
+          </a:p>
+        </p:txBody>
+      </p:sp>
+      <p:sp>
+        <p:nvSpPr>
+          <p:cNvPr id="1831757003" name="Shape 14"/>
           <p:cNvSpPr/>
           <p:nvPr/>
         </p:nvSpPr>
-        <p:spPr>
+        <p:spPr bwMode="auto">
           <a:xfrm>
             <a:off x="274320" y="2962656"/>
             <a:ext cx="8595360" cy="841248"/>
@@ -5139,11 +5345,11 @@
       </p:sp>
       <p:sp>
         <p:nvSpPr>
-          <p:cNvPr id="17" name="Shape 15"/>
+          <p:cNvPr id="543633329" name="Shape 15"/>
           <p:cNvSpPr/>
           <p:nvPr/>
         </p:nvSpPr>
-        <p:spPr>
+        <p:spPr bwMode="auto">
           <a:xfrm>
             <a:off x="5394960" y="3072384"/>
             <a:ext cx="3291840" cy="292608"/>
@@ -5161,11 +5367,11 @@
       </p:sp>
       <p:sp>
         <p:nvSpPr>
-          <p:cNvPr id="18" name="Text 16"/>
-          <p:cNvSpPr txBox="1"/>
-          <p:nvPr/>
-        </p:nvSpPr>
-        <p:spPr>
+          <p:cNvPr id="873990295" name="Text 16"/>
+          <p:cNvSpPr txBox="1"/>
+          <p:nvPr/>
+        </p:nvSpPr>
+        <p:spPr bwMode="auto">
           <a:xfrm>
             <a:off x="5394960" y="3072384"/>
             <a:ext cx="3291840" cy="292608"/>
@@ -5180,31 +5386,32 @@
           <a:bodyPr wrap="square" lIns="0" tIns="0" rIns="0" bIns="0" rtlCol="0" anchor="ctr"/>
           <a:lstStyle/>
           <a:p>
-            <a:pPr algn="ctr" indent="0" marL="0">
-              <a:buNone/>
-            </a:pPr>
-            <a:r>
-              <a:rPr lang="en-US" sz="900" b="1" dirty="0">
+            <a:pPr marL="0" indent="0" algn="ctr">
+              <a:buNone/>
+              <a:defRPr/>
+            </a:pPr>
+            <a:r>
+              <a:rPr lang="en-US" sz="900" b="1">
                 <a:solidFill>
                   <a:srgbClr val="FFFFFF"/>
                 </a:solidFill>
-                <a:latin typeface="Calibri" pitchFamily="34" charset="0"/>
-                <a:ea typeface="Calibri" pitchFamily="34" charset="-122"/>
-                <a:cs typeface="Calibri" pitchFamily="34" charset="-120"/>
+                <a:latin typeface="Calibri"/>
+                <a:ea typeface="Calibri"/>
+                <a:cs typeface="Calibri"/>
               </a:rPr>
               <a:t>DISPROVED FOR THIS KPI</a:t>
             </a:r>
-            <a:endParaRPr lang="en-US" sz="900" dirty="0"/>
-          </a:p>
-        </p:txBody>
-      </p:sp>
-      <p:sp>
-        <p:nvSpPr>
-          <p:cNvPr id="19" name="Text 17"/>
-          <p:cNvSpPr txBox="1"/>
-          <p:nvPr/>
-        </p:nvSpPr>
-        <p:spPr>
+            <a:endParaRPr lang="en-US" sz="900"/>
+          </a:p>
+        </p:txBody>
+      </p:sp>
+      <p:sp>
+        <p:nvSpPr>
+          <p:cNvPr id="1134831317" name="Text 17"/>
+          <p:cNvSpPr txBox="1"/>
+          <p:nvPr/>
+        </p:nvSpPr>
+        <p:spPr bwMode="auto">
           <a:xfrm>
             <a:off x="402336" y="3035808"/>
             <a:ext cx="4846320" cy="256032"/>
@@ -5219,33 +5426,34 @@
           <a:bodyPr wrap="square" rtlCol="0" anchor="ctr"/>
           <a:lstStyle/>
           <a:p>
-            <a:pPr indent="0" marL="0">
-              <a:buNone/>
-            </a:pPr>
-            <a:r>
-              <a:rPr lang="en-US" sz="1100" b="1" dirty="0">
+            <a:pPr marL="0" indent="0">
+              <a:buNone/>
+              <a:defRPr/>
+            </a:pPr>
+            <a:r>
+              <a:rPr lang="en-US" sz="1100" b="1">
                 <a:solidFill>
                   <a:srgbClr val="2C3E50"/>
                 </a:solidFill>
-                <a:latin typeface="Calibri" pitchFamily="34" charset="0"/>
-                <a:ea typeface="Calibri" pitchFamily="34" charset="-122"/>
-                <a:cs typeface="Calibri" pitchFamily="34" charset="-120"/>
+                <a:latin typeface="Calibri"/>
+                <a:ea typeface="Calibri"/>
+                <a:cs typeface="Calibri"/>
               </a:rPr>
               <a:t>Fraud controls / false declines (Risk Head)</a:t>
             </a:r>
-            <a:endParaRPr lang="en-US" sz="1100" dirty="0"/>
-          </a:p>
-        </p:txBody>
-      </p:sp>
-      <p:sp>
-        <p:nvSpPr>
-          <p:cNvPr id="20" name="Text 18"/>
-          <p:cNvSpPr txBox="1"/>
-          <p:nvPr/>
-        </p:nvSpPr>
-        <p:spPr>
-          <a:xfrm>
-            <a:off x="402336" y="3328416"/>
+            <a:endParaRPr lang="en-US" sz="1100"/>
+          </a:p>
+        </p:txBody>
+      </p:sp>
+      <p:sp>
+        <p:nvSpPr>
+          <p:cNvPr id="971428502" name="Text 18"/>
+          <p:cNvSpPr txBox="1"/>
+          <p:nvPr/>
+        </p:nvSpPr>
+        <p:spPr bwMode="auto">
+          <a:xfrm>
+            <a:off x="393191" y="3328416"/>
             <a:ext cx="8357616" cy="420624"/>
           </a:xfrm>
           <a:prstGeom prst="rect">
@@ -5258,34 +5466,35 @@
           <a:bodyPr wrap="square" rtlCol="0" anchor="ctr"/>
           <a:lstStyle/>
           <a:p>
-            <a:pPr indent="0" marL="0">
+            <a:pPr marL="0" indent="0">
               <a:lnSpc>
-                <a:spcPct val="115000"/>
+                <a:spcPct val="114999"/>
               </a:lnSpc>
               <a:buNone/>
-            </a:pPr>
-            <a:r>
-              <a:rPr lang="en-US" sz="950" dirty="0">
+              <a:defRPr/>
+            </a:pPr>
+            <a:r>
+              <a:rPr lang="en-US" sz="950">
                 <a:solidFill>
                   <a:srgbClr val="2C3E50"/>
                 </a:solidFill>
-                <a:latin typeface="Calibri" pitchFamily="34" charset="0"/>
-                <a:ea typeface="Calibri" pitchFamily="34" charset="-122"/>
-                <a:cs typeface="Calibri" pitchFamily="34" charset="-120"/>
+                <a:latin typeface="Calibri"/>
+                <a:ea typeface="Calibri"/>
+                <a:cs typeface="Calibri"/>
               </a:rPr>
               <a:t>High-risk decline rate genuinely doubled (8.3% → 16.4%) — but successful High-risk transactions show no worse profit trend than any other tier. Fraud tightening is a volume/success-rate problem, not a profit-per-transaction problem. The Risk Head is right about the wrong KPI.</a:t>
             </a:r>
-            <a:endParaRPr lang="en-US" sz="950" dirty="0"/>
-          </a:p>
-        </p:txBody>
-      </p:sp>
-      <p:sp>
-        <p:nvSpPr>
-          <p:cNvPr id="21" name="Shape 19"/>
+            <a:endParaRPr lang="en-US" sz="950"/>
+          </a:p>
+        </p:txBody>
+      </p:sp>
+      <p:sp>
+        <p:nvSpPr>
+          <p:cNvPr id="1209321046" name="Shape 19"/>
           <p:cNvSpPr/>
           <p:nvPr/>
         </p:nvSpPr>
-        <p:spPr>
+        <p:spPr bwMode="auto">
           <a:xfrm>
             <a:off x="274320" y="3886200"/>
             <a:ext cx="8595360" cy="841248"/>
@@ -5306,11 +5515,11 @@
       </p:sp>
       <p:sp>
         <p:nvSpPr>
-          <p:cNvPr id="22" name="Shape 20"/>
+          <p:cNvPr id="1564436801" name="Shape 20"/>
           <p:cNvSpPr/>
           <p:nvPr/>
         </p:nvSpPr>
-        <p:spPr>
+        <p:spPr bwMode="auto">
           <a:xfrm>
             <a:off x="5394960" y="3995928"/>
             <a:ext cx="3291840" cy="292608"/>
@@ -5328,11 +5537,11 @@
       </p:sp>
       <p:sp>
         <p:nvSpPr>
-          <p:cNvPr id="23" name="Text 21"/>
-          <p:cNvSpPr txBox="1"/>
-          <p:nvPr/>
-        </p:nvSpPr>
-        <p:spPr>
+          <p:cNvPr id="1969989894" name="Text 21"/>
+          <p:cNvSpPr txBox="1"/>
+          <p:nvPr/>
+        </p:nvSpPr>
+        <p:spPr bwMode="auto">
           <a:xfrm>
             <a:off x="5394960" y="3995928"/>
             <a:ext cx="3291840" cy="292608"/>
@@ -5347,31 +5556,32 @@
           <a:bodyPr wrap="square" lIns="0" tIns="0" rIns="0" bIns="0" rtlCol="0" anchor="ctr"/>
           <a:lstStyle/>
           <a:p>
-            <a:pPr algn="ctr" indent="0" marL="0">
-              <a:buNone/>
-            </a:pPr>
-            <a:r>
-              <a:rPr lang="en-US" sz="900" b="1" dirty="0">
+            <a:pPr marL="0" indent="0" algn="ctr">
+              <a:buNone/>
+              <a:defRPr/>
+            </a:pPr>
+            <a:r>
+              <a:rPr lang="en-US" sz="900" b="1">
                 <a:solidFill>
                   <a:srgbClr val="FFFFFF"/>
                 </a:solidFill>
-                <a:latin typeface="Calibri" pitchFamily="34" charset="0"/>
-                <a:ea typeface="Calibri" pitchFamily="34" charset="-122"/>
-                <a:cs typeface="Calibri" pitchFamily="34" charset="-120"/>
+                <a:latin typeface="Calibri"/>
+                <a:ea typeface="Calibri"/>
+                <a:cs typeface="Calibri"/>
               </a:rPr>
               <a:t>REAL BUT MINOR</a:t>
             </a:r>
-            <a:endParaRPr lang="en-US" sz="900" dirty="0"/>
-          </a:p>
-        </p:txBody>
-      </p:sp>
-      <p:sp>
-        <p:nvSpPr>
-          <p:cNvPr id="24" name="Text 22"/>
-          <p:cNvSpPr txBox="1"/>
-          <p:nvPr/>
-        </p:nvSpPr>
-        <p:spPr>
+            <a:endParaRPr lang="en-US" sz="900"/>
+          </a:p>
+        </p:txBody>
+      </p:sp>
+      <p:sp>
+        <p:nvSpPr>
+          <p:cNvPr id="1733011443" name="Text 22"/>
+          <p:cNvSpPr txBox="1"/>
+          <p:nvPr/>
+        </p:nvSpPr>
+        <p:spPr bwMode="auto">
           <a:xfrm>
             <a:off x="402336" y="3959352"/>
             <a:ext cx="4846320" cy="256032"/>
@@ -5386,31 +5596,32 @@
           <a:bodyPr wrap="square" rtlCol="0" anchor="ctr"/>
           <a:lstStyle/>
           <a:p>
-            <a:pPr indent="0" marL="0">
-              <a:buNone/>
-            </a:pPr>
-            <a:r>
-              <a:rPr lang="en-US" sz="1100" b="1" dirty="0">
+            <a:pPr marL="0" indent="0">
+              <a:buNone/>
+              <a:defRPr/>
+            </a:pPr>
+            <a:r>
+              <a:rPr lang="en-US" sz="1100" b="1">
                 <a:solidFill>
                   <a:srgbClr val="2C3E50"/>
                 </a:solidFill>
-                <a:latin typeface="Calibri" pitchFamily="34" charset="0"/>
-                <a:ea typeface="Calibri" pitchFamily="34" charset="-122"/>
-                <a:cs typeface="Calibri" pitchFamily="34" charset="-120"/>
+                <a:latin typeface="Calibri"/>
+                <a:ea typeface="Calibri"/>
+                <a:cs typeface="Calibri"/>
               </a:rPr>
               <a:t>Merchant pricing (CFO)</a:t>
             </a:r>
-            <a:endParaRPr lang="en-US" sz="1100" dirty="0"/>
-          </a:p>
-        </p:txBody>
-      </p:sp>
-      <p:sp>
-        <p:nvSpPr>
-          <p:cNvPr id="25" name="Text 23"/>
-          <p:cNvSpPr txBox="1"/>
-          <p:nvPr/>
-        </p:nvSpPr>
-        <p:spPr>
+            <a:endParaRPr lang="en-US" sz="1100"/>
+          </a:p>
+        </p:txBody>
+      </p:sp>
+      <p:sp>
+        <p:nvSpPr>
+          <p:cNvPr id="2112913532" name="Text 23"/>
+          <p:cNvSpPr txBox="1"/>
+          <p:nvPr/>
+        </p:nvSpPr>
+        <p:spPr bwMode="auto">
           <a:xfrm>
             <a:off x="402336" y="4251960"/>
             <a:ext cx="8357616" cy="420624"/>
@@ -5425,24 +5636,25 @@
           <a:bodyPr wrap="square" rtlCol="0" anchor="ctr"/>
           <a:lstStyle/>
           <a:p>
-            <a:pPr indent="0" marL="0">
+            <a:pPr marL="0" indent="0">
               <a:lnSpc>
-                <a:spcPct val="115000"/>
+                <a:spcPct val="114999"/>
               </a:lnSpc>
               <a:buNone/>
-            </a:pPr>
-            <a:r>
-              <a:rPr lang="en-US" sz="950" dirty="0">
+              <a:defRPr/>
+            </a:pPr>
+            <a:r>
+              <a:rPr lang="en-US" sz="950">
                 <a:solidFill>
                   <a:srgbClr val="2C3E50"/>
                 </a:solidFill>
-                <a:latin typeface="Calibri" pitchFamily="34" charset="0"/>
-                <a:ea typeface="Calibri" pitchFamily="34" charset="-122"/>
-                <a:cs typeface="Calibri" pitchFamily="34" charset="-120"/>
+                <a:latin typeface="Calibri"/>
+                <a:ea typeface="Calibri"/>
+                <a:cs typeface="Calibri"/>
               </a:rPr>
               <a:t>Singapore Enterprise fee cut (2.6% → 1.5%, Feb 2025) is confirmed but too narrow to explain a 3-country, 6-month trend. No broader undocumented pricing erosion found.</a:t>
             </a:r>
-            <a:endParaRPr lang="en-US" sz="950" dirty="0"/>
+            <a:endParaRPr lang="en-US" sz="950"/>
           </a:p>
         </p:txBody>
       </p:sp>
@@ -5451,11 +5663,19 @@
   <p:clrMapOvr>
     <a:masterClrMapping/>
   </p:clrMapOvr>
+  <mc:AlternateContent xmlns:mc="http://schemas.openxmlformats.org/markup-compatibility/2006">
+    <mc:Choice xmlns:p159="http://schemas.microsoft.com/office/powerpoint/2015/09/main" xmlns:p14="http://schemas.microsoft.com/office/powerpoint/2010/main" Requires="p159">
+      <p:transition p14:dur="500" advClick="1"/>
+    </mc:Choice>
+    <mc:Fallback>
+      <p:transition advClick="1"/>
+    </mc:Fallback>
+  </mc:AlternateContent>
 </p:sld>
 </file>
 
 <file path=ppt/slides/slide5.xml><?xml version="1.0" encoding="utf-8"?>
-<p:sld xmlns:a="http://schemas.openxmlformats.org/drawingml/2006/main" xmlns:r="http://schemas.openxmlformats.org/officeDocument/2006/relationships" xmlns:p="http://schemas.openxmlformats.org/presentationml/2006/main">
+<p:sld xmlns:a="http://schemas.openxmlformats.org/drawingml/2006/main" xmlns:r="http://schemas.openxmlformats.org/officeDocument/2006/relationships" xmlns:p="http://schemas.openxmlformats.org/presentationml/2006/main" xmlns:m="http://schemas.openxmlformats.org/officeDocument/2006/math" xmlns:w="http://schemas.openxmlformats.org/wordprocessingml/2006/main" xmlns:mc="http://schemas.openxmlformats.org/markup-compatibility/2006" showMasterPhAnim="0" showMasterSp="1" show="1">
   <p:cSld name="Slide 5">
     <p:spTree>
       <p:nvGrpSpPr>
@@ -5463,7 +5683,7 @@
         <p:cNvGrpSpPr/>
         <p:nvPr/>
       </p:nvGrpSpPr>
-      <p:grpSpPr>
+      <p:grpSpPr bwMode="auto">
         <a:xfrm>
           <a:off x="0" y="0"/>
           <a:ext cx="0" cy="0"/>
@@ -5473,11 +5693,11 @@
       </p:grpSpPr>
       <p:sp>
         <p:nvSpPr>
-          <p:cNvPr id="2" name="Shape 0"/>
+          <p:cNvPr id="634149070" name="Shape 0"/>
           <p:cNvSpPr/>
           <p:nvPr/>
         </p:nvSpPr>
-        <p:spPr>
+        <p:spPr bwMode="auto">
           <a:xfrm>
             <a:off x="0" y="0"/>
             <a:ext cx="9144000" cy="5143500"/>
@@ -5493,11 +5713,11 @@
       </p:sp>
       <p:sp>
         <p:nvSpPr>
-          <p:cNvPr id="3" name="Shape 1"/>
+          <p:cNvPr id="466760236" name="Shape 1"/>
           <p:cNvSpPr/>
           <p:nvPr/>
         </p:nvSpPr>
-        <p:spPr>
+        <p:spPr bwMode="auto">
           <a:xfrm>
             <a:off x="0" y="0"/>
             <a:ext cx="9144000" cy="1005840"/>
@@ -5513,11 +5733,11 @@
       </p:sp>
       <p:sp>
         <p:nvSpPr>
-          <p:cNvPr id="4" name="Text 2"/>
-          <p:cNvSpPr txBox="1"/>
-          <p:nvPr/>
-        </p:nvSpPr>
-        <p:spPr>
+          <p:cNvPr id="226160714" name="Text 2"/>
+          <p:cNvSpPr txBox="1"/>
+          <p:nvPr/>
+        </p:nvSpPr>
+        <p:spPr bwMode="auto">
           <a:xfrm>
             <a:off x="365760" y="73152"/>
             <a:ext cx="5486400" cy="237744"/>
@@ -5532,31 +5752,32 @@
           <a:bodyPr wrap="square" rtlCol="0" anchor="ctr"/>
           <a:lstStyle/>
           <a:p>
-            <a:pPr indent="0" marL="0">
-              <a:buNone/>
-            </a:pPr>
-            <a:r>
-              <a:rPr lang="en-US" sz="800" b="1" spc="300" kern="0" dirty="0">
+            <a:pPr marL="0" indent="0">
+              <a:buNone/>
+              <a:defRPr/>
+            </a:pPr>
+            <a:r>
+              <a:rPr lang="en-US" sz="800" b="1" spc="300">
                 <a:solidFill>
                   <a:srgbClr val="00897B"/>
                 </a:solidFill>
-                <a:latin typeface="Calibri" pitchFamily="34" charset="0"/>
-                <a:ea typeface="Calibri" pitchFamily="34" charset="-122"/>
-                <a:cs typeface="Calibri" pitchFamily="34" charset="-120"/>
+                <a:latin typeface="Calibri"/>
+                <a:ea typeface="Calibri"/>
+                <a:cs typeface="Calibri"/>
               </a:rPr>
               <a:t>60-DAY ACTION PLAN</a:t>
             </a:r>
-            <a:endParaRPr lang="en-US" sz="800" dirty="0"/>
-          </a:p>
-        </p:txBody>
-      </p:sp>
-      <p:sp>
-        <p:nvSpPr>
-          <p:cNvPr id="5" name="Text 3"/>
-          <p:cNvSpPr txBox="1"/>
-          <p:nvPr/>
-        </p:nvSpPr>
-        <p:spPr>
+            <a:endParaRPr lang="en-US" sz="800"/>
+          </a:p>
+        </p:txBody>
+      </p:sp>
+      <p:sp>
+        <p:nvSpPr>
+          <p:cNvPr id="986046124" name="Text 3"/>
+          <p:cNvSpPr txBox="1"/>
+          <p:nvPr/>
+        </p:nvSpPr>
+        <p:spPr bwMode="auto">
           <a:xfrm>
             <a:off x="365760" y="310896"/>
             <a:ext cx="8412480" cy="530352"/>
@@ -5571,31 +5792,32 @@
           <a:bodyPr wrap="square" rtlCol="0" anchor="ctr"/>
           <a:lstStyle/>
           <a:p>
-            <a:pPr indent="0" marL="0">
-              <a:buNone/>
-            </a:pPr>
-            <a:r>
-              <a:rPr lang="en-US" sz="2200" b="1" dirty="0">
+            <a:pPr marL="0" indent="0">
+              <a:buNone/>
+              <a:defRPr/>
+            </a:pPr>
+            <a:r>
+              <a:rPr lang="en-US" sz="2200" b="1">
                 <a:solidFill>
                   <a:srgbClr val="FFFFFF"/>
                 </a:solidFill>
-                <a:latin typeface="Cambria" pitchFamily="34" charset="0"/>
-                <a:ea typeface="Cambria" pitchFamily="34" charset="-122"/>
-                <a:cs typeface="Cambria" pitchFamily="34" charset="-120"/>
+                <a:latin typeface="Cambria"/>
+                <a:ea typeface="Cambria"/>
+                <a:cs typeface="Cambria"/>
               </a:rPr>
               <a:t>Five actions — each with an owner, metric, and risk</a:t>
             </a:r>
-            <a:endParaRPr lang="en-US" sz="2200" dirty="0"/>
-          </a:p>
-        </p:txBody>
-      </p:sp>
-      <p:sp>
-        <p:nvSpPr>
-          <p:cNvPr id="6" name="Shape 4"/>
+            <a:endParaRPr lang="en-US" sz="2200"/>
+          </a:p>
+        </p:txBody>
+      </p:sp>
+      <p:sp>
+        <p:nvSpPr>
+          <p:cNvPr id="2102529429" name="Shape 4"/>
           <p:cNvSpPr/>
           <p:nvPr/>
         </p:nvSpPr>
-        <p:spPr>
+        <p:spPr bwMode="auto">
           <a:xfrm>
             <a:off x="228600" y="969264"/>
             <a:ext cx="54864" cy="713232"/>
@@ -5611,11 +5833,11 @@
       </p:sp>
       <p:sp>
         <p:nvSpPr>
-          <p:cNvPr id="7" name="Shape 5"/>
+          <p:cNvPr id="571784708" name="Shape 5"/>
           <p:cNvSpPr/>
           <p:nvPr/>
         </p:nvSpPr>
-        <p:spPr>
+        <p:spPr bwMode="auto">
           <a:xfrm>
             <a:off x="301752" y="1115568"/>
             <a:ext cx="384048" cy="384048"/>
@@ -5631,11 +5853,11 @@
       </p:sp>
       <p:sp>
         <p:nvSpPr>
-          <p:cNvPr id="8" name="Text 6"/>
-          <p:cNvSpPr txBox="1"/>
-          <p:nvPr/>
-        </p:nvSpPr>
-        <p:spPr>
+          <p:cNvPr id="1301045124" name="Text 6"/>
+          <p:cNvSpPr txBox="1"/>
+          <p:nvPr/>
+        </p:nvSpPr>
+        <p:spPr bwMode="auto">
           <a:xfrm>
             <a:off x="301752" y="1115568"/>
             <a:ext cx="384048" cy="384048"/>
@@ -5650,31 +5872,32 @@
           <a:bodyPr wrap="square" lIns="0" tIns="0" rIns="0" bIns="0" rtlCol="0" anchor="ctr"/>
           <a:lstStyle/>
           <a:p>
-            <a:pPr algn="ctr" indent="0" marL="0">
-              <a:buNone/>
-            </a:pPr>
-            <a:r>
-              <a:rPr lang="en-US" sz="1200" b="1" dirty="0">
+            <a:pPr marL="0" indent="0" algn="ctr">
+              <a:buNone/>
+              <a:defRPr/>
+            </a:pPr>
+            <a:r>
+              <a:rPr lang="en-US" sz="1200" b="1">
                 <a:solidFill>
                   <a:srgbClr val="FFFFFF"/>
                 </a:solidFill>
-                <a:latin typeface="Cambria" pitchFamily="34" charset="0"/>
-                <a:ea typeface="Cambria" pitchFamily="34" charset="-122"/>
-                <a:cs typeface="Cambria" pitchFamily="34" charset="-120"/>
+                <a:latin typeface="Cambria"/>
+                <a:ea typeface="Cambria"/>
+                <a:cs typeface="Cambria"/>
               </a:rPr>
               <a:t>1</a:t>
             </a:r>
-            <a:endParaRPr lang="en-US" sz="1200" dirty="0"/>
-          </a:p>
-        </p:txBody>
-      </p:sp>
-      <p:sp>
-        <p:nvSpPr>
-          <p:cNvPr id="9" name="Shape 7"/>
+            <a:endParaRPr lang="en-US" sz="1200"/>
+          </a:p>
+        </p:txBody>
+      </p:sp>
+      <p:sp>
+        <p:nvSpPr>
+          <p:cNvPr id="930210560" name="Shape 7"/>
           <p:cNvSpPr/>
           <p:nvPr/>
         </p:nvSpPr>
-        <p:spPr>
+        <p:spPr bwMode="auto">
           <a:xfrm>
             <a:off x="768096" y="1042416"/>
             <a:ext cx="1005840" cy="292608"/>
@@ -5692,11 +5915,11 @@
       </p:sp>
       <p:sp>
         <p:nvSpPr>
-          <p:cNvPr id="10" name="Text 8"/>
-          <p:cNvSpPr txBox="1"/>
-          <p:nvPr/>
-        </p:nvSpPr>
-        <p:spPr>
+          <p:cNvPr id="383339499" name="Text 8"/>
+          <p:cNvSpPr txBox="1"/>
+          <p:nvPr/>
+        </p:nvSpPr>
+        <p:spPr bwMode="auto">
           <a:xfrm>
             <a:off x="768096" y="1042416"/>
             <a:ext cx="1005840" cy="292608"/>
@@ -5711,31 +5934,32 @@
           <a:bodyPr wrap="square" lIns="0" tIns="0" rIns="0" bIns="0" rtlCol="0" anchor="ctr"/>
           <a:lstStyle/>
           <a:p>
-            <a:pPr algn="ctr" indent="0" marL="0">
-              <a:buNone/>
-            </a:pPr>
-            <a:r>
-              <a:rPr lang="en-US" sz="900" b="1" dirty="0">
+            <a:pPr marL="0" indent="0" algn="ctr">
+              <a:buNone/>
+              <a:defRPr/>
+            </a:pPr>
+            <a:r>
+              <a:rPr lang="en-US" sz="900" b="1">
                 <a:solidFill>
                   <a:srgbClr val="FFFFFF"/>
                 </a:solidFill>
-                <a:latin typeface="Calibri" pitchFamily="34" charset="0"/>
-                <a:ea typeface="Calibri" pitchFamily="34" charset="-122"/>
-                <a:cs typeface="Calibri" pitchFamily="34" charset="-120"/>
+                <a:latin typeface="Calibri"/>
+                <a:ea typeface="Calibri"/>
+                <a:cs typeface="Calibri"/>
               </a:rPr>
               <a:t>Days 1–30</a:t>
             </a:r>
-            <a:endParaRPr lang="en-US" sz="900" dirty="0"/>
-          </a:p>
-        </p:txBody>
-      </p:sp>
-      <p:sp>
-        <p:nvSpPr>
-          <p:cNvPr id="11" name="Text 9"/>
-          <p:cNvSpPr txBox="1"/>
-          <p:nvPr/>
-        </p:nvSpPr>
-        <p:spPr>
+            <a:endParaRPr lang="en-US" sz="900"/>
+          </a:p>
+        </p:txBody>
+      </p:sp>
+      <p:sp>
+        <p:nvSpPr>
+          <p:cNvPr id="1974386527" name="Text 9"/>
+          <p:cNvSpPr txBox="1"/>
+          <p:nvPr/>
+        </p:nvSpPr>
+        <p:spPr bwMode="auto">
           <a:xfrm>
             <a:off x="1847088" y="1005840"/>
             <a:ext cx="4114800" cy="292608"/>
@@ -5750,31 +5974,32 @@
           <a:bodyPr wrap="square" rtlCol="0" anchor="ctr"/>
           <a:lstStyle/>
           <a:p>
-            <a:pPr indent="0" marL="0">
-              <a:buNone/>
-            </a:pPr>
-            <a:r>
-              <a:rPr lang="en-US" sz="1050" b="1" dirty="0">
+            <a:pPr marL="0" indent="0">
+              <a:buNone/>
+              <a:defRPr/>
+            </a:pPr>
+            <a:r>
+              <a:rPr lang="en-US" sz="1050" b="1">
                 <a:solidFill>
                   <a:srgbClr val="FFFFFF"/>
                 </a:solidFill>
-                <a:latin typeface="Calibri" pitchFamily="34" charset="0"/>
-                <a:ea typeface="Calibri" pitchFamily="34" charset="-122"/>
-                <a:cs typeface="Calibri" pitchFamily="34" charset="-120"/>
+                <a:latin typeface="Calibri"/>
+                <a:ea typeface="Calibri"/>
+                <a:cs typeface="Calibri"/>
               </a:rPr>
               <a:t>Renegotiate or cap Route R3 (PayGlobal) variable fee</a:t>
             </a:r>
-            <a:endParaRPr lang="en-US" sz="1050" dirty="0"/>
-          </a:p>
-        </p:txBody>
-      </p:sp>
-      <p:sp>
-        <p:nvSpPr>
-          <p:cNvPr id="12" name="Text 10"/>
-          <p:cNvSpPr txBox="1"/>
-          <p:nvPr/>
-        </p:nvSpPr>
-        <p:spPr>
+            <a:endParaRPr lang="en-US" sz="1050"/>
+          </a:p>
+        </p:txBody>
+      </p:sp>
+      <p:sp>
+        <p:nvSpPr>
+          <p:cNvPr id="1506791571" name="Text 10"/>
+          <p:cNvSpPr txBox="1"/>
+          <p:nvPr/>
+        </p:nvSpPr>
+        <p:spPr bwMode="auto">
           <a:xfrm>
             <a:off x="1847088" y="1280160"/>
             <a:ext cx="4114800" cy="201168"/>
@@ -5789,31 +6014,32 @@
           <a:bodyPr wrap="square" rtlCol="0" anchor="ctr"/>
           <a:lstStyle/>
           <a:p>
-            <a:pPr indent="0" marL="0">
-              <a:buNone/>
-            </a:pPr>
-            <a:r>
-              <a:rPr lang="en-US" sz="850" dirty="0">
+            <a:pPr marL="0" indent="0">
+              <a:buNone/>
+              <a:defRPr/>
+            </a:pPr>
+            <a:r>
+              <a:rPr lang="en-US" sz="850">
                 <a:solidFill>
                   <a:srgbClr val="8FA0AF"/>
                 </a:solidFill>
-                <a:latin typeface="Calibri" pitchFamily="34" charset="0"/>
-                <a:ea typeface="Calibri" pitchFamily="34" charset="-122"/>
-                <a:cs typeface="Calibri" pitchFamily="34" charset="-120"/>
+                <a:latin typeface="Calibri"/>
+                <a:ea typeface="Calibri"/>
+                <a:cs typeface="Calibri"/>
               </a:rPr>
               <a:t>Owner: Head of Payments + CFO</a:t>
             </a:r>
-            <a:endParaRPr lang="en-US" sz="850" dirty="0"/>
-          </a:p>
-        </p:txBody>
-      </p:sp>
-      <p:sp>
-        <p:nvSpPr>
-          <p:cNvPr id="13" name="Text 11"/>
-          <p:cNvSpPr txBox="1"/>
-          <p:nvPr/>
-        </p:nvSpPr>
-        <p:spPr>
+            <a:endParaRPr lang="en-US" sz="850"/>
+          </a:p>
+        </p:txBody>
+      </p:sp>
+      <p:sp>
+        <p:nvSpPr>
+          <p:cNvPr id="828215237" name="Text 11"/>
+          <p:cNvSpPr txBox="1"/>
+          <p:nvPr/>
+        </p:nvSpPr>
+        <p:spPr bwMode="auto">
           <a:xfrm>
             <a:off x="1847088" y="1444752"/>
             <a:ext cx="5394960" cy="219456"/>
@@ -5828,31 +6054,32 @@
           <a:bodyPr wrap="square" rtlCol="0" anchor="ctr"/>
           <a:lstStyle/>
           <a:p>
-            <a:pPr indent="0" marL="0">
-              <a:buNone/>
-            </a:pPr>
-            <a:r>
-              <a:rPr lang="en-US" sz="750" dirty="0">
+            <a:pPr marL="0" indent="0">
+              <a:buNone/>
+              <a:defRPr/>
+            </a:pPr>
+            <a:r>
+              <a:rPr lang="en-US" sz="750">
                 <a:solidFill>
                   <a:srgbClr val="00897B"/>
                 </a:solidFill>
-                <a:latin typeface="Calibri" pitchFamily="34" charset="0"/>
-                <a:ea typeface="Calibri" pitchFamily="34" charset="-122"/>
-                <a:cs typeface="Calibri" pitchFamily="34" charset="-120"/>
+                <a:latin typeface="Calibri"/>
+                <a:ea typeface="Calibri"/>
+                <a:cs typeface="Calibri"/>
               </a:rPr>
               <a:t>✓ Route R3 variable_fee_pct back to ≤1.2% OR R3 share &lt; 30%</a:t>
             </a:r>
-            <a:endParaRPr lang="en-US" sz="750" dirty="0"/>
-          </a:p>
-        </p:txBody>
-      </p:sp>
-      <p:sp>
-        <p:nvSpPr>
-          <p:cNvPr id="14" name="Shape 12"/>
+            <a:endParaRPr lang="en-US" sz="750"/>
+          </a:p>
+        </p:txBody>
+      </p:sp>
+      <p:sp>
+        <p:nvSpPr>
+          <p:cNvPr id="1138925690" name="Shape 12"/>
           <p:cNvSpPr/>
           <p:nvPr/>
         </p:nvSpPr>
-        <p:spPr>
+        <p:spPr bwMode="auto">
           <a:xfrm>
             <a:off x="6053328" y="1005840"/>
             <a:ext cx="2852928" cy="640080"/>
@@ -5868,11 +6095,11 @@
       </p:sp>
       <p:sp>
         <p:nvSpPr>
-          <p:cNvPr id="15" name="Text 13"/>
-          <p:cNvSpPr txBox="1"/>
-          <p:nvPr/>
-        </p:nvSpPr>
-        <p:spPr>
+          <p:cNvPr id="124342106" name="Text 13"/>
+          <p:cNvSpPr txBox="1"/>
+          <p:nvPr/>
+        </p:nvSpPr>
+        <p:spPr bwMode="auto">
           <a:xfrm>
             <a:off x="6126480" y="1060704"/>
             <a:ext cx="2706624" cy="512064"/>
@@ -5887,34 +6114,35 @@
           <a:bodyPr wrap="square" rtlCol="0" anchor="ctr"/>
           <a:lstStyle/>
           <a:p>
-            <a:pPr indent="0" marL="0">
+            <a:pPr marL="0" indent="0">
               <a:lnSpc>
                 <a:spcPct val="120000"/>
               </a:lnSpc>
               <a:buNone/>
-            </a:pPr>
-            <a:r>
-              <a:rPr lang="en-US" sz="850" dirty="0">
+              <a:defRPr/>
+            </a:pPr>
+            <a:r>
+              <a:rPr lang="en-US" sz="850">
                 <a:solidFill>
                   <a:srgbClr val="F4A31A"/>
                 </a:solidFill>
-                <a:latin typeface="Calibri" pitchFamily="34" charset="0"/>
-                <a:ea typeface="Calibri" pitchFamily="34" charset="-122"/>
-                <a:cs typeface="Calibri" pitchFamily="34" charset="-120"/>
+                <a:latin typeface="Calibri"/>
+                <a:ea typeface="Calibri"/>
+                <a:cs typeface="Calibri"/>
               </a:rPr>
               <a:t>⚠ PayGlobal may refuse; need backup route ready</a:t>
             </a:r>
-            <a:endParaRPr lang="en-US" sz="850" dirty="0"/>
-          </a:p>
-        </p:txBody>
-      </p:sp>
-      <p:sp>
-        <p:nvSpPr>
-          <p:cNvPr id="16" name="Shape 14"/>
+            <a:endParaRPr lang="en-US" sz="850"/>
+          </a:p>
+        </p:txBody>
+      </p:sp>
+      <p:sp>
+        <p:nvSpPr>
+          <p:cNvPr id="1118616201" name="Shape 14"/>
           <p:cNvSpPr/>
           <p:nvPr/>
         </p:nvSpPr>
-        <p:spPr>
+        <p:spPr bwMode="auto">
           <a:xfrm>
             <a:off x="228600" y="1764792"/>
             <a:ext cx="54864" cy="713232"/>
@@ -5930,11 +6158,11 @@
       </p:sp>
       <p:sp>
         <p:nvSpPr>
-          <p:cNvPr id="17" name="Shape 15"/>
+          <p:cNvPr id="1478415752" name="Shape 15"/>
           <p:cNvSpPr/>
           <p:nvPr/>
         </p:nvSpPr>
-        <p:spPr>
+        <p:spPr bwMode="auto">
           <a:xfrm>
             <a:off x="301752" y="1911096"/>
             <a:ext cx="384048" cy="384048"/>
@@ -5950,11 +6178,11 @@
       </p:sp>
       <p:sp>
         <p:nvSpPr>
-          <p:cNvPr id="18" name="Text 16"/>
-          <p:cNvSpPr txBox="1"/>
-          <p:nvPr/>
-        </p:nvSpPr>
-        <p:spPr>
+          <p:cNvPr id="2088309077" name="Text 16"/>
+          <p:cNvSpPr txBox="1"/>
+          <p:nvPr/>
+        </p:nvSpPr>
+        <p:spPr bwMode="auto">
           <a:xfrm>
             <a:off x="301752" y="1911096"/>
             <a:ext cx="384048" cy="384048"/>
@@ -5969,31 +6197,32 @@
           <a:bodyPr wrap="square" lIns="0" tIns="0" rIns="0" bIns="0" rtlCol="0" anchor="ctr"/>
           <a:lstStyle/>
           <a:p>
-            <a:pPr algn="ctr" indent="0" marL="0">
-              <a:buNone/>
-            </a:pPr>
-            <a:r>
-              <a:rPr lang="en-US" sz="1200" b="1" dirty="0">
+            <a:pPr marL="0" indent="0" algn="ctr">
+              <a:buNone/>
+              <a:defRPr/>
+            </a:pPr>
+            <a:r>
+              <a:rPr lang="en-US" sz="1200" b="1">
                 <a:solidFill>
                   <a:srgbClr val="FFFFFF"/>
                 </a:solidFill>
-                <a:latin typeface="Cambria" pitchFamily="34" charset="0"/>
-                <a:ea typeface="Cambria" pitchFamily="34" charset="-122"/>
-                <a:cs typeface="Cambria" pitchFamily="34" charset="-120"/>
+                <a:latin typeface="Cambria"/>
+                <a:ea typeface="Cambria"/>
+                <a:cs typeface="Cambria"/>
               </a:rPr>
               <a:t>2</a:t>
             </a:r>
-            <a:endParaRPr lang="en-US" sz="1200" dirty="0"/>
-          </a:p>
-        </p:txBody>
-      </p:sp>
-      <p:sp>
-        <p:nvSpPr>
-          <p:cNvPr id="19" name="Shape 17"/>
+            <a:endParaRPr lang="en-US" sz="1200"/>
+          </a:p>
+        </p:txBody>
+      </p:sp>
+      <p:sp>
+        <p:nvSpPr>
+          <p:cNvPr id="1349043732" name="Shape 17"/>
           <p:cNvSpPr/>
           <p:nvPr/>
         </p:nvSpPr>
-        <p:spPr>
+        <p:spPr bwMode="auto">
           <a:xfrm>
             <a:off x="768096" y="1837944"/>
             <a:ext cx="1005840" cy="292608"/>
@@ -6011,11 +6240,11 @@
       </p:sp>
       <p:sp>
         <p:nvSpPr>
-          <p:cNvPr id="20" name="Text 18"/>
-          <p:cNvSpPr txBox="1"/>
-          <p:nvPr/>
-        </p:nvSpPr>
-        <p:spPr>
+          <p:cNvPr id="1612062117" name="Text 18"/>
+          <p:cNvSpPr txBox="1"/>
+          <p:nvPr/>
+        </p:nvSpPr>
+        <p:spPr bwMode="auto">
           <a:xfrm>
             <a:off x="768096" y="1837944"/>
             <a:ext cx="1005840" cy="292608"/>
@@ -6030,33 +6259,34 @@
           <a:bodyPr wrap="square" lIns="0" tIns="0" rIns="0" bIns="0" rtlCol="0" anchor="ctr"/>
           <a:lstStyle/>
           <a:p>
-            <a:pPr algn="ctr" indent="0" marL="0">
-              <a:buNone/>
-            </a:pPr>
-            <a:r>
-              <a:rPr lang="en-US" sz="900" b="1" dirty="0">
+            <a:pPr marL="0" indent="0" algn="ctr">
+              <a:buNone/>
+              <a:defRPr/>
+            </a:pPr>
+            <a:r>
+              <a:rPr lang="en-US" sz="900" b="1">
                 <a:solidFill>
                   <a:srgbClr val="FFFFFF"/>
                 </a:solidFill>
-                <a:latin typeface="Calibri" pitchFamily="34" charset="0"/>
-                <a:ea typeface="Calibri" pitchFamily="34" charset="-122"/>
-                <a:cs typeface="Calibri" pitchFamily="34" charset="-120"/>
+                <a:latin typeface="Calibri"/>
+                <a:ea typeface="Calibri"/>
+                <a:cs typeface="Calibri"/>
               </a:rPr>
               <a:t>Days 1–20</a:t>
             </a:r>
-            <a:endParaRPr lang="en-US" sz="900" dirty="0"/>
-          </a:p>
-        </p:txBody>
-      </p:sp>
-      <p:sp>
-        <p:nvSpPr>
-          <p:cNvPr id="21" name="Text 19"/>
-          <p:cNvSpPr txBox="1"/>
-          <p:nvPr/>
-        </p:nvSpPr>
-        <p:spPr>
-          <a:xfrm>
-            <a:off x="1847088" y="1801368"/>
+            <a:endParaRPr lang="en-US" sz="900"/>
+          </a:p>
+        </p:txBody>
+      </p:sp>
+      <p:sp>
+        <p:nvSpPr>
+          <p:cNvPr id="854893488" name="Text 19"/>
+          <p:cNvSpPr txBox="1"/>
+          <p:nvPr/>
+        </p:nvSpPr>
+        <p:spPr bwMode="auto">
+          <a:xfrm>
+            <a:off x="1847088" y="1801367"/>
             <a:ext cx="4114800" cy="292608"/>
           </a:xfrm>
           <a:prstGeom prst="rect">
@@ -6069,31 +6299,32 @@
           <a:bodyPr wrap="square" rtlCol="0" anchor="ctr"/>
           <a:lstStyle/>
           <a:p>
-            <a:pPr indent="0" marL="0">
-              <a:buNone/>
-            </a:pPr>
-            <a:r>
-              <a:rPr lang="en-US" sz="1050" b="1" dirty="0">
+            <a:pPr marL="0" indent="0">
+              <a:buNone/>
+              <a:defRPr/>
+            </a:pPr>
+            <a:r>
+              <a:rPr lang="en-US" sz="1050" b="1">
                 <a:solidFill>
                   <a:srgbClr val="FFFFFF"/>
                 </a:solidFill>
-                <a:latin typeface="Calibri" pitchFamily="34" charset="0"/>
-                <a:ea typeface="Calibri" pitchFamily="34" charset="-122"/>
-                <a:cs typeface="Calibri" pitchFamily="34" charset="-120"/>
+                <a:latin typeface="Calibri"/>
+                <a:ea typeface="Calibri"/>
+                <a:cs typeface="Calibri"/>
               </a:rPr>
               <a:t>Rebalance routing — shift 10–15% volume from R3 to R1/R2/R4</a:t>
             </a:r>
-            <a:endParaRPr lang="en-US" sz="1050" dirty="0"/>
-          </a:p>
-        </p:txBody>
-      </p:sp>
-      <p:sp>
-        <p:nvSpPr>
-          <p:cNvPr id="22" name="Text 20"/>
-          <p:cNvSpPr txBox="1"/>
-          <p:nvPr/>
-        </p:nvSpPr>
-        <p:spPr>
+            <a:endParaRPr lang="en-US" sz="1050"/>
+          </a:p>
+        </p:txBody>
+      </p:sp>
+      <p:sp>
+        <p:nvSpPr>
+          <p:cNvPr id="1628312887" name="Text 20"/>
+          <p:cNvSpPr txBox="1"/>
+          <p:nvPr/>
+        </p:nvSpPr>
+        <p:spPr bwMode="auto">
           <a:xfrm>
             <a:off x="1847088" y="2075688"/>
             <a:ext cx="4114800" cy="201168"/>
@@ -6108,31 +6339,32 @@
           <a:bodyPr wrap="square" rtlCol="0" anchor="ctr"/>
           <a:lstStyle/>
           <a:p>
-            <a:pPr indent="0" marL="0">
-              <a:buNone/>
-            </a:pPr>
-            <a:r>
-              <a:rPr lang="en-US" sz="850" dirty="0">
+            <a:pPr marL="0" indent="0">
+              <a:buNone/>
+              <a:defRPr/>
+            </a:pPr>
+            <a:r>
+              <a:rPr lang="en-US" sz="850">
                 <a:solidFill>
                   <a:srgbClr val="8FA0AF"/>
                 </a:solidFill>
-                <a:latin typeface="Calibri" pitchFamily="34" charset="0"/>
-                <a:ea typeface="Calibri" pitchFamily="34" charset="-122"/>
-                <a:cs typeface="Calibri" pitchFamily="34" charset="-120"/>
+                <a:latin typeface="Calibri"/>
+                <a:ea typeface="Calibri"/>
+                <a:cs typeface="Calibri"/>
               </a:rPr>
               <a:t>Owner: Head of Payments</a:t>
             </a:r>
-            <a:endParaRPr lang="en-US" sz="850" dirty="0"/>
-          </a:p>
-        </p:txBody>
-      </p:sp>
-      <p:sp>
-        <p:nvSpPr>
-          <p:cNvPr id="23" name="Text 21"/>
-          <p:cNvSpPr txBox="1"/>
-          <p:nvPr/>
-        </p:nvSpPr>
-        <p:spPr>
+            <a:endParaRPr lang="en-US" sz="850"/>
+          </a:p>
+        </p:txBody>
+      </p:sp>
+      <p:sp>
+        <p:nvSpPr>
+          <p:cNvPr id="2056848636" name="Text 21"/>
+          <p:cNvSpPr txBox="1"/>
+          <p:nvPr/>
+        </p:nvSpPr>
+        <p:spPr bwMode="auto">
           <a:xfrm>
             <a:off x="1847088" y="2240280"/>
             <a:ext cx="5394960" cy="219456"/>
@@ -6147,33 +6379,34 @@
           <a:bodyPr wrap="square" rtlCol="0" anchor="ctr"/>
           <a:lstStyle/>
           <a:p>
-            <a:pPr indent="0" marL="0">
-              <a:buNone/>
-            </a:pPr>
-            <a:r>
-              <a:rPr lang="en-US" sz="750" dirty="0">
+            <a:pPr marL="0" indent="0">
+              <a:buNone/>
+              <a:defRPr/>
+            </a:pPr>
+            <a:r>
+              <a:rPr lang="en-US" sz="750">
                 <a:solidFill>
                   <a:srgbClr val="00897B"/>
                 </a:solidFill>
-                <a:latin typeface="Calibri" pitchFamily="34" charset="0"/>
-                <a:ea typeface="Calibri" pitchFamily="34" charset="-122"/>
-                <a:cs typeface="Calibri" pitchFamily="34" charset="-120"/>
+                <a:latin typeface="Calibri"/>
+                <a:ea typeface="Calibri"/>
+                <a:cs typeface="Calibri"/>
               </a:rPr>
               <a:t>✓ R3 share &lt; 30% of successful volume by Day 30</a:t>
             </a:r>
-            <a:endParaRPr lang="en-US" sz="750" dirty="0"/>
-          </a:p>
-        </p:txBody>
-      </p:sp>
-      <p:sp>
-        <p:nvSpPr>
-          <p:cNvPr id="24" name="Shape 22"/>
+            <a:endParaRPr lang="en-US" sz="750"/>
+          </a:p>
+        </p:txBody>
+      </p:sp>
+      <p:sp>
+        <p:nvSpPr>
+          <p:cNvPr id="1467310129" name="Shape 22"/>
           <p:cNvSpPr/>
           <p:nvPr/>
         </p:nvSpPr>
-        <p:spPr>
-          <a:xfrm>
-            <a:off x="6053328" y="1801368"/>
+        <p:spPr bwMode="auto">
+          <a:xfrm>
+            <a:off x="6053328" y="1801367"/>
             <a:ext cx="2852928" cy="640080"/>
           </a:xfrm>
           <a:prstGeom prst="rect">
@@ -6187,11 +6420,11 @@
       </p:sp>
       <p:sp>
         <p:nvSpPr>
-          <p:cNvPr id="25" name="Text 23"/>
-          <p:cNvSpPr txBox="1"/>
-          <p:nvPr/>
-        </p:nvSpPr>
-        <p:spPr>
+          <p:cNvPr id="1488250887" name="Text 23"/>
+          <p:cNvSpPr txBox="1"/>
+          <p:nvPr/>
+        </p:nvSpPr>
+        <p:spPr bwMode="auto">
           <a:xfrm>
             <a:off x="6126480" y="1856232"/>
             <a:ext cx="2706624" cy="512064"/>
@@ -6206,34 +6439,35 @@
           <a:bodyPr wrap="square" rtlCol="0" anchor="ctr"/>
           <a:lstStyle/>
           <a:p>
-            <a:pPr indent="0" marL="0">
+            <a:pPr marL="0" indent="0">
               <a:lnSpc>
                 <a:spcPct val="120000"/>
               </a:lnSpc>
               <a:buNone/>
-            </a:pPr>
-            <a:r>
-              <a:rPr lang="en-US" sz="850" dirty="0">
+              <a:defRPr/>
+            </a:pPr>
+            <a:r>
+              <a:rPr lang="en-US" sz="850">
                 <a:solidFill>
                   <a:srgbClr val="F4A31A"/>
                 </a:solidFill>
-                <a:latin typeface="Calibri" pitchFamily="34" charset="0"/>
-                <a:ea typeface="Calibri" pitchFamily="34" charset="-122"/>
-                <a:cs typeface="Calibri" pitchFamily="34" charset="-120"/>
+                <a:latin typeface="Calibri"/>
+                <a:ea typeface="Calibri"/>
+                <a:cs typeface="Calibri"/>
               </a:rPr>
               <a:t>⚠ Lower-cost routes may have lower success rates — monitor closely</a:t>
             </a:r>
-            <a:endParaRPr lang="en-US" sz="850" dirty="0"/>
-          </a:p>
-        </p:txBody>
-      </p:sp>
-      <p:sp>
-        <p:nvSpPr>
-          <p:cNvPr id="26" name="Shape 24"/>
+            <a:endParaRPr lang="en-US" sz="850"/>
+          </a:p>
+        </p:txBody>
+      </p:sp>
+      <p:sp>
+        <p:nvSpPr>
+          <p:cNvPr id="1924227338" name="Shape 24"/>
           <p:cNvSpPr/>
           <p:nvPr/>
         </p:nvSpPr>
-        <p:spPr>
+        <p:spPr bwMode="auto">
           <a:xfrm>
             <a:off x="228600" y="2560320"/>
             <a:ext cx="54864" cy="713232"/>
@@ -6249,11 +6483,11 @@
       </p:sp>
       <p:sp>
         <p:nvSpPr>
-          <p:cNvPr id="27" name="Shape 25"/>
+          <p:cNvPr id="90746789" name="Shape 25"/>
           <p:cNvSpPr/>
           <p:nvPr/>
         </p:nvSpPr>
-        <p:spPr>
+        <p:spPr bwMode="auto">
           <a:xfrm>
             <a:off x="301752" y="2706624"/>
             <a:ext cx="384048" cy="384048"/>
@@ -6269,11 +6503,11 @@
       </p:sp>
       <p:sp>
         <p:nvSpPr>
-          <p:cNvPr id="28" name="Text 26"/>
-          <p:cNvSpPr txBox="1"/>
-          <p:nvPr/>
-        </p:nvSpPr>
-        <p:spPr>
+          <p:cNvPr id="1792739211" name="Text 26"/>
+          <p:cNvSpPr txBox="1"/>
+          <p:nvPr/>
+        </p:nvSpPr>
+        <p:spPr bwMode="auto">
           <a:xfrm>
             <a:off x="301752" y="2706624"/>
             <a:ext cx="384048" cy="384048"/>
@@ -6288,31 +6522,32 @@
           <a:bodyPr wrap="square" lIns="0" tIns="0" rIns="0" bIns="0" rtlCol="0" anchor="ctr"/>
           <a:lstStyle/>
           <a:p>
-            <a:pPr algn="ctr" indent="0" marL="0">
-              <a:buNone/>
-            </a:pPr>
-            <a:r>
-              <a:rPr lang="en-US" sz="1200" b="1" dirty="0">
+            <a:pPr marL="0" indent="0" algn="ctr">
+              <a:buNone/>
+              <a:defRPr/>
+            </a:pPr>
+            <a:r>
+              <a:rPr lang="en-US" sz="1200" b="1">
                 <a:solidFill>
                   <a:srgbClr val="FFFFFF"/>
                 </a:solidFill>
-                <a:latin typeface="Cambria" pitchFamily="34" charset="0"/>
-                <a:ea typeface="Cambria" pitchFamily="34" charset="-122"/>
-                <a:cs typeface="Cambria" pitchFamily="34" charset="-120"/>
+                <a:latin typeface="Cambria"/>
+                <a:ea typeface="Cambria"/>
+                <a:cs typeface="Cambria"/>
               </a:rPr>
               <a:t>3</a:t>
             </a:r>
-            <a:endParaRPr lang="en-US" sz="1200" dirty="0"/>
-          </a:p>
-        </p:txBody>
-      </p:sp>
-      <p:sp>
-        <p:nvSpPr>
-          <p:cNvPr id="29" name="Shape 27"/>
+            <a:endParaRPr lang="en-US" sz="1200"/>
+          </a:p>
+        </p:txBody>
+      </p:sp>
+      <p:sp>
+        <p:nvSpPr>
+          <p:cNvPr id="667233732" name="Shape 27"/>
           <p:cNvSpPr/>
           <p:nvPr/>
         </p:nvSpPr>
-        <p:spPr>
+        <p:spPr bwMode="auto">
           <a:xfrm>
             <a:off x="768096" y="2633472"/>
             <a:ext cx="1005840" cy="292608"/>
@@ -6330,11 +6565,11 @@
       </p:sp>
       <p:sp>
         <p:nvSpPr>
-          <p:cNvPr id="30" name="Text 28"/>
-          <p:cNvSpPr txBox="1"/>
-          <p:nvPr/>
-        </p:nvSpPr>
-        <p:spPr>
+          <p:cNvPr id="555034827" name="Text 28"/>
+          <p:cNvSpPr txBox="1"/>
+          <p:nvPr/>
+        </p:nvSpPr>
+        <p:spPr bwMode="auto">
           <a:xfrm>
             <a:off x="768096" y="2633472"/>
             <a:ext cx="1005840" cy="292608"/>
@@ -6349,31 +6584,32 @@
           <a:bodyPr wrap="square" lIns="0" tIns="0" rIns="0" bIns="0" rtlCol="0" anchor="ctr"/>
           <a:lstStyle/>
           <a:p>
-            <a:pPr algn="ctr" indent="0" marL="0">
-              <a:buNone/>
-            </a:pPr>
-            <a:r>
-              <a:rPr lang="en-US" sz="900" b="1" dirty="0">
+            <a:pPr marL="0" indent="0" algn="ctr">
+              <a:buNone/>
+              <a:defRPr/>
+            </a:pPr>
+            <a:r>
+              <a:rPr lang="en-US" sz="900" b="1">
                 <a:solidFill>
                   <a:srgbClr val="FFFFFF"/>
                 </a:solidFill>
-                <a:latin typeface="Calibri" pitchFamily="34" charset="0"/>
-                <a:ea typeface="Calibri" pitchFamily="34" charset="-122"/>
-                <a:cs typeface="Calibri" pitchFamily="34" charset="-120"/>
+                <a:latin typeface="Calibri"/>
+                <a:ea typeface="Calibri"/>
+                <a:cs typeface="Calibri"/>
               </a:rPr>
               <a:t>Days 1–45</a:t>
             </a:r>
-            <a:endParaRPr lang="en-US" sz="900" dirty="0"/>
-          </a:p>
-        </p:txBody>
-      </p:sp>
-      <p:sp>
-        <p:nvSpPr>
-          <p:cNvPr id="31" name="Text 29"/>
-          <p:cNvSpPr txBox="1"/>
-          <p:nvPr/>
-        </p:nvSpPr>
-        <p:spPr>
+            <a:endParaRPr lang="en-US" sz="900"/>
+          </a:p>
+        </p:txBody>
+      </p:sp>
+      <p:sp>
+        <p:nvSpPr>
+          <p:cNvPr id="548001300" name="Text 29"/>
+          <p:cNvSpPr txBox="1"/>
+          <p:nvPr/>
+        </p:nvSpPr>
+        <p:spPr bwMode="auto">
           <a:xfrm>
             <a:off x="1847088" y="2596896"/>
             <a:ext cx="4114800" cy="292608"/>
@@ -6388,31 +6624,32 @@
           <a:bodyPr wrap="square" rtlCol="0" anchor="ctr"/>
           <a:lstStyle/>
           <a:p>
-            <a:pPr indent="0" marL="0">
-              <a:buNone/>
-            </a:pPr>
-            <a:r>
-              <a:rPr lang="en-US" sz="1050" b="1" dirty="0">
+            <a:pPr marL="0" indent="0">
+              <a:buNone/>
+              <a:defRPr/>
+            </a:pPr>
+            <a:r>
+              <a:rPr lang="en-US" sz="1050" b="1">
                 <a:solidFill>
                   <a:srgbClr val="FFFFFF"/>
                 </a:solidFill>
-                <a:latin typeface="Calibri" pitchFamily="34" charset="0"/>
-                <a:ea typeface="Calibri" pitchFamily="34" charset="-122"/>
-                <a:cs typeface="Calibri" pitchFamily="34" charset="-120"/>
+                <a:latin typeface="Calibri"/>
+                <a:ea typeface="Calibri"/>
+                <a:cs typeface="Calibri"/>
               </a:rPr>
               <a:t>Fix 8 blocking data pipeline defects (DQ report)</a:t>
             </a:r>
-            <a:endParaRPr lang="en-US" sz="1050" dirty="0"/>
-          </a:p>
-        </p:txBody>
-      </p:sp>
-      <p:sp>
-        <p:nvSpPr>
-          <p:cNvPr id="32" name="Text 30"/>
-          <p:cNvSpPr txBox="1"/>
-          <p:nvPr/>
-        </p:nvSpPr>
-        <p:spPr>
+            <a:endParaRPr lang="en-US" sz="1050"/>
+          </a:p>
+        </p:txBody>
+      </p:sp>
+      <p:sp>
+        <p:nvSpPr>
+          <p:cNvPr id="1483382233" name="Text 30"/>
+          <p:cNvSpPr txBox="1"/>
+          <p:nvPr/>
+        </p:nvSpPr>
+        <p:spPr bwMode="auto">
           <a:xfrm>
             <a:off x="1847088" y="2871216"/>
             <a:ext cx="4114800" cy="201168"/>
@@ -6427,31 +6664,32 @@
           <a:bodyPr wrap="square" rtlCol="0" anchor="ctr"/>
           <a:lstStyle/>
           <a:p>
-            <a:pPr indent="0" marL="0">
-              <a:buNone/>
-            </a:pPr>
-            <a:r>
-              <a:rPr lang="en-US" sz="850" dirty="0">
+            <a:pPr marL="0" indent="0">
+              <a:buNone/>
+              <a:defRPr/>
+            </a:pPr>
+            <a:r>
+              <a:rPr lang="en-US" sz="850">
                 <a:solidFill>
                   <a:srgbClr val="8FA0AF"/>
                 </a:solidFill>
-                <a:latin typeface="Calibri" pitchFamily="34" charset="0"/>
-                <a:ea typeface="Calibri" pitchFamily="34" charset="-122"/>
-                <a:cs typeface="Calibri" pitchFamily="34" charset="-120"/>
+                <a:latin typeface="Calibri"/>
+                <a:ea typeface="Calibri"/>
+                <a:cs typeface="Calibri"/>
               </a:rPr>
               <a:t>Owner: Data Head + Payments Engineering</a:t>
             </a:r>
-            <a:endParaRPr lang="en-US" sz="850" dirty="0"/>
-          </a:p>
-        </p:txBody>
-      </p:sp>
-      <p:sp>
-        <p:nvSpPr>
-          <p:cNvPr id="33" name="Text 31"/>
-          <p:cNvSpPr txBox="1"/>
-          <p:nvPr/>
-        </p:nvSpPr>
-        <p:spPr>
+            <a:endParaRPr lang="en-US" sz="850"/>
+          </a:p>
+        </p:txBody>
+      </p:sp>
+      <p:sp>
+        <p:nvSpPr>
+          <p:cNvPr id="220022902" name="Text 31"/>
+          <p:cNvSpPr txBox="1"/>
+          <p:nvPr/>
+        </p:nvSpPr>
+        <p:spPr bwMode="auto">
           <a:xfrm>
             <a:off x="1847088" y="3035808"/>
             <a:ext cx="5394960" cy="219456"/>
@@ -6466,31 +6704,32 @@
           <a:bodyPr wrap="square" rtlCol="0" anchor="ctr"/>
           <a:lstStyle/>
           <a:p>
-            <a:pPr indent="0" marL="0">
-              <a:buNone/>
-            </a:pPr>
-            <a:r>
-              <a:rPr lang="en-US" sz="750" dirty="0">
+            <a:pPr marL="0" indent="0">
+              <a:buNone/>
+              <a:defRPr/>
+            </a:pPr>
+            <a:r>
+              <a:rPr lang="en-US" sz="750">
                 <a:solidFill>
                   <a:srgbClr val="00897B"/>
                 </a:solidFill>
-                <a:latin typeface="Calibri" pitchFamily="34" charset="0"/>
-                <a:ea typeface="Calibri" pitchFamily="34" charset="-122"/>
-                <a:cs typeface="Calibri" pitchFamily="34" charset="-120"/>
+                <a:latin typeface="Calibri"/>
+                <a:ea typeface="Calibri"/>
+                <a:cs typeface="Calibri"/>
               </a:rPr>
               <a:t>✓ 0 Blocking DQ defects in next monthly profile run</a:t>
             </a:r>
-            <a:endParaRPr lang="en-US" sz="750" dirty="0"/>
-          </a:p>
-        </p:txBody>
-      </p:sp>
-      <p:sp>
-        <p:nvSpPr>
-          <p:cNvPr id="34" name="Shape 32"/>
+            <a:endParaRPr lang="en-US" sz="750"/>
+          </a:p>
+        </p:txBody>
+      </p:sp>
+      <p:sp>
+        <p:nvSpPr>
+          <p:cNvPr id="2052560038" name="Shape 32"/>
           <p:cNvSpPr/>
           <p:nvPr/>
         </p:nvSpPr>
-        <p:spPr>
+        <p:spPr bwMode="auto">
           <a:xfrm>
             <a:off x="6053328" y="2596896"/>
             <a:ext cx="2852928" cy="640080"/>
@@ -6506,11 +6745,11 @@
       </p:sp>
       <p:sp>
         <p:nvSpPr>
-          <p:cNvPr id="35" name="Text 33"/>
-          <p:cNvSpPr txBox="1"/>
-          <p:nvPr/>
-        </p:nvSpPr>
-        <p:spPr>
+          <p:cNvPr id="1810273324" name="Text 33"/>
+          <p:cNvSpPr txBox="1"/>
+          <p:nvPr/>
+        </p:nvSpPr>
+        <p:spPr bwMode="auto">
           <a:xfrm>
             <a:off x="6126480" y="2651760"/>
             <a:ext cx="2706624" cy="512064"/>
@@ -6525,34 +6764,35 @@
           <a:bodyPr wrap="square" rtlCol="0" anchor="ctr"/>
           <a:lstStyle/>
           <a:p>
-            <a:pPr indent="0" marL="0">
+            <a:pPr marL="0" indent="0">
               <a:lnSpc>
                 <a:spcPct val="120000"/>
               </a:lnSpc>
               <a:buNone/>
-            </a:pPr>
-            <a:r>
-              <a:rPr lang="en-US" sz="850" dirty="0">
+              <a:defRPr/>
+            </a:pPr>
+            <a:r>
+              <a:rPr lang="en-US" sz="850">
                 <a:solidFill>
                   <a:srgbClr val="F4A31A"/>
                 </a:solidFill>
-                <a:latin typeface="Calibri" pitchFamily="34" charset="0"/>
-                <a:ea typeface="Calibri" pitchFamily="34" charset="-122"/>
-                <a:cs typeface="Calibri" pitchFamily="34" charset="-120"/>
+                <a:latin typeface="Calibri"/>
+                <a:ea typeface="Calibri"/>
+                <a:cs typeface="Calibri"/>
               </a:rPr>
               <a:t>⚠ Engineering bandwidth; prioritise D09/D10/D16 first</a:t>
             </a:r>
-            <a:endParaRPr lang="en-US" sz="850" dirty="0"/>
-          </a:p>
-        </p:txBody>
-      </p:sp>
-      <p:sp>
-        <p:nvSpPr>
-          <p:cNvPr id="36" name="Shape 34"/>
+            <a:endParaRPr lang="en-US" sz="850"/>
+          </a:p>
+        </p:txBody>
+      </p:sp>
+      <p:sp>
+        <p:nvSpPr>
+          <p:cNvPr id="1862754161" name="Shape 34"/>
           <p:cNvSpPr/>
           <p:nvPr/>
         </p:nvSpPr>
-        <p:spPr>
+        <p:spPr bwMode="auto">
           <a:xfrm>
             <a:off x="228600" y="3355848"/>
             <a:ext cx="54864" cy="713232"/>
@@ -6568,11 +6808,11 @@
       </p:sp>
       <p:sp>
         <p:nvSpPr>
-          <p:cNvPr id="37" name="Shape 35"/>
+          <p:cNvPr id="146111115" name="Shape 35"/>
           <p:cNvSpPr/>
           <p:nvPr/>
         </p:nvSpPr>
-        <p:spPr>
+        <p:spPr bwMode="auto">
           <a:xfrm>
             <a:off x="301752" y="3502152"/>
             <a:ext cx="384048" cy="384048"/>
@@ -6588,11 +6828,11 @@
       </p:sp>
       <p:sp>
         <p:nvSpPr>
-          <p:cNvPr id="38" name="Text 36"/>
-          <p:cNvSpPr txBox="1"/>
-          <p:nvPr/>
-        </p:nvSpPr>
-        <p:spPr>
+          <p:cNvPr id="1883007768" name="Text 36"/>
+          <p:cNvSpPr txBox="1"/>
+          <p:nvPr/>
+        </p:nvSpPr>
+        <p:spPr bwMode="auto">
           <a:xfrm>
             <a:off x="301752" y="3502152"/>
             <a:ext cx="384048" cy="384048"/>
@@ -6607,31 +6847,32 @@
           <a:bodyPr wrap="square" lIns="0" tIns="0" rIns="0" bIns="0" rtlCol="0" anchor="ctr"/>
           <a:lstStyle/>
           <a:p>
-            <a:pPr algn="ctr" indent="0" marL="0">
-              <a:buNone/>
-            </a:pPr>
-            <a:r>
-              <a:rPr lang="en-US" sz="1200" b="1" dirty="0">
+            <a:pPr marL="0" indent="0" algn="ctr">
+              <a:buNone/>
+              <a:defRPr/>
+            </a:pPr>
+            <a:r>
+              <a:rPr lang="en-US" sz="1200" b="1">
                 <a:solidFill>
                   <a:srgbClr val="FFFFFF"/>
                 </a:solidFill>
-                <a:latin typeface="Cambria" pitchFamily="34" charset="0"/>
-                <a:ea typeface="Cambria" pitchFamily="34" charset="-122"/>
-                <a:cs typeface="Cambria" pitchFamily="34" charset="-120"/>
+                <a:latin typeface="Cambria"/>
+                <a:ea typeface="Cambria"/>
+                <a:cs typeface="Cambria"/>
               </a:rPr>
               <a:t>4</a:t>
             </a:r>
-            <a:endParaRPr lang="en-US" sz="1200" dirty="0"/>
-          </a:p>
-        </p:txBody>
-      </p:sp>
-      <p:sp>
-        <p:nvSpPr>
-          <p:cNvPr id="39" name="Shape 37"/>
+            <a:endParaRPr lang="en-US" sz="1200"/>
+          </a:p>
+        </p:txBody>
+      </p:sp>
+      <p:sp>
+        <p:nvSpPr>
+          <p:cNvPr id="621262898" name="Shape 37"/>
           <p:cNvSpPr/>
           <p:nvPr/>
         </p:nvSpPr>
-        <p:spPr>
+        <p:spPr bwMode="auto">
           <a:xfrm>
             <a:off x="768096" y="3429000"/>
             <a:ext cx="1005840" cy="292608"/>
@@ -6649,11 +6890,11 @@
       </p:sp>
       <p:sp>
         <p:nvSpPr>
-          <p:cNvPr id="40" name="Text 38"/>
-          <p:cNvSpPr txBox="1"/>
-          <p:nvPr/>
-        </p:nvSpPr>
-        <p:spPr>
+          <p:cNvPr id="20455733" name="Text 38"/>
+          <p:cNvSpPr txBox="1"/>
+          <p:nvPr/>
+        </p:nvSpPr>
+        <p:spPr bwMode="auto">
           <a:xfrm>
             <a:off x="768096" y="3429000"/>
             <a:ext cx="1005840" cy="292608"/>
@@ -6668,31 +6909,32 @@
           <a:bodyPr wrap="square" lIns="0" tIns="0" rIns="0" bIns="0" rtlCol="0" anchor="ctr"/>
           <a:lstStyle/>
           <a:p>
-            <a:pPr algn="ctr" indent="0" marL="0">
-              <a:buNone/>
-            </a:pPr>
-            <a:r>
-              <a:rPr lang="en-US" sz="900" b="1" dirty="0">
+            <a:pPr marL="0" indent="0" algn="ctr">
+              <a:buNone/>
+              <a:defRPr/>
+            </a:pPr>
+            <a:r>
+              <a:rPr lang="en-US" sz="900" b="1">
                 <a:solidFill>
                   <a:srgbClr val="FFFFFF"/>
                 </a:solidFill>
-                <a:latin typeface="Calibri" pitchFamily="34" charset="0"/>
-                <a:ea typeface="Calibri" pitchFamily="34" charset="-122"/>
-                <a:cs typeface="Calibri" pitchFamily="34" charset="-120"/>
+                <a:latin typeface="Calibri"/>
+                <a:ea typeface="Calibri"/>
+                <a:cs typeface="Calibri"/>
               </a:rPr>
               <a:t>Days 20–60</a:t>
             </a:r>
-            <a:endParaRPr lang="en-US" sz="900" dirty="0"/>
-          </a:p>
-        </p:txBody>
-      </p:sp>
-      <p:sp>
-        <p:nvSpPr>
-          <p:cNvPr id="41" name="Text 39"/>
-          <p:cNvSpPr txBox="1"/>
-          <p:nvPr/>
-        </p:nvSpPr>
-        <p:spPr>
+            <a:endParaRPr lang="en-US" sz="900"/>
+          </a:p>
+        </p:txBody>
+      </p:sp>
+      <p:sp>
+        <p:nvSpPr>
+          <p:cNvPr id="768841029" name="Text 39"/>
+          <p:cNvSpPr txBox="1"/>
+          <p:nvPr/>
+        </p:nvSpPr>
+        <p:spPr bwMode="auto">
           <a:xfrm>
             <a:off x="1847088" y="3392424"/>
             <a:ext cx="4114800" cy="292608"/>
@@ -6707,31 +6949,32 @@
           <a:bodyPr wrap="square" rtlCol="0" anchor="ctr"/>
           <a:lstStyle/>
           <a:p>
-            <a:pPr indent="0" marL="0">
-              <a:buNone/>
-            </a:pPr>
-            <a:r>
-              <a:rPr lang="en-US" sz="1050" b="1" dirty="0">
+            <a:pPr marL="0" indent="0">
+              <a:buNone/>
+              <a:defRPr/>
+            </a:pPr>
+            <a:r>
+              <a:rPr lang="en-US" sz="1050" b="1">
                 <a:solidFill>
                   <a:srgbClr val="FFFFFF"/>
                 </a:solidFill>
-                <a:latin typeface="Calibri" pitchFamily="34" charset="0"/>
-                <a:ea typeface="Calibri" pitchFamily="34" charset="-122"/>
-                <a:cs typeface="Calibri" pitchFamily="34" charset="-120"/>
+                <a:latin typeface="Calibri"/>
+                <a:ea typeface="Calibri"/>
+                <a:cs typeface="Calibri"/>
               </a:rPr>
               <a:t>Dispute prevention programme for Electronics &amp; Digital Goods</a:t>
             </a:r>
-            <a:endParaRPr lang="en-US" sz="1050" dirty="0"/>
-          </a:p>
-        </p:txBody>
-      </p:sp>
-      <p:sp>
-        <p:nvSpPr>
-          <p:cNvPr id="42" name="Text 40"/>
-          <p:cNvSpPr txBox="1"/>
-          <p:nvPr/>
-        </p:nvSpPr>
-        <p:spPr>
+            <a:endParaRPr lang="en-US" sz="1050"/>
+          </a:p>
+        </p:txBody>
+      </p:sp>
+      <p:sp>
+        <p:nvSpPr>
+          <p:cNvPr id="1638085971" name="Text 40"/>
+          <p:cNvSpPr txBox="1"/>
+          <p:nvPr/>
+        </p:nvSpPr>
+        <p:spPr bwMode="auto">
           <a:xfrm>
             <a:off x="1847088" y="3666744"/>
             <a:ext cx="4114800" cy="201168"/>
@@ -6746,31 +6989,32 @@
           <a:bodyPr wrap="square" rtlCol="0" anchor="ctr"/>
           <a:lstStyle/>
           <a:p>
-            <a:pPr indent="0" marL="0">
-              <a:buNone/>
-            </a:pPr>
-            <a:r>
-              <a:rPr lang="en-US" sz="850" dirty="0">
+            <a:pPr marL="0" indent="0">
+              <a:buNone/>
+              <a:defRPr/>
+            </a:pPr>
+            <a:r>
+              <a:rPr lang="en-US" sz="850">
                 <a:solidFill>
                   <a:srgbClr val="8FA0AF"/>
                 </a:solidFill>
-                <a:latin typeface="Calibri" pitchFamily="34" charset="0"/>
-                <a:ea typeface="Calibri" pitchFamily="34" charset="-122"/>
-                <a:cs typeface="Calibri" pitchFamily="34" charset="-120"/>
+                <a:latin typeface="Calibri"/>
+                <a:ea typeface="Calibri"/>
+                <a:cs typeface="Calibri"/>
               </a:rPr>
               <a:t>Owner: Risk Head + Merchant Success</a:t>
             </a:r>
-            <a:endParaRPr lang="en-US" sz="850" dirty="0"/>
-          </a:p>
-        </p:txBody>
-      </p:sp>
-      <p:sp>
-        <p:nvSpPr>
-          <p:cNvPr id="43" name="Text 41"/>
-          <p:cNvSpPr txBox="1"/>
-          <p:nvPr/>
-        </p:nvSpPr>
-        <p:spPr>
+            <a:endParaRPr lang="en-US" sz="850"/>
+          </a:p>
+        </p:txBody>
+      </p:sp>
+      <p:sp>
+        <p:nvSpPr>
+          <p:cNvPr id="1188949584" name="Text 41"/>
+          <p:cNvSpPr txBox="1"/>
+          <p:nvPr/>
+        </p:nvSpPr>
+        <p:spPr bwMode="auto">
           <a:xfrm>
             <a:off x="1847088" y="3831336"/>
             <a:ext cx="5394960" cy="219456"/>
@@ -6785,31 +7029,32 @@
           <a:bodyPr wrap="square" rtlCol="0" anchor="ctr"/>
           <a:lstStyle/>
           <a:p>
-            <a:pPr indent="0" marL="0">
-              <a:buNone/>
-            </a:pPr>
-            <a:r>
-              <a:rPr lang="en-US" sz="750" dirty="0">
+            <a:pPr marL="0" indent="0">
+              <a:buNone/>
+              <a:defRPr/>
+            </a:pPr>
+            <a:r>
+              <a:rPr lang="en-US" sz="750">
                 <a:solidFill>
                   <a:srgbClr val="00897B"/>
                 </a:solidFill>
-                <a:latin typeface="Calibri" pitchFamily="34" charset="0"/>
-                <a:ea typeface="Calibri" pitchFamily="34" charset="-122"/>
-                <a:cs typeface="Calibri" pitchFamily="34" charset="-120"/>
+                <a:latin typeface="Calibri"/>
+                <a:ea typeface="Calibri"/>
+                <a:cs typeface="Calibri"/>
               </a:rPr>
               <a:t>✓ Chargeback rate for Electronics ≤ baseline (Jan 2025 level)</a:t>
             </a:r>
-            <a:endParaRPr lang="en-US" sz="750" dirty="0"/>
-          </a:p>
-        </p:txBody>
-      </p:sp>
-      <p:sp>
-        <p:nvSpPr>
-          <p:cNvPr id="44" name="Shape 42"/>
+            <a:endParaRPr lang="en-US" sz="750"/>
+          </a:p>
+        </p:txBody>
+      </p:sp>
+      <p:sp>
+        <p:nvSpPr>
+          <p:cNvPr id="512590648" name="Shape 42"/>
           <p:cNvSpPr/>
           <p:nvPr/>
         </p:nvSpPr>
-        <p:spPr>
+        <p:spPr bwMode="auto">
           <a:xfrm>
             <a:off x="6053328" y="3392424"/>
             <a:ext cx="2852928" cy="640080"/>
@@ -6825,11 +7070,11 @@
       </p:sp>
       <p:sp>
         <p:nvSpPr>
-          <p:cNvPr id="45" name="Text 43"/>
-          <p:cNvSpPr txBox="1"/>
-          <p:nvPr/>
-        </p:nvSpPr>
-        <p:spPr>
+          <p:cNvPr id="772721605" name="Text 43"/>
+          <p:cNvSpPr txBox="1"/>
+          <p:nvPr/>
+        </p:nvSpPr>
+        <p:spPr bwMode="auto">
           <a:xfrm>
             <a:off x="6126480" y="3447288"/>
             <a:ext cx="2706624" cy="512064"/>
@@ -6844,34 +7089,35 @@
           <a:bodyPr wrap="square" rtlCol="0" anchor="ctr"/>
           <a:lstStyle/>
           <a:p>
-            <a:pPr indent="0" marL="0">
+            <a:pPr marL="0" indent="0">
               <a:lnSpc>
                 <a:spcPct val="120000"/>
               </a:lnSpc>
               <a:buNone/>
-            </a:pPr>
-            <a:r>
-              <a:rPr lang="en-US" sz="850" dirty="0">
+              <a:defRPr/>
+            </a:pPr>
+            <a:r>
+              <a:rPr lang="en-US" sz="850">
                 <a:solidFill>
                   <a:srgbClr val="F4A31A"/>
                 </a:solidFill>
-                <a:latin typeface="Calibri" pitchFamily="34" charset="0"/>
-                <a:ea typeface="Calibri" pitchFamily="34" charset="-122"/>
-                <a:cs typeface="Calibri" pitchFamily="34" charset="-120"/>
+                <a:latin typeface="Calibri"/>
+                <a:ea typeface="Calibri"/>
+                <a:cs typeface="Calibri"/>
               </a:rPr>
               <a:t>⚠ Chargebacks have 60-day lag — results visible in 90 days</a:t>
             </a:r>
-            <a:endParaRPr lang="en-US" sz="850" dirty="0"/>
-          </a:p>
-        </p:txBody>
-      </p:sp>
-      <p:sp>
-        <p:nvSpPr>
-          <p:cNvPr id="46" name="Shape 44"/>
+            <a:endParaRPr lang="en-US" sz="850"/>
+          </a:p>
+        </p:txBody>
+      </p:sp>
+      <p:sp>
+        <p:nvSpPr>
+          <p:cNvPr id="447353757" name="Shape 44"/>
           <p:cNvSpPr/>
           <p:nvPr/>
         </p:nvSpPr>
-        <p:spPr>
+        <p:spPr bwMode="auto">
           <a:xfrm>
             <a:off x="228600" y="4151376"/>
             <a:ext cx="54864" cy="713232"/>
@@ -6887,11 +7133,11 @@
       </p:sp>
       <p:sp>
         <p:nvSpPr>
-          <p:cNvPr id="47" name="Shape 45"/>
+          <p:cNvPr id="670408339" name="Shape 45"/>
           <p:cNvSpPr/>
           <p:nvPr/>
         </p:nvSpPr>
-        <p:spPr>
+        <p:spPr bwMode="auto">
           <a:xfrm>
             <a:off x="301752" y="4297680"/>
             <a:ext cx="384048" cy="384048"/>
@@ -6907,11 +7153,11 @@
       </p:sp>
       <p:sp>
         <p:nvSpPr>
-          <p:cNvPr id="48" name="Text 46"/>
-          <p:cNvSpPr txBox="1"/>
-          <p:nvPr/>
-        </p:nvSpPr>
-        <p:spPr>
+          <p:cNvPr id="1219078740" name="Text 46"/>
+          <p:cNvSpPr txBox="1"/>
+          <p:nvPr/>
+        </p:nvSpPr>
+        <p:spPr bwMode="auto">
           <a:xfrm>
             <a:off x="301752" y="4297680"/>
             <a:ext cx="384048" cy="384048"/>
@@ -6926,31 +7172,32 @@
           <a:bodyPr wrap="square" lIns="0" tIns="0" rIns="0" bIns="0" rtlCol="0" anchor="ctr"/>
           <a:lstStyle/>
           <a:p>
-            <a:pPr algn="ctr" indent="0" marL="0">
-              <a:buNone/>
-            </a:pPr>
-            <a:r>
-              <a:rPr lang="en-US" sz="1200" b="1" dirty="0">
+            <a:pPr marL="0" indent="0" algn="ctr">
+              <a:buNone/>
+              <a:defRPr/>
+            </a:pPr>
+            <a:r>
+              <a:rPr lang="en-US" sz="1200" b="1">
                 <a:solidFill>
                   <a:srgbClr val="FFFFFF"/>
                 </a:solidFill>
-                <a:latin typeface="Cambria" pitchFamily="34" charset="0"/>
-                <a:ea typeface="Cambria" pitchFamily="34" charset="-122"/>
-                <a:cs typeface="Cambria" pitchFamily="34" charset="-120"/>
+                <a:latin typeface="Cambria"/>
+                <a:ea typeface="Cambria"/>
+                <a:cs typeface="Cambria"/>
               </a:rPr>
               <a:t>5</a:t>
             </a:r>
-            <a:endParaRPr lang="en-US" sz="1200" dirty="0"/>
-          </a:p>
-        </p:txBody>
-      </p:sp>
-      <p:sp>
-        <p:nvSpPr>
-          <p:cNvPr id="49" name="Shape 47"/>
+            <a:endParaRPr lang="en-US" sz="1200"/>
+          </a:p>
+        </p:txBody>
+      </p:sp>
+      <p:sp>
+        <p:nvSpPr>
+          <p:cNvPr id="1382640492" name="Shape 47"/>
           <p:cNvSpPr/>
           <p:nvPr/>
         </p:nvSpPr>
-        <p:spPr>
+        <p:spPr bwMode="auto">
           <a:xfrm>
             <a:off x="768096" y="4224528"/>
             <a:ext cx="1005840" cy="292608"/>
@@ -6968,11 +7215,11 @@
       </p:sp>
       <p:sp>
         <p:nvSpPr>
-          <p:cNvPr id="50" name="Text 48"/>
-          <p:cNvSpPr txBox="1"/>
-          <p:nvPr/>
-        </p:nvSpPr>
-        <p:spPr>
+          <p:cNvPr id="374201551" name="Text 48"/>
+          <p:cNvSpPr txBox="1"/>
+          <p:nvPr/>
+        </p:nvSpPr>
+        <p:spPr bwMode="auto">
           <a:xfrm>
             <a:off x="768096" y="4224528"/>
             <a:ext cx="1005840" cy="292608"/>
@@ -6987,31 +7234,32 @@
           <a:bodyPr wrap="square" lIns="0" tIns="0" rIns="0" bIns="0" rtlCol="0" anchor="ctr"/>
           <a:lstStyle/>
           <a:p>
-            <a:pPr algn="ctr" indent="0" marL="0">
-              <a:buNone/>
-            </a:pPr>
-            <a:r>
-              <a:rPr lang="en-US" sz="900" b="1" dirty="0">
+            <a:pPr marL="0" indent="0" algn="ctr">
+              <a:buNone/>
+              <a:defRPr/>
+            </a:pPr>
+            <a:r>
+              <a:rPr lang="en-US" sz="900" b="1">
                 <a:solidFill>
                   <a:srgbClr val="FFFFFF"/>
                 </a:solidFill>
-                <a:latin typeface="Calibri" pitchFamily="34" charset="0"/>
-                <a:ea typeface="Calibri" pitchFamily="34" charset="-122"/>
-                <a:cs typeface="Calibri" pitchFamily="34" charset="-120"/>
+                <a:latin typeface="Calibri"/>
+                <a:ea typeface="Calibri"/>
+                <a:cs typeface="Calibri"/>
               </a:rPr>
               <a:t>Days 30–60</a:t>
             </a:r>
-            <a:endParaRPr lang="en-US" sz="900" dirty="0"/>
-          </a:p>
-        </p:txBody>
-      </p:sp>
-      <p:sp>
-        <p:nvSpPr>
-          <p:cNvPr id="51" name="Text 49"/>
-          <p:cNvSpPr txBox="1"/>
-          <p:nvPr/>
-        </p:nvSpPr>
-        <p:spPr>
+            <a:endParaRPr lang="en-US" sz="900"/>
+          </a:p>
+        </p:txBody>
+      </p:sp>
+      <p:sp>
+        <p:nvSpPr>
+          <p:cNvPr id="650616833" name="Text 49"/>
+          <p:cNvSpPr txBox="1"/>
+          <p:nvPr/>
+        </p:nvSpPr>
+        <p:spPr bwMode="auto">
           <a:xfrm>
             <a:off x="1847088" y="4187952"/>
             <a:ext cx="4114800" cy="292608"/>
@@ -7026,31 +7274,32 @@
           <a:bodyPr wrap="square" rtlCol="0" anchor="ctr"/>
           <a:lstStyle/>
           <a:p>
-            <a:pPr indent="0" marL="0">
-              <a:buNone/>
-            </a:pPr>
-            <a:r>
-              <a:rPr lang="en-US" sz="1050" b="1" dirty="0">
+            <a:pPr marL="0" indent="0">
+              <a:buNone/>
+              <a:defRPr/>
+            </a:pPr>
+            <a:r>
+              <a:rPr lang="en-US" sz="1050" b="1">
                 <a:solidFill>
                   <a:srgbClr val="FFFFFF"/>
                 </a:solidFill>
-                <a:latin typeface="Calibri" pitchFamily="34" charset="0"/>
-                <a:ea typeface="Calibri" pitchFamily="34" charset="-122"/>
-                <a:cs typeface="Calibri" pitchFamily="34" charset="-120"/>
+                <a:latin typeface="Calibri"/>
+                <a:ea typeface="Calibri"/>
+                <a:cs typeface="Calibri"/>
               </a:rPr>
               <a:t>Review fraud model v4.0-beta; evaluate rollback for High-risk tier</a:t>
             </a:r>
-            <a:endParaRPr lang="en-US" sz="1050" dirty="0"/>
-          </a:p>
-        </p:txBody>
-      </p:sp>
-      <p:sp>
-        <p:nvSpPr>
-          <p:cNvPr id="52" name="Text 50"/>
-          <p:cNvSpPr txBox="1"/>
-          <p:nvPr/>
-        </p:nvSpPr>
-        <p:spPr>
+            <a:endParaRPr lang="en-US" sz="1050"/>
+          </a:p>
+        </p:txBody>
+      </p:sp>
+      <p:sp>
+        <p:nvSpPr>
+          <p:cNvPr id="1386824115" name="Text 50"/>
+          <p:cNvSpPr txBox="1"/>
+          <p:nvPr/>
+        </p:nvSpPr>
+        <p:spPr bwMode="auto">
           <a:xfrm>
             <a:off x="1847088" y="4462272"/>
             <a:ext cx="4114800" cy="201168"/>
@@ -7065,31 +7314,32 @@
           <a:bodyPr wrap="square" rtlCol="0" anchor="ctr"/>
           <a:lstStyle/>
           <a:p>
-            <a:pPr indent="0" marL="0">
-              <a:buNone/>
-            </a:pPr>
-            <a:r>
-              <a:rPr lang="en-US" sz="850" dirty="0">
+            <a:pPr marL="0" indent="0">
+              <a:buNone/>
+              <a:defRPr/>
+            </a:pPr>
+            <a:r>
+              <a:rPr lang="en-US" sz="850">
                 <a:solidFill>
                   <a:srgbClr val="8FA0AF"/>
                 </a:solidFill>
-                <a:latin typeface="Calibri" pitchFamily="34" charset="0"/>
-                <a:ea typeface="Calibri" pitchFamily="34" charset="-122"/>
-                <a:cs typeface="Calibri" pitchFamily="34" charset="-120"/>
+                <a:latin typeface="Calibri"/>
+                <a:ea typeface="Calibri"/>
+                <a:cs typeface="Calibri"/>
               </a:rPr>
               <a:t>Owner: Risk Head</a:t>
             </a:r>
-            <a:endParaRPr lang="en-US" sz="850" dirty="0"/>
-          </a:p>
-        </p:txBody>
-      </p:sp>
-      <p:sp>
-        <p:nvSpPr>
-          <p:cNvPr id="53" name="Text 51"/>
-          <p:cNvSpPr txBox="1"/>
-          <p:nvPr/>
-        </p:nvSpPr>
-        <p:spPr>
+            <a:endParaRPr lang="en-US" sz="850"/>
+          </a:p>
+        </p:txBody>
+      </p:sp>
+      <p:sp>
+        <p:nvSpPr>
+          <p:cNvPr id="1271806048" name="Text 51"/>
+          <p:cNvSpPr txBox="1"/>
+          <p:nvPr/>
+        </p:nvSpPr>
+        <p:spPr bwMode="auto">
           <a:xfrm>
             <a:off x="1847088" y="4626864"/>
             <a:ext cx="5394960" cy="219456"/>
@@ -7104,31 +7354,32 @@
           <a:bodyPr wrap="square" rtlCol="0" anchor="ctr"/>
           <a:lstStyle/>
           <a:p>
-            <a:pPr indent="0" marL="0">
-              <a:buNone/>
-            </a:pPr>
-            <a:r>
-              <a:rPr lang="en-US" sz="750" dirty="0">
+            <a:pPr marL="0" indent="0">
+              <a:buNone/>
+              <a:defRPr/>
+            </a:pPr>
+            <a:r>
+              <a:rPr lang="en-US" sz="750">
                 <a:solidFill>
                   <a:srgbClr val="00897B"/>
                 </a:solidFill>
-                <a:latin typeface="Calibri" pitchFamily="34" charset="0"/>
-                <a:ea typeface="Calibri" pitchFamily="34" charset="-122"/>
-                <a:cs typeface="Calibri" pitchFamily="34" charset="-120"/>
+                <a:latin typeface="Calibri"/>
+                <a:ea typeface="Calibri"/>
+                <a:cs typeface="Calibri"/>
               </a:rPr>
               <a:t>✓ High-risk decline rate returning to &lt;10% with no fraud rate increase</a:t>
             </a:r>
-            <a:endParaRPr lang="en-US" sz="750" dirty="0"/>
-          </a:p>
-        </p:txBody>
-      </p:sp>
-      <p:sp>
-        <p:nvSpPr>
-          <p:cNvPr id="54" name="Shape 52"/>
+            <a:endParaRPr lang="en-US" sz="750"/>
+          </a:p>
+        </p:txBody>
+      </p:sp>
+      <p:sp>
+        <p:nvSpPr>
+          <p:cNvPr id="293138996" name="Shape 52"/>
           <p:cNvSpPr/>
           <p:nvPr/>
         </p:nvSpPr>
-        <p:spPr>
+        <p:spPr bwMode="auto">
           <a:xfrm>
             <a:off x="6053328" y="4187952"/>
             <a:ext cx="2852928" cy="640080"/>
@@ -7144,11 +7395,11 @@
       </p:sp>
       <p:sp>
         <p:nvSpPr>
-          <p:cNvPr id="55" name="Text 53"/>
-          <p:cNvSpPr txBox="1"/>
-          <p:nvPr/>
-        </p:nvSpPr>
-        <p:spPr>
+          <p:cNvPr id="21125314" name="Text 53"/>
+          <p:cNvSpPr txBox="1"/>
+          <p:nvPr/>
+        </p:nvSpPr>
+        <p:spPr bwMode="auto">
           <a:xfrm>
             <a:off x="6126480" y="4242816"/>
             <a:ext cx="2706624" cy="512064"/>
@@ -7163,34 +7414,35 @@
           <a:bodyPr wrap="square" rtlCol="0" anchor="ctr"/>
           <a:lstStyle/>
           <a:p>
-            <a:pPr indent="0" marL="0">
+            <a:pPr marL="0" indent="0">
               <a:lnSpc>
                 <a:spcPct val="120000"/>
               </a:lnSpc>
               <a:buNone/>
-            </a:pPr>
-            <a:r>
-              <a:rPr lang="en-US" sz="850" dirty="0">
+              <a:defRPr/>
+            </a:pPr>
+            <a:r>
+              <a:rPr lang="en-US" sz="850">
                 <a:solidFill>
                   <a:srgbClr val="F4A31A"/>
                 </a:solidFill>
-                <a:latin typeface="Calibri" pitchFamily="34" charset="0"/>
-                <a:ea typeface="Calibri" pitchFamily="34" charset="-122"/>
-                <a:cs typeface="Calibri" pitchFamily="34" charset="-120"/>
+                <a:latin typeface="Calibri"/>
+                <a:ea typeface="Calibri"/>
+                <a:cs typeface="Calibri"/>
               </a:rPr>
               <a:t>⚠ Rolling back may increase actual fraud — needs A/B test not a full rollback</a:t>
             </a:r>
-            <a:endParaRPr lang="en-US" sz="850" dirty="0"/>
-          </a:p>
-        </p:txBody>
-      </p:sp>
-      <p:sp>
-        <p:nvSpPr>
-          <p:cNvPr id="56" name="Shape 54"/>
+            <a:endParaRPr lang="en-US" sz="850"/>
+          </a:p>
+        </p:txBody>
+      </p:sp>
+      <p:sp>
+        <p:nvSpPr>
+          <p:cNvPr id="1207277482" name="Shape 54"/>
           <p:cNvSpPr/>
           <p:nvPr/>
         </p:nvSpPr>
-        <p:spPr>
+        <p:spPr bwMode="auto">
           <a:xfrm>
             <a:off x="0" y="4828032"/>
             <a:ext cx="9144000" cy="310896"/>
@@ -7206,11 +7458,11 @@
       </p:sp>
       <p:sp>
         <p:nvSpPr>
-          <p:cNvPr id="57" name="Text 55"/>
-          <p:cNvSpPr txBox="1"/>
-          <p:nvPr/>
-        </p:nvSpPr>
-        <p:spPr>
+          <p:cNvPr id="581368139" name="Text 55"/>
+          <p:cNvSpPr txBox="1"/>
+          <p:nvPr/>
+        </p:nvSpPr>
+        <p:spPr bwMode="auto">
           <a:xfrm>
             <a:off x="274320" y="4846320"/>
             <a:ext cx="8595360" cy="237744"/>
@@ -7225,21 +7477,22 @@
           <a:bodyPr wrap="square" rtlCol="0" anchor="ctr"/>
           <a:lstStyle/>
           <a:p>
-            <a:pPr indent="0" marL="0">
-              <a:buNone/>
-            </a:pPr>
-            <a:r>
-              <a:rPr lang="en-US" sz="800" b="1" dirty="0">
+            <a:pPr marL="0" indent="0">
+              <a:buNone/>
+              <a:defRPr/>
+            </a:pPr>
+            <a:r>
+              <a:rPr lang="en-US" sz="800" b="1">
                 <a:solidFill>
                   <a:srgbClr val="00897B"/>
                 </a:solidFill>
-                <a:latin typeface="Calibri" pitchFamily="34" charset="0"/>
-                <a:ea typeface="Calibri" pitchFamily="34" charset="-122"/>
-                <a:cs typeface="Calibri" pitchFamily="34" charset="-120"/>
+                <a:latin typeface="Calibri"/>
+                <a:ea typeface="Calibri"/>
+                <a:cs typeface="Calibri"/>
               </a:rPr>
               <a:t>Data trust (DQ fixes) must be resolved before next reporting cycle — without it, none of these actions can be measured reliably.</a:t>
             </a:r>
-            <a:endParaRPr lang="en-US" sz="800" dirty="0"/>
+            <a:endParaRPr lang="en-US" sz="800"/>
           </a:p>
         </p:txBody>
       </p:sp>
@@ -7248,11 +7501,19 @@
   <p:clrMapOvr>
     <a:masterClrMapping/>
   </p:clrMapOvr>
+  <mc:AlternateContent xmlns:mc="http://schemas.openxmlformats.org/markup-compatibility/2006">
+    <mc:Choice xmlns:p159="http://schemas.microsoft.com/office/powerpoint/2015/09/main" xmlns:p14="http://schemas.microsoft.com/office/powerpoint/2010/main" Requires="p159">
+      <p:transition p14:dur="500" advClick="1"/>
+    </mc:Choice>
+    <mc:Fallback>
+      <p:transition advClick="1"/>
+    </mc:Fallback>
+  </mc:AlternateContent>
 </p:sld>
 </file>
 
 <file path=ppt/theme/theme1.xml><?xml version="1.0" encoding="utf-8"?>
-<a:theme xmlns:a="http://schemas.openxmlformats.org/drawingml/2006/main" name="Office Theme">
+<a:theme xmlns:a="http://schemas.openxmlformats.org/drawingml/2006/main" xmlns:r="http://schemas.openxmlformats.org/officeDocument/2006/relationships" xmlns:p="http://schemas.openxmlformats.org/presentationml/2006/main" name="Office Theme">
   <a:themeElements>
     <a:clrScheme name="Office">
       <a:dk1>
@@ -7294,108 +7555,14 @@
     </a:clrScheme>
     <a:fontScheme name="Office">
       <a:majorFont>
-        <a:latin typeface="Calibri Light" panose="020F0302020204030204"/>
-        <a:ea typeface=""/>
-        <a:cs typeface=""/>
-        <a:font script="Jpan" typeface="游ゴシック Light"/>
-        <a:font script="Hang" typeface="맑은 고딕"/>
-        <a:font script="Hans" typeface="等线 Light"/>
-        <a:font script="Hant" typeface="新細明體"/>
-        <a:font script="Arab" typeface="Times New Roman"/>
-        <a:font script="Hebr" typeface="Times New Roman"/>
-        <a:font script="Thai" typeface="Angsana New"/>
-        <a:font script="Ethi" typeface="Nyala"/>
-        <a:font script="Beng" typeface="Vrinda"/>
-        <a:font script="Gujr" typeface="Shruti"/>
-        <a:font script="Khmr" typeface="MoolBoran"/>
-        <a:font script="Knda" typeface="Tunga"/>
-        <a:font script="Guru" typeface="Raavi"/>
-        <a:font script="Cans" typeface="Euphemia"/>
-        <a:font script="Cher" typeface="Plantagenet Cherokee"/>
-        <a:font script="Yiii" typeface="Microsoft Yi Baiti"/>
-        <a:font script="Tibt" typeface="Microsoft Himalaya"/>
-        <a:font script="Thaa" typeface="MV Boli"/>
-        <a:font script="Deva" typeface="Mangal"/>
-        <a:font script="Telu" typeface="Gautami"/>
-        <a:font script="Taml" typeface="Latha"/>
-        <a:font script="Syrc" typeface="Estrangelo Edessa"/>
-        <a:font script="Orya" typeface="Kalinga"/>
-        <a:font script="Mlym" typeface="Kartika"/>
-        <a:font script="Laoo" typeface="DokChampa"/>
-        <a:font script="Sinh" typeface="Iskoola Pota"/>
-        <a:font script="Mong" typeface="Mongolian Baiti"/>
-        <a:font script="Viet" typeface="Times New Roman"/>
-        <a:font script="Uigh" typeface="Microsoft Uighur"/>
-        <a:font script="Geor" typeface="Sylfaen"/>
-        <a:font script="Armn" typeface="Arial"/>
-        <a:font script="Bugi" typeface="Leelawadee UI"/>
-        <a:font script="Bopo" typeface="Microsoft JhengHei"/>
-        <a:font script="Java" typeface="Javanese Text"/>
-        <a:font script="Lisu" typeface="Segoe UI"/>
-        <a:font script="Mymr" typeface="Myanmar Text"/>
-        <a:font script="Nkoo" typeface="Ebrima"/>
-        <a:font script="Olck" typeface="Nirmala UI"/>
-        <a:font script="Osma" typeface="Ebrima"/>
-        <a:font script="Phag" typeface="Phagspa"/>
-        <a:font script="Syrn" typeface="Estrangelo Edessa"/>
-        <a:font script="Syrj" typeface="Estrangelo Edessa"/>
-        <a:font script="Syre" typeface="Estrangelo Edessa"/>
-        <a:font script="Sora" typeface="Nirmala UI"/>
-        <a:font script="Tale" typeface="Microsoft Tai Le"/>
-        <a:font script="Talu" typeface="Microsoft New Tai Lue"/>
-        <a:font script="Tfng" typeface="Ebrima"/>
+        <a:latin typeface="Calibri Light"/>
+        <a:ea typeface="Arial"/>
+        <a:cs typeface="Arial"/>
       </a:majorFont>
       <a:minorFont>
-        <a:latin typeface="Calibri" panose="020F0502020204030204"/>
-        <a:ea typeface=""/>
-        <a:cs typeface=""/>
-        <a:font script="Jpan" typeface="游ゴシック"/>
-        <a:font script="Hang" typeface="맑은 고딕"/>
-        <a:font script="Hans" typeface="等线"/>
-        <a:font script="Hant" typeface="新細明體"/>
-        <a:font script="Arab" typeface="Arial"/>
-        <a:font script="Hebr" typeface="Arial"/>
-        <a:font script="Thai" typeface="Cordia New"/>
-        <a:font script="Ethi" typeface="Nyala"/>
-        <a:font script="Beng" typeface="Vrinda"/>
-        <a:font script="Gujr" typeface="Shruti"/>
-        <a:font script="Khmr" typeface="DaunPenh"/>
-        <a:font script="Knda" typeface="Tunga"/>
-        <a:font script="Guru" typeface="Raavi"/>
-        <a:font script="Cans" typeface="Euphemia"/>
-        <a:font script="Cher" typeface="Plantagenet Cherokee"/>
-        <a:font script="Yiii" typeface="Microsoft Yi Baiti"/>
-        <a:font script="Tibt" typeface="Microsoft Himalaya"/>
-        <a:font script="Thaa" typeface="MV Boli"/>
-        <a:font script="Deva" typeface="Mangal"/>
-        <a:font script="Telu" typeface="Gautami"/>
-        <a:font script="Taml" typeface="Latha"/>
-        <a:font script="Syrc" typeface="Estrangelo Edessa"/>
-        <a:font script="Orya" typeface="Kalinga"/>
-        <a:font script="Mlym" typeface="Kartika"/>
-        <a:font script="Laoo" typeface="DokChampa"/>
-        <a:font script="Sinh" typeface="Iskoola Pota"/>
-        <a:font script="Mong" typeface="Mongolian Baiti"/>
-        <a:font script="Viet" typeface="Arial"/>
-        <a:font script="Uigh" typeface="Microsoft Uighur"/>
-        <a:font script="Geor" typeface="Sylfaen"/>
-        <a:font script="Armn" typeface="Arial"/>
-        <a:font script="Bugi" typeface="Leelawadee UI"/>
-        <a:font script="Bopo" typeface="Microsoft JhengHei"/>
-        <a:font script="Java" typeface="Javanese Text"/>
-        <a:font script="Lisu" typeface="Segoe UI"/>
-        <a:font script="Mymr" typeface="Myanmar Text"/>
-        <a:font script="Nkoo" typeface="Ebrima"/>
-        <a:font script="Olck" typeface="Nirmala UI"/>
-        <a:font script="Osma" typeface="Ebrima"/>
-        <a:font script="Phag" typeface="Phagspa"/>
-        <a:font script="Syrn" typeface="Estrangelo Edessa"/>
-        <a:font script="Syrj" typeface="Estrangelo Edessa"/>
-        <a:font script="Syre" typeface="Estrangelo Edessa"/>
-        <a:font script="Sora" typeface="Nirmala UI"/>
-        <a:font script="Tale" typeface="Microsoft Tai Le"/>
-        <a:font script="Talu" typeface="Microsoft New Tai Lue"/>
-        <a:font script="Tfng" typeface="Ebrima"/>
+        <a:latin typeface="Calibri"/>
+        <a:ea typeface="Arial"/>
+        <a:cs typeface="Arial"/>
       </a:minorFont>
     </a:fontScheme>
     <a:fmtScheme name="Office">
@@ -7403,7 +7570,7 @@
         <a:solidFill>
           <a:schemeClr val="phClr"/>
         </a:solidFill>
-        <a:gradFill rotWithShape="1">
+        <a:gradFill>
           <a:gsLst>
             <a:gs pos="0">
               <a:schemeClr val="phClr">
@@ -7429,7 +7596,7 @@
           </a:gsLst>
           <a:lin ang="5400000" scaled="0"/>
         </a:gradFill>
-        <a:gradFill rotWithShape="1">
+        <a:gradFill>
           <a:gsLst>
             <a:gs pos="0">
               <a:schemeClr val="phClr">
@@ -7506,7 +7673,7 @@
             <a:satMod val="170000"/>
           </a:schemeClr>
         </a:solidFill>
-        <a:gradFill rotWithShape="1">
+        <a:gradFill>
           <a:gsLst>
             <a:gs pos="0">
               <a:schemeClr val="phClr">
@@ -7537,11 +7704,5 @@
     </a:fmtScheme>
   </a:themeElements>
   <a:objectDefaults/>
-  <a:extraClrSchemeLst/>
-  <a:extLst>
-    <a:ext uri="{05A4C25C-085E-4340-85A3-A5531E510DB2}">
-      <thm15:themeFamily xmlns:thm15="http://schemas.microsoft.com/office/thememl/2012/main" name="Office Theme" id="{62F939B6-93AF-4DB8-9C6B-D6C7DFDC589F}" vid="{4A3C46E8-61CC-4603-A589-7422A47A8E4A}"/>
-    </a:ext>
-  </a:extLst>
 </a:theme>
 </file>